--- a/docs/presentations/MedSim-Eval-overview.pptx
+++ b/docs/presentations/MedSim-Eval-overview.pptx
@@ -114,13 +114,13 @@
   <p:extLst>
     <p:ext uri="{521415D9-36F7-43E2-AB2F-B90AF26B5E84}">
       <p14:sectionLst xmlns:p14="http://schemas.microsoft.com/office/powerpoint/2010/main">
-        <p14:section name="Introduction" id="{218b6d75-7eba-7504-97fd-6799c9d285e2}">
+        <p14:section name="Introduction" id="{74e372ad-58a1-2af8-802d-f6d862456454}">
           <p14:sldIdLst>
             <p14:sldId id="256"/>
             <p14:sldId id="257"/>
           </p14:sldIdLst>
         </p14:section>
-        <p14:section name="How it works" id="{d62cfa7d-77d0-53bc-a347-b4c080247995}">
+        <p14:section name="How it works" id="{7c36ede4-c70f-a52f-64be-cbb48784ba8b}">
           <p14:sldIdLst>
             <p14:sldId id="258"/>
             <p14:sldId id="259"/>
@@ -128,7 +128,7 @@
             <p14:sldId id="261"/>
           </p14:sldIdLst>
         </p14:section>
-        <p14:section name="Example and status" id="{53df3ac8-805f-40d5-de5a-ffdfab78498d}">
+        <p14:section name="Example and status" id="{1c56766e-b41c-6249-a1c3-1810bc124291}">
           <p14:sldIdLst>
             <p14:sldId id="262"/>
             <p14:sldId id="263"/>
@@ -3548,7 +3548,7 @@
                   <a:schemeClr val="tx2"/>
                 </a:solidFill>
               </a:rPr>
-              <a:t>Static question sets miss what a CMO faces</a:t>
+              <a:t>Why one-off test questions aren't enough</a:t>
             </a:r>
             <a:endParaRPr lang="en-US" sz="3400" dirty="0"/>
           </a:p>
@@ -6059,7 +6059,7 @@
                   <a:schemeClr val="tx2"/>
                 </a:solidFill>
               </a:rPr>
-              <a:t>Each case runs 8 times, in different worlds</a:t>
+              <a:t>Each case runs 8 times, in 3 mission settings</a:t>
             </a:r>
             <a:endParaRPr lang="en-US" sz="3400" dirty="0"/>
           </a:p>

--- a/docs/presentations/MedSim-Eval-overview.pptx
+++ b/docs/presentations/MedSim-Eval-overview.pptx
@@ -13,9 +13,10 @@
     <p:sldId id="261" r:id="rId7"/>
     <p:sldId id="262" r:id="rId8"/>
     <p:sldId id="263" r:id="rId9"/>
+    <p:sldId id="264" r:id="rId10"/>
   </p:sldIdLst>
   <p:notesMasterIdLst>
-    <p:notesMasterId r:id="rId10"/>
+    <p:notesMasterId r:id="rId11"/>
   </p:notesMasterIdLst>
   <p:sldSz cx="12192000" cy="6858000"/>
   <p:notesSz cx="6858000" cy="12192000"/>
@@ -114,13 +115,13 @@
   <p:extLst>
     <p:ext uri="{521415D9-36F7-43E2-AB2F-B90AF26B5E84}">
       <p14:sectionLst xmlns:p14="http://schemas.microsoft.com/office/powerpoint/2010/main">
-        <p14:section name="Introduction" id="{74e372ad-58a1-2af8-802d-f6d862456454}">
+        <p14:section name="Introduction" id="{cbbe6b38-71f3-8c57-11f5-8e1bba4db437}">
           <p14:sldIdLst>
             <p14:sldId id="256"/>
             <p14:sldId id="257"/>
           </p14:sldIdLst>
         </p14:section>
-        <p14:section name="How it works" id="{7c36ede4-c70f-a52f-64be-cbb48784ba8b}">
+        <p14:section name="How it works" id="{4c722572-8674-a30c-680c-6c6fb69a6f06}">
           <p14:sldIdLst>
             <p14:sldId id="258"/>
             <p14:sldId id="259"/>
@@ -128,10 +129,15 @@
             <p14:sldId id="261"/>
           </p14:sldIdLst>
         </p14:section>
-        <p14:section name="Example and status" id="{1c56766e-b41c-6249-a1c3-1810bc124291}">
+        <p14:section name="Example" id="{a0bc8f79-34db-4789-a398-b9ef6dec7af8}">
           <p14:sldIdLst>
             <p14:sldId id="262"/>
+          </p14:sldIdLst>
+        </p14:section>
+        <p14:section name="Plan of work" id="{358863e9-d634-aebd-3335-6b3cd5d6a86d}">
+          <p14:sldIdLst>
             <p14:sldId id="263"/>
+            <p14:sldId id="264"/>
           </p14:sldIdLst>
         </p14:section>
       </p14:sectionLst>
@@ -2450,6 +2456,94 @@
             <a:fld id="{F7021451-1387-4CA6-816F-3879F97B5CBC}" type="slidenum">
               <a:rPr lang="en-US"/>
               <a:t>8</a:t>
+            </a:fld>
+            <a:endParaRPr lang="en-US"/>
+          </a:p>
+        </p:txBody>
+      </p:sp>
+    </p:spTree>
+    <p:extLst>
+      <p:ext uri="{BB962C8B-B14F-4D97-AF65-F5344CB8AC3E}">
+        <p14:creationId xmlns:p14="http://schemas.microsoft.com/office/powerpoint/2010/main" val="1024086991"/>
+      </p:ext>
+    </p:extLst>
+  </p:cSld>
+  <p:clrMapOvr>
+    <a:masterClrMapping/>
+  </p:clrMapOvr>
+</p:notes>
+</file>
+
+<file path=ppt/notesSlides/notesSlide9.xml><?xml version="1.0" encoding="utf-8"?>
+<p:notes xmlns:a="http://schemas.openxmlformats.org/drawingml/2006/main" xmlns:r="http://schemas.openxmlformats.org/officeDocument/2006/relationships" xmlns:p="http://schemas.openxmlformats.org/presentationml/2006/main">
+  <p:cSld>
+    <p:spTree>
+      <p:nvGrpSpPr>
+        <p:cNvPr id="1" name=""/>
+        <p:cNvGrpSpPr/>
+        <p:nvPr/>
+      </p:nvGrpSpPr>
+      <p:grpSpPr>
+        <a:xfrm>
+          <a:off x="0" y="0"/>
+          <a:ext cx="0" cy="0"/>
+          <a:chOff x="0" y="0"/>
+          <a:chExt cx="0" cy="0"/>
+        </a:xfrm>
+      </p:grpSpPr>
+      <p:sp>
+        <p:nvSpPr>
+          <p:cNvPr id="2" name="Slide Image Placeholder 1"/>
+          <p:cNvSpPr>
+            <a:spLocks noGrp="1" noRot="1" noChangeAspect="1"/>
+          </p:cNvSpPr>
+          <p:nvPr>
+            <p:ph type="sldImg"/>
+          </p:nvPr>
+        </p:nvSpPr>
+        <p:spPr/>
+      </p:sp>
+      <p:sp>
+        <p:nvSpPr>
+          <p:cNvPr id="3" name="Notes Placeholder 2"/>
+          <p:cNvSpPr>
+            <a:spLocks noGrp="1"/>
+          </p:cNvSpPr>
+          <p:nvPr>
+            <p:ph type="body" idx="1"/>
+          </p:nvPr>
+        </p:nvSpPr>
+        <p:spPr/>
+        <p:txBody>
+          <a:bodyPr/>
+          <a:lstStyle/>
+          <a:p>
+            <a:r>
+              <a:rPr lang="en-US" dirty="0"/>
+              <a:t/>
+            </a:r>
+            <a:endParaRPr lang="en-US" dirty="0"/>
+          </a:p>
+        </p:txBody>
+      </p:sp>
+      <p:sp>
+        <p:nvSpPr>
+          <p:cNvPr id="4" name="Slide Number Placeholder 3"/>
+          <p:cNvSpPr>
+            <a:spLocks noGrp="1"/>
+          </p:cNvSpPr>
+          <p:nvPr>
+            <p:ph type="sldNum" sz="quarter" idx="10"/>
+          </p:nvPr>
+        </p:nvSpPr>
+        <p:spPr/>
+        <p:txBody>
+          <a:bodyPr/>
+          <a:lstStyle/>
+          <a:p>
+            <a:fld id="{F7021451-1387-4CA6-816F-3879F97B5CBC}" type="slidenum">
+              <a:rPr lang="en-US"/>
+              <a:t>9</a:t>
             </a:fld>
             <a:endParaRPr lang="en-US"/>
           </a:p>
@@ -3401,7 +3495,7 @@
                   <a:schemeClr val="accent4"/>
                 </a:solidFill>
               </a:rPr>
-              <a:t>Overview · evaluation stack and Phase A status</a:t>
+              <a:t>Overview · evaluation stack and plan of work</a:t>
             </a:r>
             <a:endParaRPr lang="en-US" sz="1400" dirty="0"/>
           </a:p>
@@ -3548,7 +3642,7 @@
                   <a:schemeClr val="tx2"/>
                 </a:solidFill>
               </a:rPr>
-              <a:t>Why one-off test questions aren't enough</a:t>
+              <a:t>The evaluation stack, from scenario to report</a:t>
             </a:r>
             <a:endParaRPr lang="en-US" sz="3400" dirty="0"/>
           </a:p>
@@ -3556,18 +3650,18 @@
       </p:sp>
       <p:sp>
         <p:nvSpPr>
-          <p:cNvPr id="3" name="Gap 1 card"/>
+          <p:cNvPr id="3" name="Layer 1 card"/>
           <p:cNvSpPr/>
           <p:nvPr/>
         </p:nvSpPr>
         <p:spPr>
           <a:xfrm>
-            <a:off x="548640" y="1463040"/>
-            <a:ext cx="6858000" cy="1417320"/>
+            <a:off x="548640" y="1371600"/>
+            <a:ext cx="7040880" cy="1051560"/>
           </a:xfrm>
           <a:prstGeom prst="roundRect">
             <a:avLst>
-              <a:gd name="adj" fmla="val 5161"/>
+              <a:gd name="adj" fmla="val 6957"/>
             </a:avLst>
           </a:prstGeom>
           <a:solidFill>
@@ -3578,14 +3672,14 @@
       </p:sp>
       <p:sp>
         <p:nvSpPr>
-          <p:cNvPr id="4" name="Gap 1 circle"/>
+          <p:cNvPr id="4" name="Layer 1 circle"/>
           <p:cNvSpPr/>
           <p:nvPr/>
         </p:nvSpPr>
         <p:spPr>
           <a:xfrm>
-            <a:off x="822960" y="1737360"/>
-            <a:ext cx="868680" cy="868680"/>
+            <a:off x="777240" y="1554480"/>
+            <a:ext cx="685800" cy="685800"/>
           </a:xfrm>
           <a:prstGeom prst="ellipse">
             <a:avLst/>
@@ -3598,7 +3692,7 @@
       </p:sp>
       <p:pic>
         <p:nvPicPr>
-          <p:cNvPr id="5" name="Gap 1 icon" descr="preencoded.png">    </p:cNvPr>
+          <p:cNvPr id="5" name="Layer 1 icon" descr="preencoded.png">    </p:cNvPr>
           <p:cNvPicPr>
             <a:picLocks noChangeAspect="1"/>
           </p:cNvPicPr>
@@ -3612,8 +3706,8 @@
         </p:blipFill>
         <p:spPr>
           <a:xfrm>
-            <a:off x="1057504" y="1971904"/>
-            <a:ext cx="399593" cy="399593"/>
+            <a:off x="962406" y="1739646"/>
+            <a:ext cx="315468" cy="315468"/>
           </a:xfrm>
           <a:prstGeom prst="rect">
             <a:avLst/>
@@ -3622,14 +3716,14 @@
       </p:pic>
       <p:sp>
         <p:nvSpPr>
-          <p:cNvPr id="6" name="Gap 1 title"/>
+          <p:cNvPr id="6" name="Layer 1 title"/>
           <p:cNvSpPr txBox="1"/>
           <p:nvPr/>
         </p:nvSpPr>
         <p:spPr>
           <a:xfrm>
-            <a:off x="1965960" y="1719072"/>
-            <a:ext cx="5212080" cy="411480"/>
+            <a:off x="1691640" y="1527048"/>
+            <a:ext cx="4480560" cy="365760"/>
           </a:xfrm>
           <a:prstGeom prst="rect">
             <a:avLst/>
@@ -3645,7 +3739,7 @@
               <a:buNone/>
             </a:pPr>
             <a:r>
-              <a:rPr lang="en-US" sz="2000" b="1" dirty="0">
+              <a:rPr lang="en-US" sz="1800" b="1" dirty="0">
                 <a:solidFill>
                   <a:schemeClr val="tx2"/>
                 </a:solidFill>
@@ -3653,22 +3747,22 @@
                 <a:ea typeface="+mj-lt" pitchFamily="34" charset="-122"/>
                 <a:cs typeface="+mj-lt" pitchFamily="34" charset="-120"/>
               </a:rPr>
-              <a:t>A patient who changes</a:t>
-            </a:r>
-            <a:endParaRPr lang="en-US" sz="2000" dirty="0"/>
-          </a:p>
-        </p:txBody>
-      </p:sp>
-      <p:sp>
-        <p:nvSpPr>
-          <p:cNvPr id="7" name="Gap 1 text"/>
+              <a:t>1  Scenario authoring</a:t>
+            </a:r>
+            <a:endParaRPr lang="en-US" sz="1800" dirty="0"/>
+          </a:p>
+        </p:txBody>
+      </p:sp>
+      <p:sp>
+        <p:nvSpPr>
+          <p:cNvPr id="7" name="Layer 1 text"/>
           <p:cNvSpPr txBox="1"/>
           <p:nvPr/>
         </p:nvSpPr>
         <p:spPr>
           <a:xfrm>
-            <a:off x="1965960" y="2176272"/>
-            <a:ext cx="5212080" cy="548640"/>
+            <a:off x="1691640" y="1920240"/>
+            <a:ext cx="4480560" cy="365760"/>
           </a:xfrm>
           <a:prstGeom prst="rect">
             <a:avLst/>
@@ -3684,31 +3778,71 @@
               <a:buNone/>
             </a:pPr>
             <a:r>
-              <a:rPr lang="en-US" sz="1500" dirty="0">
+              <a:rPr lang="en-US" sz="1400" dirty="0">
                 <a:solidFill>
                   <a:schemeClr val="tx1"/>
                 </a:solidFill>
               </a:rPr>
-              <a:t>Gets better or worse depending on what the assistant advises, hour by hour.</a:t>
-            </a:r>
-            <a:endParaRPr lang="en-US" sz="1500" dirty="0"/>
-          </a:p>
-        </p:txBody>
-      </p:sp>
-      <p:sp>
-        <p:nvSpPr>
-          <p:cNvPr id="8" name="Gap 2 card"/>
+              <a:t>Scenario Builder, validator and a NASA-sourced library</a:t>
+            </a:r>
+            <a:endParaRPr lang="en-US" sz="1400" dirty="0"/>
+          </a:p>
+        </p:txBody>
+      </p:sp>
+      <p:sp>
+        <p:nvSpPr>
+          <p:cNvPr id="8" name="Layer 1 status"/>
           <p:cNvSpPr/>
           <p:nvPr/>
         </p:nvSpPr>
         <p:spPr>
           <a:xfrm>
-            <a:off x="548640" y="3063240"/>
-            <a:ext cx="6858000" cy="1417320"/>
+            <a:off x="6263640" y="1709928"/>
+            <a:ext cx="1097280" cy="384048"/>
           </a:xfrm>
           <a:prstGeom prst="roundRect">
             <a:avLst>
-              <a:gd name="adj" fmla="val 5161"/>
+              <a:gd name="adj" fmla="val 47619"/>
+            </a:avLst>
+          </a:prstGeom>
+          <a:solidFill>
+            <a:schemeClr val="accent1"/>
+          </a:solidFill>
+          <a:ln/>
+        </p:spPr>
+        <p:txBody>
+          <a:bodyPr wrap="square" lIns="0" tIns="0" rIns="0" bIns="0" rtlCol="0" anchor="ctr"/>
+          <a:lstStyle/>
+          <a:p>
+            <a:pPr algn="ctr" indent="0" marL="0">
+              <a:buNone/>
+            </a:pPr>
+            <a:r>
+              <a:rPr lang="en-US" sz="1300" b="1" dirty="0">
+                <a:solidFill>
+                  <a:schemeClr val="bg1"/>
+                </a:solidFill>
+              </a:rPr>
+              <a:t>Built</a:t>
+            </a:r>
+            <a:endParaRPr lang="en-US" sz="1300" dirty="0"/>
+          </a:p>
+        </p:txBody>
+      </p:sp>
+      <p:sp>
+        <p:nvSpPr>
+          <p:cNvPr id="9" name="Layer 2 card"/>
+          <p:cNvSpPr/>
+          <p:nvPr/>
+        </p:nvSpPr>
+        <p:spPr>
+          <a:xfrm>
+            <a:off x="548640" y="2587752"/>
+            <a:ext cx="7040880" cy="1051560"/>
+          </a:xfrm>
+          <a:prstGeom prst="roundRect">
+            <a:avLst>
+              <a:gd name="adj" fmla="val 6957"/>
             </a:avLst>
           </a:prstGeom>
           <a:solidFill>
@@ -3719,27 +3853,27 @@
       </p:sp>
       <p:sp>
         <p:nvSpPr>
-          <p:cNvPr id="9" name="Gap 2 circle"/>
+          <p:cNvPr id="10" name="Layer 2 circle"/>
           <p:cNvSpPr/>
           <p:nvPr/>
         </p:nvSpPr>
         <p:spPr>
           <a:xfrm>
-            <a:off x="822960" y="3337560"/>
-            <a:ext cx="868680" cy="868680"/>
+            <a:off x="777240" y="2770632"/>
+            <a:ext cx="685800" cy="685800"/>
           </a:xfrm>
           <a:prstGeom prst="ellipse">
             <a:avLst/>
           </a:prstGeom>
           <a:solidFill>
-            <a:schemeClr val="accent1"/>
+            <a:schemeClr val="tx2"/>
           </a:solidFill>
           <a:ln/>
         </p:spPr>
       </p:sp>
       <p:pic>
         <p:nvPicPr>
-          <p:cNvPr id="10" name="Gap 2 icon" descr="preencoded.png">    </p:cNvPr>
+          <p:cNvPr id="11" name="Layer 2 icon" descr="preencoded.png">    </p:cNvPr>
           <p:cNvPicPr>
             <a:picLocks noChangeAspect="1"/>
           </p:cNvPicPr>
@@ -3753,8 +3887,8 @@
         </p:blipFill>
         <p:spPr>
           <a:xfrm>
-            <a:off x="1057504" y="3572104"/>
-            <a:ext cx="399593" cy="399593"/>
+            <a:off x="962406" y="2955798"/>
+            <a:ext cx="315468" cy="315468"/>
           </a:xfrm>
           <a:prstGeom prst="rect">
             <a:avLst/>
@@ -3763,14 +3897,14 @@
       </p:pic>
       <p:sp>
         <p:nvSpPr>
-          <p:cNvPr id="11" name="Gap 2 title"/>
+          <p:cNvPr id="12" name="Layer 2 title"/>
           <p:cNvSpPr txBox="1"/>
           <p:nvPr/>
         </p:nvSpPr>
         <p:spPr>
           <a:xfrm>
-            <a:off x="1965960" y="3319272"/>
-            <a:ext cx="5212080" cy="411480"/>
+            <a:off x="1691640" y="2743200"/>
+            <a:ext cx="4480560" cy="365760"/>
           </a:xfrm>
           <a:prstGeom prst="rect">
             <a:avLst/>
@@ -3786,7 +3920,7 @@
               <a:buNone/>
             </a:pPr>
             <a:r>
-              <a:rPr lang="en-US" sz="2000" b="1" dirty="0">
+              <a:rPr lang="en-US" sz="1800" b="1" dirty="0">
                 <a:solidFill>
                   <a:schemeClr val="tx2"/>
                 </a:solidFill>
@@ -3794,22 +3928,22 @@
                 <a:ea typeface="+mj-lt" pitchFamily="34" charset="-122"/>
                 <a:cs typeface="+mj-lt" pitchFamily="34" charset="-120"/>
               </a:rPr>
-              <a:t>A mission around the patient</a:t>
-            </a:r>
-            <a:endParaRPr lang="en-US" sz="2000" dirty="0"/>
-          </a:p>
-        </p:txBody>
-      </p:sp>
-      <p:sp>
-        <p:nvSpPr>
-          <p:cNvPr id="12" name="Gap 2 text"/>
+              <a:t>2  Simulation</a:t>
+            </a:r>
+            <a:endParaRPr lang="en-US" sz="1800" dirty="0"/>
+          </a:p>
+        </p:txBody>
+      </p:sp>
+      <p:sp>
+        <p:nvSpPr>
+          <p:cNvPr id="13" name="Layer 2 text"/>
           <p:cNvSpPr txBox="1"/>
           <p:nvPr/>
         </p:nvSpPr>
         <p:spPr>
           <a:xfrm>
-            <a:off x="1965960" y="3776472"/>
-            <a:ext cx="5212080" cy="548640"/>
+            <a:off x="1691640" y="3136392"/>
+            <a:ext cx="4480560" cy="365760"/>
           </a:xfrm>
           <a:prstGeom prst="rect">
             <a:avLst/>
@@ -3825,31 +3959,75 @@
               <a:buNone/>
             </a:pPr>
             <a:r>
-              <a:rPr lang="en-US" sz="1500" dirty="0">
+              <a:rPr lang="en-US" sz="1400" dirty="0">
                 <a:solidFill>
                   <a:schemeClr val="tx1"/>
                 </a:solidFill>
               </a:rPr>
-              <a:t>Solar particle events, dust storms, communication blackouts, failed equipment.</a:t>
-            </a:r>
-            <a:endParaRPr lang="en-US" sz="1500" dirty="0"/>
-          </a:p>
-        </p:txBody>
-      </p:sp>
-      <p:sp>
-        <p:nvSpPr>
-          <p:cNvPr id="13" name="Gap 3 card"/>
+              <a:t>Digital twin of the patient, AI crewmember, batch runner</a:t>
+            </a:r>
+            <a:endParaRPr lang="en-US" sz="1400" dirty="0"/>
+          </a:p>
+        </p:txBody>
+      </p:sp>
+      <p:sp>
+        <p:nvSpPr>
+          <p:cNvPr id="14" name="Layer 2 status"/>
           <p:cNvSpPr/>
           <p:nvPr/>
         </p:nvSpPr>
         <p:spPr>
           <a:xfrm>
-            <a:off x="548640" y="4663440"/>
-            <a:ext cx="6858000" cy="1417320"/>
+            <a:off x="6263640" y="2926080"/>
+            <a:ext cx="1097280" cy="384048"/>
           </a:xfrm>
           <a:prstGeom prst="roundRect">
             <a:avLst>
-              <a:gd name="adj" fmla="val 5161"/>
+              <a:gd name="adj" fmla="val 47619"/>
+            </a:avLst>
+          </a:prstGeom>
+          <a:solidFill>
+            <a:schemeClr val="bg1"/>
+          </a:solidFill>
+          <a:ln w="12700">
+            <a:solidFill>
+              <a:schemeClr val="accent2"/>
+            </a:solidFill>
+          </a:ln>
+        </p:spPr>
+        <p:txBody>
+          <a:bodyPr wrap="square" lIns="0" tIns="0" rIns="0" bIns="0" rtlCol="0" anchor="ctr"/>
+          <a:lstStyle/>
+          <a:p>
+            <a:pPr algn="ctr" indent="0" marL="0">
+              <a:buNone/>
+            </a:pPr>
+            <a:r>
+              <a:rPr lang="en-US" sz="1300" b="1" dirty="0">
+                <a:solidFill>
+                  <a:schemeClr val="accent3"/>
+                </a:solidFill>
+              </a:rPr>
+              <a:t>Designed</a:t>
+            </a:r>
+            <a:endParaRPr lang="en-US" sz="1300" dirty="0"/>
+          </a:p>
+        </p:txBody>
+      </p:sp>
+      <p:sp>
+        <p:nvSpPr>
+          <p:cNvPr id="15" name="Layer 3 card"/>
+          <p:cNvSpPr/>
+          <p:nvPr/>
+        </p:nvSpPr>
+        <p:spPr>
+          <a:xfrm>
+            <a:off x="548640" y="3803904"/>
+            <a:ext cx="7040880" cy="1051560"/>
+          </a:xfrm>
+          <a:prstGeom prst="roundRect">
+            <a:avLst>
+              <a:gd name="adj" fmla="val 6957"/>
             </a:avLst>
           </a:prstGeom>
           <a:solidFill>
@@ -3860,27 +4038,27 @@
       </p:sp>
       <p:sp>
         <p:nvSpPr>
-          <p:cNvPr id="14" name="Gap 3 circle"/>
+          <p:cNvPr id="16" name="Layer 3 circle"/>
           <p:cNvSpPr/>
           <p:nvPr/>
         </p:nvSpPr>
         <p:spPr>
           <a:xfrm>
-            <a:off x="822960" y="4937760"/>
-            <a:ext cx="868680" cy="868680"/>
+            <a:off x="777240" y="3986784"/>
+            <a:ext cx="685800" cy="685800"/>
           </a:xfrm>
           <a:prstGeom prst="ellipse">
             <a:avLst/>
           </a:prstGeom>
           <a:solidFill>
-            <a:schemeClr val="accent1"/>
+            <a:schemeClr val="tx2"/>
           </a:solidFill>
           <a:ln/>
         </p:spPr>
       </p:sp>
       <p:pic>
         <p:nvPicPr>
-          <p:cNvPr id="15" name="Gap 3 icon" descr="preencoded.png">    </p:cNvPr>
+          <p:cNvPr id="17" name="Layer 3 icon" descr="preencoded.png">    </p:cNvPr>
           <p:cNvPicPr>
             <a:picLocks noChangeAspect="1"/>
           </p:cNvPicPr>
@@ -3894,8 +4072,8 @@
         </p:blipFill>
         <p:spPr>
           <a:xfrm>
-            <a:off x="1057504" y="5172304"/>
-            <a:ext cx="399593" cy="399593"/>
+            <a:off x="962406" y="4171950"/>
+            <a:ext cx="315468" cy="315468"/>
           </a:xfrm>
           <a:prstGeom prst="rect">
             <a:avLst/>
@@ -3904,14 +4082,14 @@
       </p:pic>
       <p:sp>
         <p:nvSpPr>
-          <p:cNvPr id="16" name="Gap 3 title"/>
+          <p:cNvPr id="18" name="Layer 3 title"/>
           <p:cNvSpPr txBox="1"/>
           <p:nvPr/>
         </p:nvSpPr>
         <p:spPr>
           <a:xfrm>
-            <a:off x="1965960" y="4919472"/>
-            <a:ext cx="5212080" cy="411480"/>
+            <a:off x="1691640" y="3959352"/>
+            <a:ext cx="4480560" cy="365760"/>
           </a:xfrm>
           <a:prstGeom prst="rect">
             <a:avLst/>
@@ -3927,7 +4105,7 @@
               <a:buNone/>
             </a:pPr>
             <a:r>
-              <a:rPr lang="en-US" sz="2000" b="1" dirty="0">
+              <a:rPr lang="en-US" sz="1800" b="1" dirty="0">
                 <a:solidFill>
                   <a:schemeClr val="tx2"/>
                 </a:solidFill>
@@ -3935,22 +4113,22 @@
                 <a:ea typeface="+mj-lt" pitchFamily="34" charset="-122"/>
                 <a:cs typeface="+mj-lt" pitchFamily="34" charset="-120"/>
               </a:rPr>
-              <a:t>Volume</a:t>
-            </a:r>
-            <a:endParaRPr lang="en-US" sz="2000" dirty="0"/>
-          </a:p>
-        </p:txBody>
-      </p:sp>
-      <p:sp>
-        <p:nvSpPr>
-          <p:cNvPr id="17" name="Gap 3 text"/>
+              <a:t>3  Scoring</a:t>
+            </a:r>
+            <a:endParaRPr lang="en-US" sz="1800" dirty="0"/>
+          </a:p>
+        </p:txBody>
+      </p:sp>
+      <p:sp>
+        <p:nvSpPr>
+          <p:cNvPr id="19" name="Layer 3 text"/>
           <p:cNvSpPr txBox="1"/>
           <p:nvPr/>
         </p:nvSpPr>
         <p:spPr>
           <a:xfrm>
-            <a:off x="1965960" y="5376672"/>
-            <a:ext cx="5212080" cy="548640"/>
+            <a:off x="1691640" y="4352544"/>
+            <a:ext cx="4480560" cy="365760"/>
           </a:xfrm>
           <a:prstGeom prst="rect">
             <a:avLst/>
@@ -3966,32 +4144,96 @@
               <a:buNone/>
             </a:pPr>
             <a:r>
-              <a:rPr lang="en-US" sz="1500" dirty="0">
+              <a:rPr lang="en-US" sz="1400" dirty="0">
                 <a:solidFill>
                   <a:schemeClr val="tx1"/>
                 </a:solidFill>
               </a:rPr>
-              <a:t>Many runs per case, so behaviour shows up as a distribution, not one lucky answer.</a:t>
-            </a:r>
-            <a:endParaRPr lang="en-US" sz="1500" dirty="0"/>
-          </a:p>
-        </p:txBody>
-      </p:sp>
-      <p:sp>
-        <p:nvSpPr>
-          <p:cNvPr id="18" name="Delay panel"/>
+              <a:t>Per-run scorer, judge across runs, anomaly viewer</a:t>
+            </a:r>
+            <a:endParaRPr lang="en-US" sz="1400" dirty="0"/>
+          </a:p>
+        </p:txBody>
+      </p:sp>
+      <p:sp>
+        <p:nvSpPr>
+          <p:cNvPr id="20" name="Layer 3 status"/>
           <p:cNvSpPr/>
           <p:nvPr/>
         </p:nvSpPr>
         <p:spPr>
           <a:xfrm>
-            <a:off x="7772400" y="1463040"/>
-            <a:ext cx="3840480" cy="4617720"/>
+            <a:off x="6263640" y="4142232"/>
+            <a:ext cx="1097280" cy="384048"/>
           </a:xfrm>
           <a:prstGeom prst="roundRect">
             <a:avLst>
-              <a:gd name="adj" fmla="val 1905"/>
+              <a:gd name="adj" fmla="val 47619"/>
             </a:avLst>
+          </a:prstGeom>
+          <a:solidFill>
+            <a:schemeClr val="bg1"/>
+          </a:solidFill>
+          <a:ln w="12700">
+            <a:solidFill>
+              <a:schemeClr val="accent2"/>
+            </a:solidFill>
+          </a:ln>
+        </p:spPr>
+        <p:txBody>
+          <a:bodyPr wrap="square" lIns="0" tIns="0" rIns="0" bIns="0" rtlCol="0" anchor="ctr"/>
+          <a:lstStyle/>
+          <a:p>
+            <a:pPr algn="ctr" indent="0" marL="0">
+              <a:buNone/>
+            </a:pPr>
+            <a:r>
+              <a:rPr lang="en-US" sz="1300" b="1" dirty="0">
+                <a:solidFill>
+                  <a:schemeClr val="accent3"/>
+                </a:solidFill>
+              </a:rPr>
+              <a:t>Designed</a:t>
+            </a:r>
+            <a:endParaRPr lang="en-US" sz="1300" dirty="0"/>
+          </a:p>
+        </p:txBody>
+      </p:sp>
+      <p:sp>
+        <p:nvSpPr>
+          <p:cNvPr id="21" name="Layer 4 card"/>
+          <p:cNvSpPr/>
+          <p:nvPr/>
+        </p:nvSpPr>
+        <p:spPr>
+          <a:xfrm>
+            <a:off x="548640" y="5020056"/>
+            <a:ext cx="7040880" cy="1051560"/>
+          </a:xfrm>
+          <a:prstGeom prst="roundRect">
+            <a:avLst>
+              <a:gd name="adj" fmla="val 6957"/>
+            </a:avLst>
+          </a:prstGeom>
+          <a:solidFill>
+            <a:schemeClr val="bg2"/>
+          </a:solidFill>
+          <a:ln/>
+        </p:spPr>
+      </p:sp>
+      <p:sp>
+        <p:nvSpPr>
+          <p:cNvPr id="22" name="Layer 4 circle"/>
+          <p:cNvSpPr/>
+          <p:nvPr/>
+        </p:nvSpPr>
+        <p:spPr>
+          <a:xfrm>
+            <a:off x="777240" y="5202936"/>
+            <a:ext cx="685800" cy="685800"/>
+          </a:xfrm>
+          <a:prstGeom prst="ellipse">
+            <a:avLst/>
           </a:prstGeom>
           <a:solidFill>
             <a:schemeClr val="tx2"/>
@@ -3999,16 +4241,40 @@
           <a:ln/>
         </p:spPr>
       </p:sp>
-      <p:sp>
-        <p:nvSpPr>
-          <p:cNvPr id="19" name="Delay stat"/>
+      <p:pic>
+        <p:nvPicPr>
+          <p:cNvPr id="23" name="Layer 4 icon" descr="preencoded.png">    </p:cNvPr>
+          <p:cNvPicPr>
+            <a:picLocks noChangeAspect="1"/>
+          </p:cNvPicPr>
+          <p:nvPr/>
+        </p:nvPicPr>
+        <p:blipFill>
+          <a:blip r:embed="rId4"/>
+          <a:stretch>
+            <a:fillRect/>
+          </a:stretch>
+        </p:blipFill>
+        <p:spPr>
+          <a:xfrm>
+            <a:off x="962406" y="5388102"/>
+            <a:ext cx="315468" cy="315468"/>
+          </a:xfrm>
+          <a:prstGeom prst="rect">
+            <a:avLst/>
+          </a:prstGeom>
+        </p:spPr>
+      </p:pic>
+      <p:sp>
+        <p:nvSpPr>
+          <p:cNvPr id="24" name="Layer 4 title"/>
           <p:cNvSpPr txBox="1"/>
           <p:nvPr/>
         </p:nvSpPr>
         <p:spPr>
           <a:xfrm>
-            <a:off x="8138160" y="2103120"/>
-            <a:ext cx="3291840" cy="1097280"/>
+            <a:off x="1691640" y="5175504"/>
+            <a:ext cx="4480560" cy="365760"/>
           </a:xfrm>
           <a:prstGeom prst="rect">
             <a:avLst/>
@@ -4024,30 +4290,30 @@
               <a:buNone/>
             </a:pPr>
             <a:r>
-              <a:rPr lang="en-US" sz="6600" b="1" dirty="0">
-                <a:solidFill>
-                  <a:schemeClr val="accent1"/>
+              <a:rPr lang="en-US" sz="1800" b="1" dirty="0">
+                <a:solidFill>
+                  <a:schemeClr val="tx2"/>
                 </a:solidFill>
                 <a:latin typeface="+mj-lt" pitchFamily="34" charset="0"/>
                 <a:ea typeface="+mj-lt" pitchFamily="34" charset="-122"/>
                 <a:cs typeface="+mj-lt" pitchFamily="34" charset="-120"/>
               </a:rPr>
-              <a:t>23 min</a:t>
-            </a:r>
-            <a:endParaRPr lang="en-US" sz="6600" dirty="0"/>
-          </a:p>
-        </p:txBody>
-      </p:sp>
-      <p:sp>
-        <p:nvSpPr>
-          <p:cNvPr id="20" name="Delay label"/>
+              <a:t>4  Reporting</a:t>
+            </a:r>
+            <a:endParaRPr lang="en-US" sz="1800" dirty="0"/>
+          </a:p>
+        </p:txBody>
+      </p:sp>
+      <p:sp>
+        <p:nvSpPr>
+          <p:cNvPr id="25" name="Layer 4 text"/>
           <p:cNvSpPr txBox="1"/>
           <p:nvPr/>
         </p:nvSpPr>
         <p:spPr>
           <a:xfrm>
-            <a:off x="8138160" y="3291840"/>
-            <a:ext cx="3200400" cy="822960"/>
+            <a:off x="1691640" y="5568696"/>
+            <a:ext cx="4480560" cy="365760"/>
           </a:xfrm>
           <a:prstGeom prst="rect">
             <a:avLst/>
@@ -4063,27 +4329,176 @@
               <a:buNone/>
             </a:pPr>
             <a:r>
-              <a:rPr lang="en-US" sz="1800" dirty="0">
+              <a:rPr lang="en-US" sz="1400" dirty="0">
+                <a:solidFill>
+                  <a:schemeClr val="tx1"/>
+                </a:solidFill>
+              </a:rPr>
+              <a:t>Medical report and technical report</a:t>
+            </a:r>
+            <a:endParaRPr lang="en-US" sz="1400" dirty="0"/>
+          </a:p>
+        </p:txBody>
+      </p:sp>
+      <p:sp>
+        <p:nvSpPr>
+          <p:cNvPr id="26" name="Layer 4 status"/>
+          <p:cNvSpPr/>
+          <p:nvPr/>
+        </p:nvSpPr>
+        <p:spPr>
+          <a:xfrm>
+            <a:off x="6263640" y="5358384"/>
+            <a:ext cx="1097280" cy="384048"/>
+          </a:xfrm>
+          <a:prstGeom prst="roundRect">
+            <a:avLst>
+              <a:gd name="adj" fmla="val 47619"/>
+            </a:avLst>
+          </a:prstGeom>
+          <a:solidFill>
+            <a:schemeClr val="bg1"/>
+          </a:solidFill>
+          <a:ln w="12700">
+            <a:solidFill>
+              <a:schemeClr val="accent2"/>
+            </a:solidFill>
+          </a:ln>
+        </p:spPr>
+        <p:txBody>
+          <a:bodyPr wrap="square" lIns="0" tIns="0" rIns="0" bIns="0" rtlCol="0" anchor="ctr"/>
+          <a:lstStyle/>
+          <a:p>
+            <a:pPr algn="ctr" indent="0" marL="0">
+              <a:buNone/>
+            </a:pPr>
+            <a:r>
+              <a:rPr lang="en-US" sz="1300" b="1" dirty="0">
+                <a:solidFill>
+                  <a:schemeClr val="accent3"/>
+                </a:solidFill>
+              </a:rPr>
+              <a:t>Designed</a:t>
+            </a:r>
+            <a:endParaRPr lang="en-US" sz="1300" dirty="0"/>
+          </a:p>
+        </p:txBody>
+      </p:sp>
+      <p:sp>
+        <p:nvSpPr>
+          <p:cNvPr id="27" name="Principles panel"/>
+          <p:cNvSpPr/>
+          <p:nvPr/>
+        </p:nvSpPr>
+        <p:spPr>
+          <a:xfrm>
+            <a:off x="7955280" y="1371600"/>
+            <a:ext cx="3657600" cy="4700016"/>
+          </a:xfrm>
+          <a:prstGeom prst="roundRect">
+            <a:avLst>
+              <a:gd name="adj" fmla="val 2000"/>
+            </a:avLst>
+          </a:prstGeom>
+          <a:solidFill>
+            <a:schemeClr val="tx2"/>
+          </a:solidFill>
+          <a:ln/>
+        </p:spPr>
+      </p:sp>
+      <p:sp>
+        <p:nvSpPr>
+          <p:cNvPr id="28" name="Principle 1 circle"/>
+          <p:cNvSpPr/>
+          <p:nvPr/>
+        </p:nvSpPr>
+        <p:spPr>
+          <a:xfrm>
+            <a:off x="8229600" y="1737360"/>
+            <a:ext cx="640080" cy="640080"/>
+          </a:xfrm>
+          <a:prstGeom prst="ellipse">
+            <a:avLst/>
+          </a:prstGeom>
+          <a:solidFill>
+            <a:schemeClr val="accent1"/>
+          </a:solidFill>
+          <a:ln/>
+        </p:spPr>
+      </p:sp>
+      <p:pic>
+        <p:nvPicPr>
+          <p:cNvPr id="29" name="Principle 1 icon" descr="preencoded.png">    </p:cNvPr>
+          <p:cNvPicPr>
+            <a:picLocks noChangeAspect="1"/>
+          </p:cNvPicPr>
+          <p:nvPr/>
+        </p:nvPicPr>
+        <p:blipFill>
+          <a:blip r:embed="rId5"/>
+          <a:stretch>
+            <a:fillRect/>
+          </a:stretch>
+        </p:blipFill>
+        <p:spPr>
+          <a:xfrm>
+            <a:off x="8402422" y="1910182"/>
+            <a:ext cx="294437" cy="294437"/>
+          </a:xfrm>
+          <a:prstGeom prst="rect">
+            <a:avLst/>
+          </a:prstGeom>
+        </p:spPr>
+      </p:pic>
+      <p:sp>
+        <p:nvSpPr>
+          <p:cNvPr id="30" name="Principle 1 title"/>
+          <p:cNvSpPr txBox="1"/>
+          <p:nvPr/>
+        </p:nvSpPr>
+        <p:spPr>
+          <a:xfrm>
+            <a:off x="9052560" y="1719072"/>
+            <a:ext cx="2377440" cy="365760"/>
+          </a:xfrm>
+          <a:prstGeom prst="rect">
+            <a:avLst/>
+          </a:prstGeom>
+          <a:noFill/>
+          <a:ln/>
+        </p:spPr>
+        <p:txBody>
+          <a:bodyPr wrap="square" lIns="0" tIns="0" rIns="0" bIns="0" rtlCol="0" anchor="t"/>
+          <a:lstStyle/>
+          <a:p>
+            <a:pPr indent="0" marL="0">
+              <a:buNone/>
+            </a:pPr>
+            <a:r>
+              <a:rPr lang="en-US" sz="1600" b="1" dirty="0">
                 <a:solidFill>
                   <a:schemeClr val="bg1"/>
                 </a:solidFill>
-              </a:rPr>
-              <a:t>one-way signal delay between Mars and Earth, at its longest</a:t>
-            </a:r>
-            <a:endParaRPr lang="en-US" sz="1800" dirty="0"/>
-          </a:p>
-        </p:txBody>
-      </p:sp>
-      <p:sp>
-        <p:nvSpPr>
-          <p:cNvPr id="21" name="Delay note"/>
+                <a:latin typeface="+mj-lt" pitchFamily="34" charset="0"/>
+                <a:ea typeface="+mj-lt" pitchFamily="34" charset="-122"/>
+                <a:cs typeface="+mj-lt" pitchFamily="34" charset="-120"/>
+              </a:rPr>
+              <a:t>Any assistant</a:t>
+            </a:r>
+            <a:endParaRPr lang="en-US" sz="1600" dirty="0"/>
+          </a:p>
+        </p:txBody>
+      </p:sp>
+      <p:sp>
+        <p:nvSpPr>
+          <p:cNvPr id="31" name="Principle 1 text"/>
           <p:cNvSpPr txBox="1"/>
           <p:nvPr/>
         </p:nvSpPr>
         <p:spPr>
           <a:xfrm>
-            <a:off x="8138160" y="4343400"/>
-            <a:ext cx="3200400" cy="1463040"/>
+            <a:off x="9052560" y="2103120"/>
+            <a:ext cx="2377440" cy="868680"/>
           </a:xfrm>
           <a:prstGeom prst="rect">
             <a:avLst/>
@@ -4099,14 +4514,252 @@
               <a:buNone/>
             </a:pPr>
             <a:r>
-              <a:rPr lang="en-US" sz="1500" dirty="0">
+              <a:rPr lang="en-US" sz="1400" dirty="0">
                 <a:solidFill>
                   <a:schemeClr val="accent4"/>
                 </a:solidFill>
               </a:rPr>
-              <a:t>From low Earth orbit it is about 1 second. Beyond the Moon, the crew and the assistant must act before the ground can answer.</a:t>
-            </a:r>
-            <a:endParaRPr lang="en-US" sz="1500" dirty="0"/>
+              <a:t>SpaceDoc, CMO-DA or homegrown, through a small adapter and MCP tools.</a:t>
+            </a:r>
+            <a:endParaRPr lang="en-US" sz="1400" dirty="0"/>
+          </a:p>
+        </p:txBody>
+      </p:sp>
+      <p:sp>
+        <p:nvSpPr>
+          <p:cNvPr id="32" name="Principle 2 circle"/>
+          <p:cNvSpPr/>
+          <p:nvPr/>
+        </p:nvSpPr>
+        <p:spPr>
+          <a:xfrm>
+            <a:off x="8229600" y="3200400"/>
+            <a:ext cx="640080" cy="640080"/>
+          </a:xfrm>
+          <a:prstGeom prst="ellipse">
+            <a:avLst/>
+          </a:prstGeom>
+          <a:solidFill>
+            <a:schemeClr val="accent1"/>
+          </a:solidFill>
+          <a:ln/>
+        </p:spPr>
+      </p:sp>
+      <p:pic>
+        <p:nvPicPr>
+          <p:cNvPr id="33" name="Principle 2 icon" descr="preencoded.png">    </p:cNvPr>
+          <p:cNvPicPr>
+            <a:picLocks noChangeAspect="1"/>
+          </p:cNvPicPr>
+          <p:nvPr/>
+        </p:nvPicPr>
+        <p:blipFill>
+          <a:blip r:embed="rId6"/>
+          <a:stretch>
+            <a:fillRect/>
+          </a:stretch>
+        </p:blipFill>
+        <p:spPr>
+          <a:xfrm>
+            <a:off x="8402422" y="3373222"/>
+            <a:ext cx="294437" cy="294437"/>
+          </a:xfrm>
+          <a:prstGeom prst="rect">
+            <a:avLst/>
+          </a:prstGeom>
+        </p:spPr>
+      </p:pic>
+      <p:sp>
+        <p:nvSpPr>
+          <p:cNvPr id="34" name="Principle 2 title"/>
+          <p:cNvSpPr txBox="1"/>
+          <p:nvPr/>
+        </p:nvSpPr>
+        <p:spPr>
+          <a:xfrm>
+            <a:off x="9052560" y="3182112"/>
+            <a:ext cx="2377440" cy="365760"/>
+          </a:xfrm>
+          <a:prstGeom prst="rect">
+            <a:avLst/>
+          </a:prstGeom>
+          <a:noFill/>
+          <a:ln/>
+        </p:spPr>
+        <p:txBody>
+          <a:bodyPr wrap="square" lIns="0" tIns="0" rIns="0" bIns="0" rtlCol="0" anchor="t"/>
+          <a:lstStyle/>
+          <a:p>
+            <a:pPr indent="0" marL="0">
+              <a:buNone/>
+            </a:pPr>
+            <a:r>
+              <a:rPr lang="en-US" sz="1600" b="1" dirty="0">
+                <a:solidFill>
+                  <a:schemeClr val="bg1"/>
+                </a:solidFill>
+                <a:latin typeface="+mj-lt" pitchFamily="34" charset="0"/>
+                <a:ea typeface="+mj-lt" pitchFamily="34" charset="-122"/>
+                <a:cs typeface="+mj-lt" pitchFamily="34" charset="-120"/>
+              </a:rPr>
+              <a:t>Runs locally</a:t>
+            </a:r>
+            <a:endParaRPr lang="en-US" sz="1600" dirty="0"/>
+          </a:p>
+        </p:txBody>
+      </p:sp>
+      <p:sp>
+        <p:nvSpPr>
+          <p:cNvPr id="35" name="Principle 2 text"/>
+          <p:cNvSpPr txBox="1"/>
+          <p:nvPr/>
+        </p:nvSpPr>
+        <p:spPr>
+          <a:xfrm>
+            <a:off x="9052560" y="3566160"/>
+            <a:ext cx="2377440" cy="868680"/>
+          </a:xfrm>
+          <a:prstGeom prst="rect">
+            <a:avLst/>
+          </a:prstGeom>
+          <a:noFill/>
+          <a:ln/>
+        </p:spPr>
+        <p:txBody>
+          <a:bodyPr wrap="square" lIns="0" tIns="0" rIns="0" bIns="0" rtlCol="0" anchor="t"/>
+          <a:lstStyle/>
+          <a:p>
+            <a:pPr indent="0" marL="0">
+              <a:buNone/>
+            </a:pPr>
+            <a:r>
+              <a:rPr lang="en-US" sz="1400" dirty="0">
+                <a:solidFill>
+                  <a:schemeClr val="accent4"/>
+                </a:solidFill>
+              </a:rPr>
+              <a:t>On a laptop, overnight. No cloud calls.</a:t>
+            </a:r>
+            <a:endParaRPr lang="en-US" sz="1400" dirty="0"/>
+          </a:p>
+        </p:txBody>
+      </p:sp>
+      <p:sp>
+        <p:nvSpPr>
+          <p:cNvPr id="36" name="Principle 3 circle"/>
+          <p:cNvSpPr/>
+          <p:nvPr/>
+        </p:nvSpPr>
+        <p:spPr>
+          <a:xfrm>
+            <a:off x="8229600" y="4663440"/>
+            <a:ext cx="640080" cy="640080"/>
+          </a:xfrm>
+          <a:prstGeom prst="ellipse">
+            <a:avLst/>
+          </a:prstGeom>
+          <a:solidFill>
+            <a:schemeClr val="accent1"/>
+          </a:solidFill>
+          <a:ln/>
+        </p:spPr>
+      </p:sp>
+      <p:pic>
+        <p:nvPicPr>
+          <p:cNvPr id="37" name="Principle 3 icon" descr="preencoded.png">    </p:cNvPr>
+          <p:cNvPicPr>
+            <a:picLocks noChangeAspect="1"/>
+          </p:cNvPicPr>
+          <p:nvPr/>
+        </p:nvPicPr>
+        <p:blipFill>
+          <a:blip r:embed="rId7"/>
+          <a:stretch>
+            <a:fillRect/>
+          </a:stretch>
+        </p:blipFill>
+        <p:spPr>
+          <a:xfrm>
+            <a:off x="8402422" y="4836262"/>
+            <a:ext cx="294437" cy="294437"/>
+          </a:xfrm>
+          <a:prstGeom prst="rect">
+            <a:avLst/>
+          </a:prstGeom>
+        </p:spPr>
+      </p:pic>
+      <p:sp>
+        <p:nvSpPr>
+          <p:cNvPr id="38" name="Principle 3 title"/>
+          <p:cNvSpPr txBox="1"/>
+          <p:nvPr/>
+        </p:nvSpPr>
+        <p:spPr>
+          <a:xfrm>
+            <a:off x="9052560" y="4645152"/>
+            <a:ext cx="2377440" cy="365760"/>
+          </a:xfrm>
+          <a:prstGeom prst="rect">
+            <a:avLst/>
+          </a:prstGeom>
+          <a:noFill/>
+          <a:ln/>
+        </p:spPr>
+        <p:txBody>
+          <a:bodyPr wrap="square" lIns="0" tIns="0" rIns="0" bIns="0" rtlCol="0" anchor="t"/>
+          <a:lstStyle/>
+          <a:p>
+            <a:pPr indent="0" marL="0">
+              <a:buNone/>
+            </a:pPr>
+            <a:r>
+              <a:rPr lang="en-US" sz="1600" b="1" dirty="0">
+                <a:solidFill>
+                  <a:schemeClr val="bg1"/>
+                </a:solidFill>
+                <a:latin typeface="+mj-lt" pitchFamily="34" charset="0"/>
+                <a:ea typeface="+mj-lt" pitchFamily="34" charset="-122"/>
+                <a:cs typeface="+mj-lt" pitchFamily="34" charset="-120"/>
+              </a:rPr>
+              <a:t>Traceable scores</a:t>
+            </a:r>
+            <a:endParaRPr lang="en-US" sz="1600" dirty="0"/>
+          </a:p>
+        </p:txBody>
+      </p:sp>
+      <p:sp>
+        <p:nvSpPr>
+          <p:cNvPr id="39" name="Principle 3 text"/>
+          <p:cNvSpPr txBox="1"/>
+          <p:nvPr/>
+        </p:nvSpPr>
+        <p:spPr>
+          <a:xfrm>
+            <a:off x="9052560" y="5029200"/>
+            <a:ext cx="2377440" cy="868680"/>
+          </a:xfrm>
+          <a:prstGeom prst="rect">
+            <a:avLst/>
+          </a:prstGeom>
+          <a:noFill/>
+          <a:ln/>
+        </p:spPr>
+        <p:txBody>
+          <a:bodyPr wrap="square" lIns="0" tIns="0" rIns="0" bIns="0" rtlCol="0" anchor="t"/>
+          <a:lstStyle/>
+          <a:p>
+            <a:pPr indent="0" marL="0">
+              <a:buNone/>
+            </a:pPr>
+            <a:r>
+              <a:rPr lang="en-US" sz="1400" dirty="0">
+                <a:solidFill>
+                  <a:schemeClr val="accent4"/>
+                </a:solidFill>
+              </a:rPr>
+              <a:t>Each score links to the transcript turn or twin event behind it.</a:t>
+            </a:r>
+            <a:endParaRPr lang="en-US" sz="1400" dirty="0"/>
           </a:p>
         </p:txBody>
       </p:sp>
@@ -4212,7 +4865,7 @@
                   <a:schemeClr val="tx2"/>
                 </a:solidFill>
               </a:rPr>
-              <a:t>One loop: author, simulate, score, review</a:t>
+              <a:t>How a scenario runs, from authoring to reports</a:t>
             </a:r>
             <a:endParaRPr lang="en-US" sz="3400" dirty="0"/>
           </a:p>
@@ -4220,58 +4873,151 @@
       </p:sp>
       <p:sp>
         <p:nvSpPr>
-          <p:cNvPr id="3" name="Step 1 circle"/>
+          <p:cNvPr id="3" name="Authoring box"/>
           <p:cNvSpPr/>
           <p:nvPr/>
         </p:nvSpPr>
         <p:spPr>
           <a:xfrm>
-            <a:off x="982980" y="1508760"/>
-            <a:ext cx="1051560" cy="1051560"/>
-          </a:xfrm>
-          <a:prstGeom prst="ellipse">
-            <a:avLst/>
+            <a:off x="548640" y="1325880"/>
+            <a:ext cx="2926080" cy="2103120"/>
+          </a:xfrm>
+          <a:prstGeom prst="roundRect">
+            <a:avLst>
+              <a:gd name="adj" fmla="val 3478"/>
+            </a:avLst>
           </a:prstGeom>
           <a:solidFill>
-            <a:schemeClr val="accent1"/>
+            <a:schemeClr val="bg2"/>
           </a:solidFill>
           <a:ln/>
         </p:spPr>
       </p:sp>
-      <p:pic>
-        <p:nvPicPr>
-          <p:cNvPr id="4" name="Step 1 icon" descr="preencoded.png">    </p:cNvPr>
-          <p:cNvPicPr>
-            <a:picLocks noChangeAspect="1"/>
-          </p:cNvPicPr>
-          <p:nvPr/>
-        </p:nvPicPr>
-        <p:blipFill>
-          <a:blip r:embed="rId1"/>
-          <a:stretch>
-            <a:fillRect/>
-          </a:stretch>
-        </p:blipFill>
-        <p:spPr>
-          <a:xfrm>
-            <a:off x="1266901" y="1792681"/>
-            <a:ext cx="483718" cy="483718"/>
-          </a:xfrm>
-          <a:prstGeom prst="rect">
-            <a:avLst/>
-          </a:prstGeom>
-        </p:spPr>
-      </p:pic>
-      <p:sp>
-        <p:nvSpPr>
-          <p:cNvPr id="5" name="Arrow 1"/>
+      <p:sp>
+        <p:nvSpPr>
+          <p:cNvPr id="4" name="Authoring title"/>
+          <p:cNvSpPr txBox="1"/>
+          <p:nvPr/>
+        </p:nvSpPr>
+        <p:spPr>
+          <a:xfrm>
+            <a:off x="731520" y="1463040"/>
+            <a:ext cx="2560320" cy="320040"/>
+          </a:xfrm>
+          <a:prstGeom prst="rect">
+            <a:avLst/>
+          </a:prstGeom>
+          <a:noFill/>
+          <a:ln/>
+        </p:spPr>
+        <p:txBody>
+          <a:bodyPr wrap="square" lIns="0" tIns="0" rIns="0" bIns="0" rtlCol="0" anchor="t"/>
+          <a:lstStyle/>
+          <a:p>
+            <a:pPr indent="0" marL="0">
+              <a:buNone/>
+            </a:pPr>
+            <a:r>
+              <a:rPr lang="en-US" sz="1400" b="1" dirty="0">
+                <a:solidFill>
+                  <a:schemeClr val="tx2"/>
+                </a:solidFill>
+                <a:latin typeface="+mj-lt" pitchFamily="34" charset="0"/>
+                <a:ea typeface="+mj-lt" pitchFamily="34" charset="-122"/>
+                <a:cs typeface="+mj-lt" pitchFamily="34" charset="-120"/>
+              </a:rPr>
+              <a:t>Scenario authoring</a:t>
+            </a:r>
+            <a:endParaRPr lang="en-US" sz="1400" dirty="0"/>
+          </a:p>
+        </p:txBody>
+      </p:sp>
+      <p:sp>
+        <p:nvSpPr>
+          <p:cNvPr id="5" name="Authoring text"/>
+          <p:cNvSpPr txBox="1"/>
+          <p:nvPr/>
+        </p:nvSpPr>
+        <p:spPr>
+          <a:xfrm>
+            <a:off x="731520" y="1874520"/>
+            <a:ext cx="2606040" cy="1417320"/>
+          </a:xfrm>
+          <a:prstGeom prst="rect">
+            <a:avLst/>
+          </a:prstGeom>
+          <a:noFill/>
+          <a:ln/>
+        </p:spPr>
+        <p:txBody>
+          <a:bodyPr wrap="square" lIns="0" tIns="0" rIns="0" bIns="0" rtlCol="0" anchor="t"/>
+          <a:lstStyle/>
+          <a:p>
+            <a:pPr marL="342900" indent="-342900">
+              <a:spcAft>
+                <a:spcPts val="600"/>
+              </a:spcAft>
+              <a:buSzPct val="100000"/>
+              <a:buChar char="•"/>
+            </a:pPr>
+            <a:r>
+              <a:rPr lang="en-US" sz="1200" dirty="0">
+                <a:solidFill>
+                  <a:schemeClr val="tx1"/>
+                </a:solidFill>
+              </a:rPr>
+              <a:t>Clerks write scenarios in the Scenario Builder</a:t>
+            </a:r>
+            <a:endParaRPr lang="en-US" sz="1200" dirty="0"/>
+          </a:p>
+          <a:p>
+            <a:pPr marL="342900" indent="-342900">
+              <a:spcAft>
+                <a:spcPts val="600"/>
+              </a:spcAft>
+              <a:buSzPct val="100000"/>
+              <a:buChar char="•"/>
+            </a:pPr>
+            <a:r>
+              <a:rPr lang="en-US" sz="1200" dirty="0">
+                <a:solidFill>
+                  <a:schemeClr val="tx1"/>
+                </a:solidFill>
+              </a:rPr>
+              <a:t>NASA library: missions, CLiFFs, kits, crew</a:t>
+            </a:r>
+            <a:endParaRPr lang="en-US" sz="1200" dirty="0"/>
+          </a:p>
+          <a:p>
+            <a:pPr marL="342900" indent="-342900">
+              <a:spcAft>
+                <a:spcPts val="600"/>
+              </a:spcAft>
+              <a:buSzPct val="100000"/>
+              <a:buChar char="•"/>
+            </a:pPr>
+            <a:r>
+              <a:rPr lang="en-US" sz="1200" dirty="0">
+                <a:solidFill>
+                  <a:schemeClr val="tx1"/>
+                </a:solidFill>
+              </a:rPr>
+              <a:t>Physiologist reviews flagged scenarios</a:t>
+            </a:r>
+            <a:endParaRPr lang="en-US" sz="1200" dirty="0"/>
+          </a:p>
+        </p:txBody>
+      </p:sp>
+      <p:sp>
+        <p:nvSpPr>
+          <p:cNvPr id="6" name="Arrow authoring"/>
           <p:cNvSpPr/>
           <p:nvPr/>
         </p:nvSpPr>
         <p:spPr>
           <a:xfrm>
-            <a:off x="2144268" y="2034540"/>
-            <a:ext cx="1014984" cy="0"/>
+            <a:off x="3547872" y="2377440"/>
+            <a:ext cx="329184" cy="0"/>
           </a:xfrm>
           <a:prstGeom prst="line">
             <a:avLst/>
@@ -4288,14 +5034,38 @@
       </p:sp>
       <p:sp>
         <p:nvSpPr>
-          <p:cNvPr id="6" name="Step 1 title"/>
+          <p:cNvPr id="7" name="Simulation group"/>
+          <p:cNvSpPr/>
+          <p:nvPr/>
+        </p:nvSpPr>
+        <p:spPr>
+          <a:xfrm>
+            <a:off x="3931920" y="1325880"/>
+            <a:ext cx="4023360" cy="2103120"/>
+          </a:xfrm>
+          <a:prstGeom prst="roundRect">
+            <a:avLst>
+              <a:gd name="adj" fmla="val 3478"/>
+            </a:avLst>
+          </a:prstGeom>
+          <a:ln w="15875">
+            <a:solidFill>
+              <a:schemeClr val="accent2"/>
+            </a:solidFill>
+            <a:prstDash val="dash"/>
+          </a:ln>
+        </p:spPr>
+      </p:sp>
+      <p:sp>
+        <p:nvSpPr>
+          <p:cNvPr id="8" name="Simulation label"/>
           <p:cNvSpPr txBox="1"/>
           <p:nvPr/>
         </p:nvSpPr>
         <p:spPr>
           <a:xfrm>
-            <a:off x="548640" y="2743200"/>
-            <a:ext cx="1920240" cy="411480"/>
+            <a:off x="4114800" y="1399032"/>
+            <a:ext cx="3657600" cy="274320"/>
           </a:xfrm>
           <a:prstGeom prst="rect">
             <a:avLst/>
@@ -4307,11 +5077,72 @@
           <a:bodyPr wrap="square" lIns="0" tIns="0" rIns="0" bIns="0" rtlCol="0" anchor="t"/>
           <a:lstStyle/>
           <a:p>
-            <a:pPr algn="ctr" indent="0" marL="0">
-              <a:buNone/>
-            </a:pPr>
-            <a:r>
-              <a:rPr lang="en-US" sz="1900" b="1" dirty="0">
+            <a:pPr indent="0" marL="0">
+              <a:buNone/>
+            </a:pPr>
+            <a:r>
+              <a:rPr lang="en-US" sz="1200" b="1" dirty="0">
+                <a:solidFill>
+                  <a:schemeClr val="accent3"/>
+                </a:solidFill>
+              </a:rPr>
+              <a:t>MedSim Eval · runs locally</a:t>
+            </a:r>
+            <a:endParaRPr lang="en-US" sz="1200" dirty="0"/>
+          </a:p>
+        </p:txBody>
+      </p:sp>
+      <p:sp>
+        <p:nvSpPr>
+          <p:cNvPr id="9" name="User agent box"/>
+          <p:cNvSpPr/>
+          <p:nvPr/>
+        </p:nvSpPr>
+        <p:spPr>
+          <a:xfrm>
+            <a:off x="4114800" y="1719072"/>
+            <a:ext cx="3657600" cy="749808"/>
+          </a:xfrm>
+          <a:prstGeom prst="roundRect">
+            <a:avLst>
+              <a:gd name="adj" fmla="val 9756"/>
+            </a:avLst>
+          </a:prstGeom>
+          <a:solidFill>
+            <a:schemeClr val="bg2"/>
+          </a:solidFill>
+          <a:ln/>
+        </p:spPr>
+      </p:sp>
+      <p:sp>
+        <p:nvSpPr>
+          <p:cNvPr id="10" name="User agent text"/>
+          <p:cNvSpPr txBox="1"/>
+          <p:nvPr/>
+        </p:nvSpPr>
+        <p:spPr>
+          <a:xfrm>
+            <a:off x="4242816" y="1810512"/>
+            <a:ext cx="3401568" cy="566928"/>
+          </a:xfrm>
+          <a:prstGeom prst="rect">
+            <a:avLst/>
+          </a:prstGeom>
+          <a:noFill/>
+          <a:ln/>
+        </p:spPr>
+        <p:txBody>
+          <a:bodyPr wrap="square" lIns="0" tIns="0" rIns="0" bIns="0" rtlCol="0" anchor="ctr"/>
+          <a:lstStyle/>
+          <a:p>
+            <a:pPr indent="0" marL="0">
+              <a:spcAft>
+                <a:spcPts val="200"/>
+              </a:spcAft>
+              <a:buNone/>
+            </a:pPr>
+            <a:r>
+              <a:rPr lang="en-US" sz="1400" b="1" dirty="0">
                 <a:solidFill>
                   <a:schemeClr val="tx2"/>
                 </a:solidFill>
@@ -4319,22 +5150,61 @@
                 <a:ea typeface="+mj-lt" pitchFamily="34" charset="-122"/>
                 <a:cs typeface="+mj-lt" pitchFamily="34" charset="-120"/>
               </a:rPr>
-              <a:t>Author</a:t>
-            </a:r>
-            <a:endParaRPr lang="en-US" sz="1900" dirty="0"/>
-          </a:p>
-        </p:txBody>
-      </p:sp>
-      <p:sp>
-        <p:nvSpPr>
-          <p:cNvPr id="7" name="Step 1 text"/>
+              <a:t>AI crewmember (user agent)</a:t>
+            </a:r>
+            <a:endParaRPr lang="en-US" sz="1400" dirty="0"/>
+          </a:p>
+          <a:p>
+            <a:pPr indent="0" marL="0">
+              <a:spcAft>
+                <a:spcPts val="200"/>
+              </a:spcAft>
+              <a:buNone/>
+            </a:pPr>
+            <a:r>
+              <a:rPr lang="en-US" sz="1200" dirty="0">
+                <a:solidFill>
+                  <a:schemeClr val="tx1"/>
+                </a:solidFill>
+              </a:rPr>
+              <a:t>Plays the patient or CMO, as the scenario describes</a:t>
+            </a:r>
+            <a:endParaRPr lang="en-US" sz="1400" dirty="0"/>
+          </a:p>
+        </p:txBody>
+      </p:sp>
+      <p:sp>
+        <p:nvSpPr>
+          <p:cNvPr id="11" name="Twin box"/>
+          <p:cNvSpPr/>
+          <p:nvPr/>
+        </p:nvSpPr>
+        <p:spPr>
+          <a:xfrm>
+            <a:off x="4114800" y="2560320"/>
+            <a:ext cx="3657600" cy="749808"/>
+          </a:xfrm>
+          <a:prstGeom prst="roundRect">
+            <a:avLst>
+              <a:gd name="adj" fmla="val 9756"/>
+            </a:avLst>
+          </a:prstGeom>
+          <a:solidFill>
+            <a:schemeClr val="bg2"/>
+          </a:solidFill>
+          <a:ln/>
+        </p:spPr>
+      </p:sp>
+      <p:sp>
+        <p:nvSpPr>
+          <p:cNvPr id="12" name="Twin text"/>
           <p:cNvSpPr txBox="1"/>
           <p:nvPr/>
         </p:nvSpPr>
         <p:spPr>
           <a:xfrm>
-            <a:off x="548640" y="3200400"/>
-            <a:ext cx="1920240" cy="1280160"/>
+            <a:off x="4242816" y="2651760"/>
+            <a:ext cx="3401568" cy="566928"/>
           </a:xfrm>
           <a:prstGeom prst="rect">
             <a:avLst/>
@@ -4343,6 +5213,146 @@
           <a:ln/>
         </p:spPr>
         <p:txBody>
+          <a:bodyPr wrap="square" lIns="0" tIns="0" rIns="0" bIns="0" rtlCol="0" anchor="ctr"/>
+          <a:lstStyle/>
+          <a:p>
+            <a:pPr indent="0" marL="0">
+              <a:spcAft>
+                <a:spcPts val="200"/>
+              </a:spcAft>
+              <a:buNone/>
+            </a:pPr>
+            <a:r>
+              <a:rPr lang="en-US" sz="1400" b="1" dirty="0">
+                <a:solidFill>
+                  <a:schemeClr val="tx2"/>
+                </a:solidFill>
+                <a:latin typeface="+mj-lt" pitchFamily="34" charset="0"/>
+                <a:ea typeface="+mj-lt" pitchFamily="34" charset="-122"/>
+                <a:cs typeface="+mj-lt" pitchFamily="34" charset="-120"/>
+              </a:rPr>
+              <a:t>Digital twin</a:t>
+            </a:r>
+            <a:endParaRPr lang="en-US" sz="1400" dirty="0"/>
+          </a:p>
+          <a:p>
+            <a:pPr indent="0" marL="0">
+              <a:spcAft>
+                <a:spcPts val="200"/>
+              </a:spcAft>
+              <a:buNone/>
+            </a:pPr>
+            <a:r>
+              <a:rPr lang="en-US" sz="1200" dirty="0">
+                <a:solidFill>
+                  <a:schemeClr val="tx1"/>
+                </a:solidFill>
+              </a:rPr>
+              <a:t>Patient physiology, onboard kit and a simulated clock</a:t>
+            </a:r>
+            <a:endParaRPr lang="en-US" sz="1400" dirty="0"/>
+          </a:p>
+        </p:txBody>
+      </p:sp>
+      <p:sp>
+        <p:nvSpPr>
+          <p:cNvPr id="13" name="Assistant box"/>
+          <p:cNvSpPr/>
+          <p:nvPr/>
+        </p:nvSpPr>
+        <p:spPr>
+          <a:xfrm>
+            <a:off x="9144000" y="1325880"/>
+            <a:ext cx="2468880" cy="2103120"/>
+          </a:xfrm>
+          <a:prstGeom prst="roundRect">
+            <a:avLst>
+              <a:gd name="adj" fmla="val 3478"/>
+            </a:avLst>
+          </a:prstGeom>
+          <a:solidFill>
+            <a:schemeClr val="accent1"/>
+          </a:solidFill>
+          <a:ln/>
+        </p:spPr>
+      </p:sp>
+      <p:sp>
+        <p:nvSpPr>
+          <p:cNvPr id="14" name="Assistant text"/>
+          <p:cNvSpPr txBox="1"/>
+          <p:nvPr/>
+        </p:nvSpPr>
+        <p:spPr>
+          <a:xfrm>
+            <a:off x="9326880" y="1463040"/>
+            <a:ext cx="2103120" cy="1828800"/>
+          </a:xfrm>
+          <a:prstGeom prst="rect">
+            <a:avLst/>
+          </a:prstGeom>
+          <a:noFill/>
+          <a:ln/>
+        </p:spPr>
+        <p:txBody>
+          <a:bodyPr wrap="square" lIns="0" tIns="0" rIns="0" bIns="0" rtlCol="0" anchor="ctr"/>
+          <a:lstStyle/>
+          <a:p>
+            <a:pPr indent="0" marL="0">
+              <a:spcAft>
+                <a:spcPts val="400"/>
+              </a:spcAft>
+              <a:buNone/>
+            </a:pPr>
+            <a:r>
+              <a:rPr lang="en-US" sz="1600" b="1" dirty="0">
+                <a:solidFill>
+                  <a:schemeClr val="bg1"/>
+                </a:solidFill>
+                <a:latin typeface="+mj-lt" pitchFamily="34" charset="0"/>
+                <a:ea typeface="+mj-lt" pitchFamily="34" charset="-122"/>
+                <a:cs typeface="+mj-lt" pitchFamily="34" charset="-120"/>
+              </a:rPr>
+              <a:t>Assistant under test</a:t>
+            </a:r>
+            <a:endParaRPr lang="en-US" sz="1500" dirty="0"/>
+          </a:p>
+          <a:p>
+            <a:pPr indent="0" marL="0">
+              <a:spcAft>
+                <a:spcPts val="400"/>
+              </a:spcAft>
+              <a:buNone/>
+            </a:pPr>
+            <a:r>
+              <a:rPr lang="en-US" sz="1300" dirty="0">
+                <a:solidFill>
+                  <a:schemeClr val="bg1"/>
+                </a:solidFill>
+              </a:rPr>
+              <a:t>SpaceDoc, CMO-DA or any other</a:t>
+            </a:r>
+            <a:endParaRPr lang="en-US" sz="1500" dirty="0"/>
+          </a:p>
+        </p:txBody>
+      </p:sp>
+      <p:sp>
+        <p:nvSpPr>
+          <p:cNvPr id="15" name="Conversation label"/>
+          <p:cNvSpPr txBox="1"/>
+          <p:nvPr/>
+        </p:nvSpPr>
+        <p:spPr>
+          <a:xfrm>
+            <a:off x="8001000" y="1810512"/>
+            <a:ext cx="1097280" cy="228600"/>
+          </a:xfrm>
+          <a:prstGeom prst="rect">
+            <a:avLst/>
+          </a:prstGeom>
+          <a:noFill/>
+          <a:ln/>
+        </p:spPr>
+        <p:txBody>
           <a:bodyPr wrap="square" lIns="0" tIns="0" rIns="0" bIns="0" rtlCol="0" anchor="t"/>
           <a:lstStyle/>
           <a:p>
@@ -4350,71 +5360,113 @@
               <a:buNone/>
             </a:pPr>
             <a:r>
-              <a:rPr lang="en-US" sz="1400" dirty="0">
-                <a:solidFill>
-                  <a:schemeClr val="tx1"/>
-                </a:solidFill>
-              </a:rPr>
-              <a:t>Clerks write a case in the offline Scenario Builder</a:t>
-            </a:r>
-            <a:endParaRPr lang="en-US" sz="1400" dirty="0"/>
-          </a:p>
-        </p:txBody>
-      </p:sp>
-      <p:sp>
-        <p:nvSpPr>
-          <p:cNvPr id="8" name="Step 2 circle"/>
+              <a:rPr lang="en-US" sz="1200" dirty="0">
+                <a:solidFill>
+                  <a:schemeClr val="accent3"/>
+                </a:solidFill>
+              </a:rPr>
+              <a:t>Conversation</a:t>
+            </a:r>
+            <a:endParaRPr lang="en-US" sz="1200" dirty="0"/>
+          </a:p>
+        </p:txBody>
+      </p:sp>
+      <p:sp>
+        <p:nvSpPr>
+          <p:cNvPr id="16" name="Arrow conversation"/>
           <p:cNvSpPr/>
           <p:nvPr/>
         </p:nvSpPr>
         <p:spPr>
           <a:xfrm>
-            <a:off x="3268980" y="1508760"/>
-            <a:ext cx="1051560" cy="1051560"/>
-          </a:xfrm>
-          <a:prstGeom prst="ellipse">
-            <a:avLst/>
-          </a:prstGeom>
-          <a:solidFill>
-            <a:schemeClr val="tx2"/>
-          </a:solidFill>
-          <a:ln/>
-        </p:spPr>
-      </p:sp>
-      <p:pic>
-        <p:nvPicPr>
-          <p:cNvPr id="9" name="Step 2 icon" descr="preencoded.png">    </p:cNvPr>
-          <p:cNvPicPr>
-            <a:picLocks noChangeAspect="1"/>
-          </p:cNvPicPr>
-          <p:nvPr/>
-        </p:nvPicPr>
-        <p:blipFill>
-          <a:blip r:embed="rId2"/>
-          <a:stretch>
-            <a:fillRect/>
-          </a:stretch>
-        </p:blipFill>
-        <p:spPr>
-          <a:xfrm>
-            <a:off x="3552901" y="1792681"/>
-            <a:ext cx="483718" cy="483718"/>
-          </a:xfrm>
-          <a:prstGeom prst="rect">
-            <a:avLst/>
-          </a:prstGeom>
-        </p:spPr>
-      </p:pic>
-      <p:sp>
-        <p:nvSpPr>
-          <p:cNvPr id="10" name="Arrow 2"/>
+            <a:off x="7863840" y="2093976"/>
+            <a:ext cx="1207008" cy="0"/>
+          </a:xfrm>
+          <a:prstGeom prst="line">
+            <a:avLst/>
+          </a:prstGeom>
+          <a:noFill/>
+          <a:ln w="19050">
+            <a:solidFill>
+              <a:schemeClr val="accent2"/>
+            </a:solidFill>
+            <a:prstDash val="solid"/>
+            <a:headEnd type="triangle"/>
+            <a:tailEnd type="triangle"/>
+          </a:ln>
+        </p:spPr>
+      </p:sp>
+      <p:sp>
+        <p:nvSpPr>
+          <p:cNvPr id="17" name="Tools label"/>
+          <p:cNvSpPr txBox="1"/>
+          <p:nvPr/>
+        </p:nvSpPr>
+        <p:spPr>
+          <a:xfrm>
+            <a:off x="8001000" y="2651760"/>
+            <a:ext cx="1097280" cy="228600"/>
+          </a:xfrm>
+          <a:prstGeom prst="rect">
+            <a:avLst/>
+          </a:prstGeom>
+          <a:noFill/>
+          <a:ln/>
+        </p:spPr>
+        <p:txBody>
+          <a:bodyPr wrap="square" lIns="0" tIns="0" rIns="0" bIns="0" rtlCol="0" anchor="t"/>
+          <a:lstStyle/>
+          <a:p>
+            <a:pPr algn="ctr" indent="0" marL="0">
+              <a:buNone/>
+            </a:pPr>
+            <a:r>
+              <a:rPr lang="en-US" sz="1200" dirty="0">
+                <a:solidFill>
+                  <a:schemeClr val="accent3"/>
+                </a:solidFill>
+              </a:rPr>
+              <a:t>MCP tools</a:t>
+            </a:r>
+            <a:endParaRPr lang="en-US" sz="1200" dirty="0"/>
+          </a:p>
+        </p:txBody>
+      </p:sp>
+      <p:sp>
+        <p:nvSpPr>
+          <p:cNvPr id="18" name="Arrow tools"/>
           <p:cNvSpPr/>
           <p:nvPr/>
         </p:nvSpPr>
         <p:spPr>
           <a:xfrm>
-            <a:off x="4430268" y="2034540"/>
-            <a:ext cx="1014984" cy="0"/>
+            <a:off x="7863840" y="2935224"/>
+            <a:ext cx="1207008" cy="0"/>
+          </a:xfrm>
+          <a:prstGeom prst="line">
+            <a:avLst/>
+          </a:prstGeom>
+          <a:noFill/>
+          <a:ln w="19050">
+            <a:solidFill>
+              <a:schemeClr val="accent2"/>
+            </a:solidFill>
+            <a:prstDash val="solid"/>
+            <a:headEnd type="triangle"/>
+            <a:tailEnd type="triangle"/>
+          </a:ln>
+        </p:spPr>
+      </p:sp>
+      <p:sp>
+        <p:nvSpPr>
+          <p:cNvPr id="19" name="Arrow to log"/>
+          <p:cNvSpPr/>
+          <p:nvPr/>
+        </p:nvSpPr>
+        <p:spPr>
+          <a:xfrm>
+            <a:off x="5943600" y="3456432"/>
+            <a:ext cx="0" cy="201168"/>
           </a:xfrm>
           <a:prstGeom prst="line">
             <a:avLst/>
@@ -4431,133 +5483,54 @@
       </p:sp>
       <p:sp>
         <p:nvSpPr>
-          <p:cNvPr id="11" name="Step 2 title"/>
-          <p:cNvSpPr txBox="1"/>
-          <p:nvPr/>
-        </p:nvSpPr>
-        <p:spPr>
-          <a:xfrm>
-            <a:off x="2834640" y="2743200"/>
-            <a:ext cx="1920240" cy="411480"/>
-          </a:xfrm>
-          <a:prstGeom prst="rect">
-            <a:avLst/>
-          </a:prstGeom>
-          <a:noFill/>
-          <a:ln/>
-        </p:spPr>
-        <p:txBody>
-          <a:bodyPr wrap="square" lIns="0" tIns="0" rIns="0" bIns="0" rtlCol="0" anchor="t"/>
+          <p:cNvPr id="20" name="Run log band"/>
+          <p:cNvSpPr/>
+          <p:nvPr/>
+        </p:nvSpPr>
+        <p:spPr>
+          <a:xfrm>
+            <a:off x="548640" y="3675888"/>
+            <a:ext cx="11064240" cy="384048"/>
+          </a:xfrm>
+          <a:prstGeom prst="roundRect">
+            <a:avLst>
+              <a:gd name="adj" fmla="val 19048"/>
+            </a:avLst>
+          </a:prstGeom>
+          <a:solidFill>
+            <a:schemeClr val="bg2"/>
+          </a:solidFill>
+          <a:ln/>
+        </p:spPr>
+        <p:txBody>
+          <a:bodyPr wrap="square" lIns="0" tIns="0" rIns="0" bIns="0" rtlCol="0" anchor="ctr"/>
           <a:lstStyle/>
           <a:p>
             <a:pPr algn="ctr" indent="0" marL="0">
               <a:buNone/>
             </a:pPr>
             <a:r>
-              <a:rPr lang="en-US" sz="1900" b="1" dirty="0">
-                <a:solidFill>
-                  <a:schemeClr val="tx2"/>
-                </a:solidFill>
-                <a:latin typeface="+mj-lt" pitchFamily="34" charset="0"/>
-                <a:ea typeface="+mj-lt" pitchFamily="34" charset="-122"/>
-                <a:cs typeface="+mj-lt" pitchFamily="34" charset="-120"/>
-              </a:rPr>
-              <a:t>Simulate</a:t>
-            </a:r>
-            <a:endParaRPr lang="en-US" sz="1900" dirty="0"/>
-          </a:p>
-        </p:txBody>
-      </p:sp>
-      <p:sp>
-        <p:nvSpPr>
-          <p:cNvPr id="12" name="Step 2 text"/>
-          <p:cNvSpPr txBox="1"/>
-          <p:nvPr/>
-        </p:nvSpPr>
-        <p:spPr>
-          <a:xfrm>
-            <a:off x="2834640" y="3200400"/>
-            <a:ext cx="1920240" cy="1280160"/>
-          </a:xfrm>
-          <a:prstGeom prst="rect">
-            <a:avLst/>
-          </a:prstGeom>
-          <a:noFill/>
-          <a:ln/>
-        </p:spPr>
-        <p:txBody>
-          <a:bodyPr wrap="square" lIns="0" tIns="0" rIns="0" bIns="0" rtlCol="0" anchor="t"/>
-          <a:lstStyle/>
-          <a:p>
-            <a:pPr algn="ctr" indent="0" marL="0">
-              <a:buNone/>
-            </a:pPr>
-            <a:r>
-              <a:rPr lang="en-US" sz="1400" dirty="0">
+              <a:rPr lang="en-US" sz="1200" dirty="0">
                 <a:solidFill>
                   <a:schemeClr val="tx1"/>
                 </a:solidFill>
               </a:rPr>
-              <a:t>Digital twin of patient, vehicle and environment, on a simulated clock</a:t>
-            </a:r>
-            <a:endParaRPr lang="en-US" sz="1400" dirty="0"/>
-          </a:p>
-        </p:txBody>
-      </p:sp>
-      <p:sp>
-        <p:nvSpPr>
-          <p:cNvPr id="13" name="Step 3 circle"/>
+              <a:t>Every run logs the conversation, tool calls (vitals, exams, tests, treatments) and twin state, in simulated time</a:t>
+            </a:r>
+            <a:endParaRPr lang="en-US" sz="1200" dirty="0"/>
+          </a:p>
+        </p:txBody>
+      </p:sp>
+      <p:sp>
+        <p:nvSpPr>
+          <p:cNvPr id="21" name="Arrow to scorer"/>
           <p:cNvSpPr/>
           <p:nvPr/>
         </p:nvSpPr>
         <p:spPr>
           <a:xfrm>
-            <a:off x="5554980" y="1508760"/>
-            <a:ext cx="1051560" cy="1051560"/>
-          </a:xfrm>
-          <a:prstGeom prst="ellipse">
-            <a:avLst/>
-          </a:prstGeom>
-          <a:solidFill>
-            <a:schemeClr val="tx2"/>
-          </a:solidFill>
-          <a:ln/>
-        </p:spPr>
-      </p:sp>
-      <p:pic>
-        <p:nvPicPr>
-          <p:cNvPr id="14" name="Step 3 icon" descr="preencoded.png">    </p:cNvPr>
-          <p:cNvPicPr>
-            <a:picLocks noChangeAspect="1"/>
-          </p:cNvPicPr>
-          <p:nvPr/>
-        </p:nvPicPr>
-        <p:blipFill>
-          <a:blip r:embed="rId3"/>
-          <a:stretch>
-            <a:fillRect/>
-          </a:stretch>
-        </p:blipFill>
-        <p:spPr>
-          <a:xfrm>
-            <a:off x="5838901" y="1792681"/>
-            <a:ext cx="483718" cy="483718"/>
-          </a:xfrm>
-          <a:prstGeom prst="rect">
-            <a:avLst/>
-          </a:prstGeom>
-        </p:spPr>
-      </p:pic>
-      <p:sp>
-        <p:nvSpPr>
-          <p:cNvPr id="15" name="Arrow 3"/>
-          <p:cNvSpPr/>
-          <p:nvPr/>
-        </p:nvSpPr>
-        <p:spPr>
-          <a:xfrm>
-            <a:off x="6716268" y="2034540"/>
-            <a:ext cx="1014984" cy="0"/>
+            <a:off x="1490472" y="4078224"/>
+            <a:ext cx="0" cy="182880"/>
           </a:xfrm>
           <a:prstGeom prst="line">
             <a:avLst/>
@@ -4574,14 +5547,36 @@
       </p:sp>
       <p:sp>
         <p:nvSpPr>
-          <p:cNvPr id="16" name="Step 3 title"/>
+          <p:cNvPr id="22" name="Pipeline 1 box"/>
+          <p:cNvSpPr/>
+          <p:nvPr/>
+        </p:nvSpPr>
+        <p:spPr>
+          <a:xfrm>
+            <a:off x="548640" y="4279392"/>
+            <a:ext cx="1883664" cy="1188720"/>
+          </a:xfrm>
+          <a:prstGeom prst="roundRect">
+            <a:avLst>
+              <a:gd name="adj" fmla="val 6154"/>
+            </a:avLst>
+          </a:prstGeom>
+          <a:solidFill>
+            <a:schemeClr val="bg2"/>
+          </a:solidFill>
+          <a:ln/>
+        </p:spPr>
+      </p:sp>
+      <p:sp>
+        <p:nvSpPr>
+          <p:cNvPr id="23" name="Pipeline 1 text"/>
           <p:cNvSpPr txBox="1"/>
           <p:nvPr/>
         </p:nvSpPr>
         <p:spPr>
           <a:xfrm>
-            <a:off x="5120640" y="2743200"/>
-            <a:ext cx="1920240" cy="411480"/>
+            <a:off x="676656" y="4370832"/>
+            <a:ext cx="1627632" cy="1005840"/>
           </a:xfrm>
           <a:prstGeom prst="rect">
             <a:avLst/>
@@ -4590,14 +5585,17 @@
           <a:ln/>
         </p:spPr>
         <p:txBody>
-          <a:bodyPr wrap="square" lIns="0" tIns="0" rIns="0" bIns="0" rtlCol="0" anchor="t"/>
-          <a:lstStyle/>
-          <a:p>
-            <a:pPr algn="ctr" indent="0" marL="0">
-              <a:buNone/>
-            </a:pPr>
-            <a:r>
-              <a:rPr lang="en-US" sz="1900" b="1" dirty="0">
+          <a:bodyPr wrap="square" lIns="0" tIns="0" rIns="0" bIns="0" rtlCol="0" anchor="ctr"/>
+          <a:lstStyle/>
+          <a:p>
+            <a:pPr indent="0" marL="0">
+              <a:spcAft>
+                <a:spcPts val="200"/>
+              </a:spcAft>
+              <a:buNone/>
+            </a:pPr>
+            <a:r>
+              <a:rPr lang="en-US" sz="1400" b="1" dirty="0">
                 <a:solidFill>
                   <a:schemeClr val="tx2"/>
                 </a:solidFill>
@@ -4605,43 +5603,24 @@
                 <a:ea typeface="+mj-lt" pitchFamily="34" charset="-122"/>
                 <a:cs typeface="+mj-lt" pitchFamily="34" charset="-120"/>
               </a:rPr>
-              <a:t>Converse</a:t>
-            </a:r>
-            <a:endParaRPr lang="en-US" sz="1900" dirty="0"/>
-          </a:p>
-        </p:txBody>
-      </p:sp>
-      <p:sp>
-        <p:nvSpPr>
-          <p:cNvPr id="17" name="Step 3 text"/>
-          <p:cNvSpPr txBox="1"/>
-          <p:nvPr/>
-        </p:nvSpPr>
-        <p:spPr>
-          <a:xfrm>
-            <a:off x="5120640" y="3200400"/>
-            <a:ext cx="1920240" cy="1280160"/>
-          </a:xfrm>
-          <a:prstGeom prst="rect">
-            <a:avLst/>
-          </a:prstGeom>
-          <a:noFill/>
-          <a:ln/>
-        </p:spPr>
-        <p:txBody>
-          <a:bodyPr wrap="square" lIns="0" tIns="0" rIns="0" bIns="0" rtlCol="0" anchor="t"/>
-          <a:lstStyle/>
-          <a:p>
-            <a:pPr algn="ctr" indent="0" marL="0">
-              <a:buNone/>
-            </a:pPr>
-            <a:r>
-              <a:rPr lang="en-US" sz="1400" dirty="0">
+              <a:t>Scorer</a:t>
+            </a:r>
+            <a:endParaRPr lang="en-US" sz="1400" dirty="0"/>
+          </a:p>
+          <a:p>
+            <a:pPr indent="0" marL="0">
+              <a:spcAft>
+                <a:spcPts val="200"/>
+              </a:spcAft>
+              <a:buNone/>
+            </a:pPr>
+            <a:r>
+              <a:rPr lang="en-US" sz="1200" dirty="0">
                 <a:solidFill>
                   <a:schemeClr val="tx1"/>
                 </a:solidFill>
               </a:rPr>
-              <a:t>An AI plays the crewmember; the assistant under test responds</a:t>
+              <a:t>Checks each rubric item in each run, citing evidence</a:t>
             </a:r>
             <a:endParaRPr lang="en-US" sz="1400" dirty="0"/>
           </a:p>
@@ -4649,58 +5628,14 @@
       </p:sp>
       <p:sp>
         <p:nvSpPr>
-          <p:cNvPr id="18" name="Step 4 circle"/>
+          <p:cNvPr id="24" name="Arrow pipeline 1"/>
           <p:cNvSpPr/>
           <p:nvPr/>
         </p:nvSpPr>
         <p:spPr>
           <a:xfrm>
-            <a:off x="7840980" y="1508760"/>
-            <a:ext cx="1051560" cy="1051560"/>
-          </a:xfrm>
-          <a:prstGeom prst="ellipse">
-            <a:avLst/>
-          </a:prstGeom>
-          <a:solidFill>
-            <a:schemeClr val="tx2"/>
-          </a:solidFill>
-          <a:ln/>
-        </p:spPr>
-      </p:sp>
-      <p:pic>
-        <p:nvPicPr>
-          <p:cNvPr id="19" name="Step 4 icon" descr="preencoded.png">    </p:cNvPr>
-          <p:cNvPicPr>
-            <a:picLocks noChangeAspect="1"/>
-          </p:cNvPicPr>
-          <p:nvPr/>
-        </p:nvPicPr>
-        <p:blipFill>
-          <a:blip r:embed="rId4"/>
-          <a:stretch>
-            <a:fillRect/>
-          </a:stretch>
-        </p:blipFill>
-        <p:spPr>
-          <a:xfrm>
-            <a:off x="8124901" y="1792681"/>
-            <a:ext cx="483718" cy="483718"/>
-          </a:xfrm>
-          <a:prstGeom prst="rect">
-            <a:avLst/>
-          </a:prstGeom>
-        </p:spPr>
-      </p:pic>
-      <p:sp>
-        <p:nvSpPr>
-          <p:cNvPr id="20" name="Arrow 4"/>
-          <p:cNvSpPr/>
-          <p:nvPr/>
-        </p:nvSpPr>
-        <p:spPr>
-          <a:xfrm>
-            <a:off x="9002268" y="2034540"/>
-            <a:ext cx="1014984" cy="0"/>
+            <a:off x="2468880" y="4873752"/>
+            <a:ext cx="338328" cy="0"/>
           </a:xfrm>
           <a:prstGeom prst="line">
             <a:avLst/>
@@ -4717,14 +5652,36 @@
       </p:sp>
       <p:sp>
         <p:nvSpPr>
-          <p:cNvPr id="21" name="Step 4 title"/>
+          <p:cNvPr id="25" name="Pipeline 2 box"/>
+          <p:cNvSpPr/>
+          <p:nvPr/>
+        </p:nvSpPr>
+        <p:spPr>
+          <a:xfrm>
+            <a:off x="2843784" y="4279392"/>
+            <a:ext cx="1883664" cy="1188720"/>
+          </a:xfrm>
+          <a:prstGeom prst="roundRect">
+            <a:avLst>
+              <a:gd name="adj" fmla="val 6154"/>
+            </a:avLst>
+          </a:prstGeom>
+          <a:solidFill>
+            <a:schemeClr val="bg2"/>
+          </a:solidFill>
+          <a:ln/>
+        </p:spPr>
+      </p:sp>
+      <p:sp>
+        <p:nvSpPr>
+          <p:cNvPr id="26" name="Pipeline 2 text"/>
           <p:cNvSpPr txBox="1"/>
           <p:nvPr/>
         </p:nvSpPr>
         <p:spPr>
           <a:xfrm>
-            <a:off x="7406640" y="2743200"/>
-            <a:ext cx="1920240" cy="411480"/>
+            <a:off x="2971800" y="4370832"/>
+            <a:ext cx="1627632" cy="1005840"/>
           </a:xfrm>
           <a:prstGeom prst="rect">
             <a:avLst/>
@@ -4733,14 +5690,17 @@
           <a:ln/>
         </p:spPr>
         <p:txBody>
-          <a:bodyPr wrap="square" lIns="0" tIns="0" rIns="0" bIns="0" rtlCol="0" anchor="t"/>
-          <a:lstStyle/>
-          <a:p>
-            <a:pPr algn="ctr" indent="0" marL="0">
-              <a:buNone/>
-            </a:pPr>
-            <a:r>
-              <a:rPr lang="en-US" sz="1900" b="1" dirty="0">
+          <a:bodyPr wrap="square" lIns="0" tIns="0" rIns="0" bIns="0" rtlCol="0" anchor="ctr"/>
+          <a:lstStyle/>
+          <a:p>
+            <a:pPr indent="0" marL="0">
+              <a:spcAft>
+                <a:spcPts val="200"/>
+              </a:spcAft>
+              <a:buNone/>
+            </a:pPr>
+            <a:r>
+              <a:rPr lang="en-US" sz="1400" b="1" dirty="0">
                 <a:solidFill>
                   <a:schemeClr val="tx2"/>
                 </a:solidFill>
@@ -4748,22 +5708,85 @@
                 <a:ea typeface="+mj-lt" pitchFamily="34" charset="-122"/>
                 <a:cs typeface="+mj-lt" pitchFamily="34" charset="-120"/>
               </a:rPr>
-              <a:t>Score</a:t>
-            </a:r>
-            <a:endParaRPr lang="en-US" sz="1900" dirty="0"/>
-          </a:p>
-        </p:txBody>
-      </p:sp>
-      <p:sp>
-        <p:nvSpPr>
-          <p:cNvPr id="22" name="Step 4 text"/>
+              <a:t>Judge</a:t>
+            </a:r>
+            <a:endParaRPr lang="en-US" sz="1400" dirty="0"/>
+          </a:p>
+          <a:p>
+            <a:pPr indent="0" marL="0">
+              <a:spcAft>
+                <a:spcPts val="200"/>
+              </a:spcAft>
+              <a:buNone/>
+            </a:pPr>
+            <a:r>
+              <a:rPr lang="en-US" sz="1200" dirty="0">
+                <a:solidFill>
+                  <a:schemeClr val="tx1"/>
+                </a:solidFill>
+              </a:rPr>
+              <a:t>Reads all 8 runs, summarises and flags anomalies</a:t>
+            </a:r>
+            <a:endParaRPr lang="en-US" sz="1400" dirty="0"/>
+          </a:p>
+        </p:txBody>
+      </p:sp>
+      <p:sp>
+        <p:nvSpPr>
+          <p:cNvPr id="27" name="Arrow pipeline 2"/>
+          <p:cNvSpPr/>
+          <p:nvPr/>
+        </p:nvSpPr>
+        <p:spPr>
+          <a:xfrm>
+            <a:off x="4764024" y="4873752"/>
+            <a:ext cx="338328" cy="0"/>
+          </a:xfrm>
+          <a:prstGeom prst="line">
+            <a:avLst/>
+          </a:prstGeom>
+          <a:noFill/>
+          <a:ln w="19050">
+            <a:solidFill>
+              <a:schemeClr val="accent2"/>
+            </a:solidFill>
+            <a:prstDash val="solid"/>
+            <a:tailEnd type="triangle"/>
+          </a:ln>
+        </p:spPr>
+      </p:sp>
+      <p:sp>
+        <p:nvSpPr>
+          <p:cNvPr id="28" name="Pipeline 3 box"/>
+          <p:cNvSpPr/>
+          <p:nvPr/>
+        </p:nvSpPr>
+        <p:spPr>
+          <a:xfrm>
+            <a:off x="5138928" y="4279392"/>
+            <a:ext cx="1883664" cy="1188720"/>
+          </a:xfrm>
+          <a:prstGeom prst="roundRect">
+            <a:avLst>
+              <a:gd name="adj" fmla="val 6154"/>
+            </a:avLst>
+          </a:prstGeom>
+          <a:solidFill>
+            <a:schemeClr val="bg2"/>
+          </a:solidFill>
+          <a:ln/>
+        </p:spPr>
+      </p:sp>
+      <p:sp>
+        <p:nvSpPr>
+          <p:cNvPr id="29" name="Pipeline 3 text"/>
           <p:cNvSpPr txBox="1"/>
           <p:nvPr/>
         </p:nvSpPr>
         <p:spPr>
           <a:xfrm>
-            <a:off x="7406640" y="3200400"/>
-            <a:ext cx="1920240" cy="1280160"/>
+            <a:off x="5266944" y="4370832"/>
+            <a:ext cx="1627632" cy="1005840"/>
           </a:xfrm>
           <a:prstGeom prst="rect">
             <a:avLst/>
@@ -4772,19 +5795,42 @@
           <a:ln/>
         </p:spPr>
         <p:txBody>
-          <a:bodyPr wrap="square" lIns="0" tIns="0" rIns="0" bIns="0" rtlCol="0" anchor="t"/>
-          <a:lstStyle/>
-          <a:p>
-            <a:pPr algn="ctr" indent="0" marL="0">
-              <a:buNone/>
-            </a:pPr>
-            <a:r>
-              <a:rPr lang="en-US" sz="1400" dirty="0">
+          <a:bodyPr wrap="square" lIns="0" tIns="0" rIns="0" bIns="0" rtlCol="0" anchor="ctr"/>
+          <a:lstStyle/>
+          <a:p>
+            <a:pPr indent="0" marL="0">
+              <a:spcAft>
+                <a:spcPts val="200"/>
+              </a:spcAft>
+              <a:buNone/>
+            </a:pPr>
+            <a:r>
+              <a:rPr lang="en-US" sz="1400" b="1" dirty="0">
+                <a:solidFill>
+                  <a:schemeClr val="tx2"/>
+                </a:solidFill>
+                <a:latin typeface="+mj-lt" pitchFamily="34" charset="0"/>
+                <a:ea typeface="+mj-lt" pitchFamily="34" charset="-122"/>
+                <a:cs typeface="+mj-lt" pitchFamily="34" charset="-120"/>
+              </a:rPr>
+              <a:t>Clinician review</a:t>
+            </a:r>
+            <a:endParaRPr lang="en-US" sz="1400" dirty="0"/>
+          </a:p>
+          <a:p>
+            <a:pPr indent="0" marL="0">
+              <a:spcAft>
+                <a:spcPts val="200"/>
+              </a:spcAft>
+              <a:buNone/>
+            </a:pPr>
+            <a:r>
+              <a:rPr lang="en-US" sz="1200" dirty="0">
                 <a:solidFill>
                   <a:schemeClr val="tx1"/>
                 </a:solidFill>
               </a:rPr>
-              <a:t>Each checklist item scored one at a time, citing transcript evidence</a:t>
+              <a:t>Viewer opens each anomaly at the exact turn</a:t>
             </a:r>
             <a:endParaRPr lang="en-US" sz="1400" dirty="0"/>
           </a:p>
@@ -4792,17 +5838,148 @@
       </p:sp>
       <p:sp>
         <p:nvSpPr>
-          <p:cNvPr id="23" name="Step 5 circle"/>
+          <p:cNvPr id="30" name="Arrow pipeline 3"/>
           <p:cNvSpPr/>
           <p:nvPr/>
         </p:nvSpPr>
         <p:spPr>
           <a:xfrm>
-            <a:off x="10126980" y="1508760"/>
-            <a:ext cx="1051560" cy="1051560"/>
-          </a:xfrm>
-          <a:prstGeom prst="ellipse">
-            <a:avLst/>
+            <a:off x="7059168" y="4873752"/>
+            <a:ext cx="338328" cy="0"/>
+          </a:xfrm>
+          <a:prstGeom prst="line">
+            <a:avLst/>
+          </a:prstGeom>
+          <a:noFill/>
+          <a:ln w="19050">
+            <a:solidFill>
+              <a:schemeClr val="accent2"/>
+            </a:solidFill>
+            <a:prstDash val="solid"/>
+            <a:tailEnd type="triangle"/>
+          </a:ln>
+        </p:spPr>
+      </p:sp>
+      <p:sp>
+        <p:nvSpPr>
+          <p:cNvPr id="31" name="Pipeline 4 box"/>
+          <p:cNvSpPr/>
+          <p:nvPr/>
+        </p:nvSpPr>
+        <p:spPr>
+          <a:xfrm>
+            <a:off x="7434072" y="4279392"/>
+            <a:ext cx="1883664" cy="1188720"/>
+          </a:xfrm>
+          <a:prstGeom prst="roundRect">
+            <a:avLst>
+              <a:gd name="adj" fmla="val 6154"/>
+            </a:avLst>
+          </a:prstGeom>
+          <a:solidFill>
+            <a:schemeClr val="bg2"/>
+          </a:solidFill>
+          <a:ln/>
+        </p:spPr>
+      </p:sp>
+      <p:sp>
+        <p:nvSpPr>
+          <p:cNvPr id="32" name="Pipeline 4 text"/>
+          <p:cNvSpPr txBox="1"/>
+          <p:nvPr/>
+        </p:nvSpPr>
+        <p:spPr>
+          <a:xfrm>
+            <a:off x="7562088" y="4370832"/>
+            <a:ext cx="1627632" cy="1005840"/>
+          </a:xfrm>
+          <a:prstGeom prst="rect">
+            <a:avLst/>
+          </a:prstGeom>
+          <a:noFill/>
+          <a:ln/>
+        </p:spPr>
+        <p:txBody>
+          <a:bodyPr wrap="square" lIns="0" tIns="0" rIns="0" bIns="0" rtlCol="0" anchor="ctr"/>
+          <a:lstStyle/>
+          <a:p>
+            <a:pPr indent="0" marL="0">
+              <a:spcAft>
+                <a:spcPts val="200"/>
+              </a:spcAft>
+              <a:buNone/>
+            </a:pPr>
+            <a:r>
+              <a:rPr lang="en-US" sz="1400" b="1" dirty="0">
+                <a:solidFill>
+                  <a:schemeClr val="tx2"/>
+                </a:solidFill>
+                <a:latin typeface="+mj-lt" pitchFamily="34" charset="0"/>
+                <a:ea typeface="+mj-lt" pitchFamily="34" charset="-122"/>
+                <a:cs typeface="+mj-lt" pitchFamily="34" charset="-120"/>
+              </a:rPr>
+              <a:t>Feedback agent</a:t>
+            </a:r>
+            <a:endParaRPr lang="en-US" sz="1400" dirty="0"/>
+          </a:p>
+          <a:p>
+            <a:pPr indent="0" marL="0">
+              <a:spcAft>
+                <a:spcPts val="200"/>
+              </a:spcAft>
+              <a:buNone/>
+            </a:pPr>
+            <a:r>
+              <a:rPr lang="en-US" sz="1200" dirty="0">
+                <a:solidFill>
+                  <a:schemeClr val="tx1"/>
+                </a:solidFill>
+              </a:rPr>
+              <a:t>Turns scores and review into reports</a:t>
+            </a:r>
+            <a:endParaRPr lang="en-US" sz="1400" dirty="0"/>
+          </a:p>
+        </p:txBody>
+      </p:sp>
+      <p:sp>
+        <p:nvSpPr>
+          <p:cNvPr id="33" name="Arrow pipeline 4"/>
+          <p:cNvSpPr/>
+          <p:nvPr/>
+        </p:nvSpPr>
+        <p:spPr>
+          <a:xfrm>
+            <a:off x="9354312" y="4873752"/>
+            <a:ext cx="338328" cy="0"/>
+          </a:xfrm>
+          <a:prstGeom prst="line">
+            <a:avLst/>
+          </a:prstGeom>
+          <a:noFill/>
+          <a:ln w="19050">
+            <a:solidFill>
+              <a:schemeClr val="accent2"/>
+            </a:solidFill>
+            <a:prstDash val="solid"/>
+            <a:tailEnd type="triangle"/>
+          </a:ln>
+        </p:spPr>
+      </p:sp>
+      <p:sp>
+        <p:nvSpPr>
+          <p:cNvPr id="34" name="Pipeline 5 box"/>
+          <p:cNvSpPr/>
+          <p:nvPr/>
+        </p:nvSpPr>
+        <p:spPr>
+          <a:xfrm>
+            <a:off x="9729216" y="4279392"/>
+            <a:ext cx="1883664" cy="1188720"/>
+          </a:xfrm>
+          <a:prstGeom prst="roundRect">
+            <a:avLst>
+              <a:gd name="adj" fmla="val 6154"/>
+            </a:avLst>
           </a:prstGeom>
           <a:solidFill>
             <a:schemeClr val="tx2"/>
@@ -4810,40 +5987,16 @@
           <a:ln/>
         </p:spPr>
       </p:sp>
-      <p:pic>
-        <p:nvPicPr>
-          <p:cNvPr id="24" name="Step 5 icon" descr="preencoded.png">    </p:cNvPr>
-          <p:cNvPicPr>
-            <a:picLocks noChangeAspect="1"/>
-          </p:cNvPicPr>
-          <p:nvPr/>
-        </p:nvPicPr>
-        <p:blipFill>
-          <a:blip r:embed="rId5"/>
-          <a:stretch>
-            <a:fillRect/>
-          </a:stretch>
-        </p:blipFill>
-        <p:spPr>
-          <a:xfrm>
-            <a:off x="10410901" y="1792681"/>
-            <a:ext cx="483718" cy="483718"/>
-          </a:xfrm>
-          <a:prstGeom prst="rect">
-            <a:avLst/>
-          </a:prstGeom>
-        </p:spPr>
-      </p:pic>
-      <p:sp>
-        <p:nvSpPr>
-          <p:cNvPr id="25" name="Step 5 title"/>
+      <p:sp>
+        <p:nvSpPr>
+          <p:cNvPr id="35" name="Pipeline 5 text"/>
           <p:cNvSpPr txBox="1"/>
           <p:nvPr/>
         </p:nvSpPr>
         <p:spPr>
           <a:xfrm>
-            <a:off x="9692640" y="2743200"/>
-            <a:ext cx="1920240" cy="411480"/>
+            <a:off x="9857232" y="4370832"/>
+            <a:ext cx="1627632" cy="1005840"/>
           </a:xfrm>
           <a:prstGeom prst="rect">
             <a:avLst/>
@@ -4852,37 +6005,57 @@
           <a:ln/>
         </p:spPr>
         <p:txBody>
-          <a:bodyPr wrap="square" lIns="0" tIns="0" rIns="0" bIns="0" rtlCol="0" anchor="t"/>
-          <a:lstStyle/>
-          <a:p>
-            <a:pPr algn="ctr" indent="0" marL="0">
-              <a:buNone/>
-            </a:pPr>
-            <a:r>
-              <a:rPr lang="en-US" sz="1900" b="1" dirty="0">
-                <a:solidFill>
-                  <a:schemeClr val="tx2"/>
+          <a:bodyPr wrap="square" lIns="0" tIns="0" rIns="0" bIns="0" rtlCol="0" anchor="ctr"/>
+          <a:lstStyle/>
+          <a:p>
+            <a:pPr indent="0" marL="0">
+              <a:spcAft>
+                <a:spcPts val="200"/>
+              </a:spcAft>
+              <a:buNone/>
+            </a:pPr>
+            <a:r>
+              <a:rPr lang="en-US" sz="1400" b="1" dirty="0">
+                <a:solidFill>
+                  <a:schemeClr val="bg1"/>
                 </a:solidFill>
                 <a:latin typeface="+mj-lt" pitchFamily="34" charset="0"/>
                 <a:ea typeface="+mj-lt" pitchFamily="34" charset="-122"/>
                 <a:cs typeface="+mj-lt" pitchFamily="34" charset="-120"/>
               </a:rPr>
-              <a:t>Review</a:t>
-            </a:r>
-            <a:endParaRPr lang="en-US" sz="1900" dirty="0"/>
-          </a:p>
-        </p:txBody>
-      </p:sp>
-      <p:sp>
-        <p:nvSpPr>
-          <p:cNvPr id="26" name="Step 5 text"/>
+              <a:t>Reports</a:t>
+            </a:r>
+            <a:endParaRPr lang="en-US" sz="1400" dirty="0"/>
+          </a:p>
+          <a:p>
+            <a:pPr indent="0" marL="0">
+              <a:spcAft>
+                <a:spcPts val="200"/>
+              </a:spcAft>
+              <a:buNone/>
+            </a:pPr>
+            <a:r>
+              <a:rPr lang="en-US" sz="1200" dirty="0">
+                <a:solidFill>
+                  <a:schemeClr val="bg2"/>
+                </a:solidFill>
+              </a:rPr>
+              <a:t>Medical report and technical report</a:t>
+            </a:r>
+            <a:endParaRPr lang="en-US" sz="1400" dirty="0"/>
+          </a:p>
+        </p:txBody>
+      </p:sp>
+      <p:sp>
+        <p:nvSpPr>
+          <p:cNvPr id="36" name="Diagram note"/>
           <p:cNvSpPr txBox="1"/>
           <p:nvPr/>
         </p:nvSpPr>
         <p:spPr>
           <a:xfrm>
-            <a:off x="9692640" y="3200400"/>
-            <a:ext cx="1920240" cy="1280160"/>
+            <a:off x="548640" y="5715000"/>
+            <a:ext cx="11064240" cy="320040"/>
           </a:xfrm>
           <a:prstGeom prst="rect">
             <a:avLst/>
@@ -4894,324 +6067,18 @@
           <a:bodyPr wrap="square" lIns="0" tIns="0" rIns="0" bIns="0" rtlCol="0" anchor="t"/>
           <a:lstStyle/>
           <a:p>
-            <a:pPr algn="ctr" indent="0" marL="0">
-              <a:buNone/>
-            </a:pPr>
-            <a:r>
-              <a:rPr lang="en-US" sz="1400" dirty="0">
-                <a:solidFill>
-                  <a:schemeClr val="tx1"/>
-                </a:solidFill>
-              </a:rPr>
-              <a:t>A judge summarises all runs and flags anomalies; clinicians review</a:t>
-            </a:r>
-            <a:endParaRPr lang="en-US" sz="1400" dirty="0"/>
-          </a:p>
-        </p:txBody>
-      </p:sp>
-      <p:sp>
-        <p:nvSpPr>
-          <p:cNvPr id="27" name="Principle 1 card"/>
-          <p:cNvSpPr/>
-          <p:nvPr/>
-        </p:nvSpPr>
-        <p:spPr>
-          <a:xfrm>
-            <a:off x="548640" y="4892040"/>
-            <a:ext cx="3566160" cy="1143000"/>
-          </a:xfrm>
-          <a:prstGeom prst="roundRect">
-            <a:avLst>
-              <a:gd name="adj" fmla="val 6400"/>
-            </a:avLst>
-          </a:prstGeom>
-          <a:solidFill>
-            <a:schemeClr val="bg2"/>
-          </a:solidFill>
-          <a:ln/>
-        </p:spPr>
-      </p:sp>
-      <p:sp>
-        <p:nvSpPr>
-          <p:cNvPr id="28" name="Principle 1 circle"/>
-          <p:cNvSpPr/>
-          <p:nvPr/>
-        </p:nvSpPr>
-        <p:spPr>
-          <a:xfrm>
-            <a:off x="777240" y="5138928"/>
-            <a:ext cx="640080" cy="640080"/>
-          </a:xfrm>
-          <a:prstGeom prst="ellipse">
-            <a:avLst/>
-          </a:prstGeom>
-          <a:solidFill>
-            <a:schemeClr val="accent3"/>
-          </a:solidFill>
-          <a:ln/>
-        </p:spPr>
-      </p:sp>
-      <p:pic>
-        <p:nvPicPr>
-          <p:cNvPr id="29" name="Principle 1 icon" descr="preencoded.png">    </p:cNvPr>
-          <p:cNvPicPr>
-            <a:picLocks noChangeAspect="1"/>
-          </p:cNvPicPr>
-          <p:nvPr/>
-        </p:nvPicPr>
-        <p:blipFill>
-          <a:blip r:embed="rId6"/>
-          <a:stretch>
-            <a:fillRect/>
-          </a:stretch>
-        </p:blipFill>
-        <p:spPr>
-          <a:xfrm>
-            <a:off x="950062" y="5311750"/>
-            <a:ext cx="294437" cy="294437"/>
-          </a:xfrm>
-          <a:prstGeom prst="rect">
-            <a:avLst/>
-          </a:prstGeom>
-        </p:spPr>
-      </p:pic>
-      <p:sp>
-        <p:nvSpPr>
-          <p:cNvPr id="30" name="Principle 1 text"/>
-          <p:cNvSpPr txBox="1"/>
-          <p:nvPr/>
-        </p:nvSpPr>
-        <p:spPr>
-          <a:xfrm>
-            <a:off x="1600200" y="5029200"/>
-            <a:ext cx="2331720" cy="868680"/>
-          </a:xfrm>
-          <a:prstGeom prst="rect">
-            <a:avLst/>
-          </a:prstGeom>
-          <a:noFill/>
-          <a:ln/>
-        </p:spPr>
-        <p:txBody>
-          <a:bodyPr wrap="square" lIns="0" tIns="0" rIns="0" bIns="0" rtlCol="0" anchor="ctr"/>
-          <a:lstStyle/>
-          <a:p>
             <a:pPr indent="0" marL="0">
               <a:buNone/>
             </a:pPr>
             <a:r>
-              <a:rPr lang="en-US" sz="1400" dirty="0">
-                <a:solidFill>
-                  <a:schemeClr val="tx1"/>
-                </a:solidFill>
-              </a:rPr>
-              <a:t>Any assistant: a small adapter plus MCP tools (SpaceDoc, CMO-DA, homegrown)</a:t>
-            </a:r>
-            <a:endParaRPr lang="en-US" sz="1400" dirty="0"/>
-          </a:p>
-        </p:txBody>
-      </p:sp>
-      <p:sp>
-        <p:nvSpPr>
-          <p:cNvPr id="31" name="Principle 2 card"/>
-          <p:cNvSpPr/>
-          <p:nvPr/>
-        </p:nvSpPr>
-        <p:spPr>
-          <a:xfrm>
-            <a:off x="4297680" y="4892040"/>
-            <a:ext cx="3566160" cy="1143000"/>
-          </a:xfrm>
-          <a:prstGeom prst="roundRect">
-            <a:avLst>
-              <a:gd name="adj" fmla="val 6400"/>
-            </a:avLst>
-          </a:prstGeom>
-          <a:solidFill>
-            <a:schemeClr val="bg2"/>
-          </a:solidFill>
-          <a:ln/>
-        </p:spPr>
-      </p:sp>
-      <p:sp>
-        <p:nvSpPr>
-          <p:cNvPr id="32" name="Principle 2 circle"/>
-          <p:cNvSpPr/>
-          <p:nvPr/>
-        </p:nvSpPr>
-        <p:spPr>
-          <a:xfrm>
-            <a:off x="4526280" y="5138928"/>
-            <a:ext cx="640080" cy="640080"/>
-          </a:xfrm>
-          <a:prstGeom prst="ellipse">
-            <a:avLst/>
-          </a:prstGeom>
-          <a:solidFill>
-            <a:schemeClr val="accent3"/>
-          </a:solidFill>
-          <a:ln/>
-        </p:spPr>
-      </p:sp>
-      <p:pic>
-        <p:nvPicPr>
-          <p:cNvPr id="33" name="Principle 2 icon" descr="preencoded.png">    </p:cNvPr>
-          <p:cNvPicPr>
-            <a:picLocks noChangeAspect="1"/>
-          </p:cNvPicPr>
-          <p:nvPr/>
-        </p:nvPicPr>
-        <p:blipFill>
-          <a:blip r:embed="rId7"/>
-          <a:stretch>
-            <a:fillRect/>
-          </a:stretch>
-        </p:blipFill>
-        <p:spPr>
-          <a:xfrm>
-            <a:off x="4699102" y="5311750"/>
-            <a:ext cx="294437" cy="294437"/>
-          </a:xfrm>
-          <a:prstGeom prst="rect">
-            <a:avLst/>
-          </a:prstGeom>
-        </p:spPr>
-      </p:pic>
-      <p:sp>
-        <p:nvSpPr>
-          <p:cNvPr id="34" name="Principle 2 text"/>
-          <p:cNvSpPr txBox="1"/>
-          <p:nvPr/>
-        </p:nvSpPr>
-        <p:spPr>
-          <a:xfrm>
-            <a:off x="5349240" y="5029200"/>
-            <a:ext cx="2331720" cy="868680"/>
-          </a:xfrm>
-          <a:prstGeom prst="rect">
-            <a:avLst/>
-          </a:prstGeom>
-          <a:noFill/>
-          <a:ln/>
-        </p:spPr>
-        <p:txBody>
-          <a:bodyPr wrap="square" lIns="0" tIns="0" rIns="0" bIns="0" rtlCol="0" anchor="ctr"/>
-          <a:lstStyle/>
-          <a:p>
-            <a:pPr indent="0" marL="0">
-              <a:buNone/>
-            </a:pPr>
-            <a:r>
-              <a:rPr lang="en-US" sz="1400" dirty="0">
-                <a:solidFill>
-                  <a:schemeClr val="tx1"/>
-                </a:solidFill>
-              </a:rPr>
-              <a:t>Runs locally on a laptop, overnight; no cloud calls</a:t>
-            </a:r>
-            <a:endParaRPr lang="en-US" sz="1400" dirty="0"/>
-          </a:p>
-        </p:txBody>
-      </p:sp>
-      <p:sp>
-        <p:nvSpPr>
-          <p:cNvPr id="35" name="Principle 3 card"/>
-          <p:cNvSpPr/>
-          <p:nvPr/>
-        </p:nvSpPr>
-        <p:spPr>
-          <a:xfrm>
-            <a:off x="8046720" y="4892040"/>
-            <a:ext cx="3566160" cy="1143000"/>
-          </a:xfrm>
-          <a:prstGeom prst="roundRect">
-            <a:avLst>
-              <a:gd name="adj" fmla="val 6400"/>
-            </a:avLst>
-          </a:prstGeom>
-          <a:solidFill>
-            <a:schemeClr val="bg2"/>
-          </a:solidFill>
-          <a:ln/>
-        </p:spPr>
-      </p:sp>
-      <p:sp>
-        <p:nvSpPr>
-          <p:cNvPr id="36" name="Principle 3 circle"/>
-          <p:cNvSpPr/>
-          <p:nvPr/>
-        </p:nvSpPr>
-        <p:spPr>
-          <a:xfrm>
-            <a:off x="8275320" y="5138928"/>
-            <a:ext cx="640080" cy="640080"/>
-          </a:xfrm>
-          <a:prstGeom prst="ellipse">
-            <a:avLst/>
-          </a:prstGeom>
-          <a:solidFill>
-            <a:schemeClr val="accent3"/>
-          </a:solidFill>
-          <a:ln/>
-        </p:spPr>
-      </p:sp>
-      <p:pic>
-        <p:nvPicPr>
-          <p:cNvPr id="37" name="Principle 3 icon" descr="preencoded.png">    </p:cNvPr>
-          <p:cNvPicPr>
-            <a:picLocks noChangeAspect="1"/>
-          </p:cNvPicPr>
-          <p:nvPr/>
-        </p:nvPicPr>
-        <p:blipFill>
-          <a:blip r:embed="rId8"/>
-          <a:stretch>
-            <a:fillRect/>
-          </a:stretch>
-        </p:blipFill>
-        <p:spPr>
-          <a:xfrm>
-            <a:off x="8448142" y="5311750"/>
-            <a:ext cx="294437" cy="294437"/>
-          </a:xfrm>
-          <a:prstGeom prst="rect">
-            <a:avLst/>
-          </a:prstGeom>
-        </p:spPr>
-      </p:pic>
-      <p:sp>
-        <p:nvSpPr>
-          <p:cNvPr id="38" name="Principle 3 text"/>
-          <p:cNvSpPr txBox="1"/>
-          <p:nvPr/>
-        </p:nvSpPr>
-        <p:spPr>
-          <a:xfrm>
-            <a:off x="9098280" y="5029200"/>
-            <a:ext cx="2331720" cy="868680"/>
-          </a:xfrm>
-          <a:prstGeom prst="rect">
-            <a:avLst/>
-          </a:prstGeom>
-          <a:noFill/>
-          <a:ln/>
-        </p:spPr>
-        <p:txBody>
-          <a:bodyPr wrap="square" lIns="0" tIns="0" rIns="0" bIns="0" rtlCol="0" anchor="ctr"/>
-          <a:lstStyle/>
-          <a:p>
-            <a:pPr indent="0" marL="0">
-              <a:buNone/>
-            </a:pPr>
-            <a:r>
-              <a:rPr lang="en-US" sz="1400" dirty="0">
-                <a:solidFill>
-                  <a:schemeClr val="tx1"/>
-                </a:solidFill>
-              </a:rPr>
-              <a:t>Every score points at the evidence behind it</a:t>
-            </a:r>
-            <a:endParaRPr lang="en-US" sz="1400" dirty="0"/>
+              <a:rPr lang="en-US" sz="1300" dirty="0">
+                <a:solidFill>
+                  <a:schemeClr val="accent3"/>
+                </a:solidFill>
+              </a:rPr>
+              <a:t>Every run has a seed, so any run can be replayed exactly. All agents run on local models.</a:t>
+            </a:r>
+            <a:endParaRPr lang="en-US" sz="1300" dirty="0"/>
           </a:p>
         </p:txBody>
       </p:sp>
@@ -5317,7 +6184,7 @@
                   <a:schemeClr val="tx2"/>
                 </a:solidFill>
               </a:rPr>
-              <a:t>Every case is grounded in NASA's own data</a:t>
+              <a:t>Every scenario is grounded in NASA's own data</a:t>
             </a:r>
             <a:endParaRPr lang="en-US" sz="3400" dirty="0"/>
           </a:p>
@@ -6059,7 +6926,7 @@
                   <a:schemeClr val="tx2"/>
                 </a:solidFill>
               </a:rPr>
-              <a:t>Each case runs 8 times, in 3 mission settings</a:t>
+              <a:t>Each scenario runs 8 times, in 3 mission settings</a:t>
             </a:r>
             <a:endParaRPr lang="en-US" sz="3400" dirty="0"/>
           </a:p>
@@ -6098,7 +6965,7 @@
                 <a:ea typeface="+mj-lt" pitchFamily="34" charset="-122"/>
                 <a:cs typeface="+mj-lt" pitchFamily="34" charset="-120"/>
               </a:rPr>
-              <a:t>Default batch per case</a:t>
+              <a:t>Default batch per scenario</a:t>
             </a:r>
             <a:endParaRPr lang="en-US" sz="1700" dirty="0"/>
           </a:p>
@@ -6888,12 +7755,12 @@
         </p:nvSpPr>
         <p:spPr>
           <a:xfrm>
-            <a:off x="548640" y="1417320"/>
-            <a:ext cx="2651760" cy="2194560"/>
+            <a:off x="548640" y="1371600"/>
+            <a:ext cx="5394960" cy="1024128"/>
           </a:xfrm>
           <a:prstGeom prst="roundRect">
             <a:avLst>
-              <a:gd name="adj" fmla="val 3333"/>
+              <a:gd name="adj" fmla="val 7143"/>
             </a:avLst>
           </a:prstGeom>
           <a:solidFill>
@@ -6910,7 +7777,7 @@
         </p:nvSpPr>
         <p:spPr>
           <a:xfrm>
-            <a:off x="777240" y="1645920"/>
+            <a:off x="777240" y="1609344"/>
             <a:ext cx="548640" cy="548640"/>
           </a:xfrm>
           <a:prstGeom prst="ellipse">
@@ -6951,8 +7818,8 @@
         </p:nvSpPr>
         <p:spPr>
           <a:xfrm>
-            <a:off x="1463040" y="1691640"/>
-            <a:ext cx="1600200" cy="502920"/>
+            <a:off x="1554480" y="1527048"/>
+            <a:ext cx="4206240" cy="365760"/>
           </a:xfrm>
           <a:prstGeom prst="rect">
             <a:avLst/>
@@ -6961,14 +7828,14 @@
           <a:ln/>
         </p:spPr>
         <p:txBody>
-          <a:bodyPr wrap="square" lIns="0" tIns="0" rIns="0" bIns="0" rtlCol="0" anchor="ctr"/>
+          <a:bodyPr wrap="square" lIns="0" tIns="0" rIns="0" bIns="0" rtlCol="0" anchor="t"/>
           <a:lstStyle/>
           <a:p>
             <a:pPr indent="0" marL="0">
               <a:buNone/>
             </a:pPr>
             <a:r>
-              <a:rPr lang="en-US" sz="1700" b="1" dirty="0">
+              <a:rPr lang="en-US" sz="1800" b="1" dirty="0">
                 <a:solidFill>
                   <a:schemeClr val="tx2"/>
                 </a:solidFill>
@@ -6978,7 +7845,7 @@
               </a:rPr>
               <a:t>Critical errors</a:t>
             </a:r>
-            <a:endParaRPr lang="en-US" sz="1700" dirty="0"/>
+            <a:endParaRPr lang="en-US" sz="1800" dirty="0"/>
           </a:p>
         </p:txBody>
       </p:sp>
@@ -6990,8 +7857,8 @@
         </p:nvSpPr>
         <p:spPr>
           <a:xfrm>
-            <a:off x="777240" y="2377440"/>
-            <a:ext cx="2240280" cy="1143000"/>
+            <a:off x="1554480" y="1901952"/>
+            <a:ext cx="4206240" cy="365760"/>
           </a:xfrm>
           <a:prstGeom prst="rect">
             <a:avLst/>
@@ -7012,7 +7879,7 @@
                   <a:schemeClr val="tx1"/>
                 </a:solidFill>
               </a:rPr>
-              <a:t>Six universal never events, e.g. a drug the patient is allergic to. Any one fails the run.</a:t>
+              <a:t>Never events. Any one fails the run.</a:t>
             </a:r>
             <a:endParaRPr lang="en-US" sz="1500" dirty="0"/>
           </a:p>
@@ -7026,12 +7893,12 @@
         </p:nvSpPr>
         <p:spPr>
           <a:xfrm>
-            <a:off x="3337560" y="1417320"/>
-            <a:ext cx="2651760" cy="2194560"/>
+            <a:off x="548640" y="2560320"/>
+            <a:ext cx="5394960" cy="1024128"/>
           </a:xfrm>
           <a:prstGeom prst="roundRect">
             <a:avLst>
-              <a:gd name="adj" fmla="val 3333"/>
+              <a:gd name="adj" fmla="val 7143"/>
             </a:avLst>
           </a:prstGeom>
           <a:solidFill>
@@ -7048,7 +7915,7 @@
         </p:nvSpPr>
         <p:spPr>
           <a:xfrm>
-            <a:off x="3566160" y="1645920"/>
+            <a:off x="777240" y="2798064"/>
             <a:ext cx="548640" cy="548640"/>
           </a:xfrm>
           <a:prstGeom prst="ellipse">
@@ -7089,8 +7956,8 @@
         </p:nvSpPr>
         <p:spPr>
           <a:xfrm>
-            <a:off x="4251960" y="1691640"/>
-            <a:ext cx="1600200" cy="502920"/>
+            <a:off x="1554480" y="2715768"/>
+            <a:ext cx="4206240" cy="365760"/>
           </a:xfrm>
           <a:prstGeom prst="rect">
             <a:avLst/>
@@ -7099,14 +7966,14 @@
           <a:ln/>
         </p:spPr>
         <p:txBody>
-          <a:bodyPr wrap="square" lIns="0" tIns="0" rIns="0" bIns="0" rtlCol="0" anchor="ctr"/>
+          <a:bodyPr wrap="square" lIns="0" tIns="0" rIns="0" bIns="0" rtlCol="0" anchor="t"/>
           <a:lstStyle/>
           <a:p>
             <a:pPr indent="0" marL="0">
               <a:buNone/>
             </a:pPr>
             <a:r>
-              <a:rPr lang="en-US" sz="1700" b="1" dirty="0">
+              <a:rPr lang="en-US" sz="1800" b="1" dirty="0">
                 <a:solidFill>
                   <a:schemeClr val="tx2"/>
                 </a:solidFill>
@@ -7114,9 +7981,9 @@
                 <a:ea typeface="+mj-lt" pitchFamily="34" charset="-122"/>
                 <a:cs typeface="+mj-lt" pitchFamily="34" charset="-120"/>
               </a:rPr>
-              <a:t>Case checklist</a:t>
-            </a:r>
-            <a:endParaRPr lang="en-US" sz="1700" dirty="0"/>
+              <a:t>Checklist</a:t>
+            </a:r>
+            <a:endParaRPr lang="en-US" sz="1800" dirty="0"/>
           </a:p>
         </p:txBody>
       </p:sp>
@@ -7128,8 +7995,8 @@
         </p:nvSpPr>
         <p:spPr>
           <a:xfrm>
-            <a:off x="3566160" y="2377440"/>
-            <a:ext cx="2240280" cy="1143000"/>
+            <a:off x="1554480" y="3090672"/>
+            <a:ext cx="4206240" cy="365760"/>
           </a:xfrm>
           <a:prstGeom prst="rect">
             <a:avLst/>
@@ -7150,7 +8017,7 @@
                   <a:schemeClr val="tx1"/>
                 </a:solidFill>
               </a:rPr>
-              <a:t>Observable actions written by clerks, weighted +1 to +10 or −1 to −10.</a:t>
+              <a:t>Observable actions, weighted −10 to +10.</a:t>
             </a:r>
             <a:endParaRPr lang="en-US" sz="1500" dirty="0"/>
           </a:p>
@@ -7165,11 +8032,11 @@
         <p:spPr>
           <a:xfrm>
             <a:off x="548640" y="3749040"/>
-            <a:ext cx="2651760" cy="2194560"/>
+            <a:ext cx="5394960" cy="1024128"/>
           </a:xfrm>
           <a:prstGeom prst="roundRect">
             <a:avLst>
-              <a:gd name="adj" fmla="val 3333"/>
+              <a:gd name="adj" fmla="val 7143"/>
             </a:avLst>
           </a:prstGeom>
           <a:solidFill>
@@ -7186,7 +8053,7 @@
         </p:nvSpPr>
         <p:spPr>
           <a:xfrm>
-            <a:off x="777240" y="3977640"/>
+            <a:off x="777240" y="3986784"/>
             <a:ext cx="548640" cy="548640"/>
           </a:xfrm>
           <a:prstGeom prst="ellipse">
@@ -7227,8 +8094,8 @@
         </p:nvSpPr>
         <p:spPr>
           <a:xfrm>
-            <a:off x="1463040" y="4023360"/>
-            <a:ext cx="1600200" cy="502920"/>
+            <a:off x="1554480" y="3904488"/>
+            <a:ext cx="4206240" cy="365760"/>
           </a:xfrm>
           <a:prstGeom prst="rect">
             <a:avLst/>
@@ -7237,14 +8104,14 @@
           <a:ln/>
         </p:spPr>
         <p:txBody>
-          <a:bodyPr wrap="square" lIns="0" tIns="0" rIns="0" bIns="0" rtlCol="0" anchor="ctr"/>
+          <a:bodyPr wrap="square" lIns="0" tIns="0" rIns="0" bIns="0" rtlCol="0" anchor="t"/>
           <a:lstStyle/>
           <a:p>
             <a:pPr indent="0" marL="0">
               <a:buNone/>
             </a:pPr>
             <a:r>
-              <a:rPr lang="en-US" sz="1700" b="1" dirty="0">
+              <a:rPr lang="en-US" sz="1800" b="1" dirty="0">
                 <a:solidFill>
                   <a:schemeClr val="tx2"/>
                 </a:solidFill>
@@ -7254,7 +8121,7 @@
               </a:rPr>
               <a:t>Global ratings</a:t>
             </a:r>
-            <a:endParaRPr lang="en-US" sz="1700" dirty="0"/>
+            <a:endParaRPr lang="en-US" sz="1800" dirty="0"/>
           </a:p>
         </p:txBody>
       </p:sp>
@@ -7266,8 +8133,8 @@
         </p:nvSpPr>
         <p:spPr>
           <a:xfrm>
-            <a:off x="777240" y="4709160"/>
-            <a:ext cx="2240280" cy="1143000"/>
+            <a:off x="1554480" y="4279392"/>
+            <a:ext cx="4206240" cy="365760"/>
           </a:xfrm>
           <a:prstGeom prst="rect">
             <a:avLst/>
@@ -7288,7 +8155,7 @@
                   <a:schemeClr val="tx1"/>
                 </a:solidFill>
               </a:rPr>
-              <a:t>Six domains rated 1–5 against written anchors.</a:t>
+              <a:t>Six domains, each rated 1–5.</a:t>
             </a:r>
             <a:endParaRPr lang="en-US" sz="1500" dirty="0"/>
           </a:p>
@@ -7302,12 +8169,12 @@
         </p:nvSpPr>
         <p:spPr>
           <a:xfrm>
-            <a:off x="3337560" y="3749040"/>
-            <a:ext cx="2651760" cy="2194560"/>
+            <a:off x="548640" y="4937760"/>
+            <a:ext cx="5394960" cy="1024128"/>
           </a:xfrm>
           <a:prstGeom prst="roundRect">
             <a:avLst>
-              <a:gd name="adj" fmla="val 3333"/>
+              <a:gd name="adj" fmla="val 7143"/>
             </a:avLst>
           </a:prstGeom>
           <a:solidFill>
@@ -7324,7 +8191,7 @@
         </p:nvSpPr>
         <p:spPr>
           <a:xfrm>
-            <a:off x="3566160" y="3977640"/>
+            <a:off x="777240" y="5175504"/>
             <a:ext cx="548640" cy="548640"/>
           </a:xfrm>
           <a:prstGeom prst="ellipse">
@@ -7365,8 +8232,8 @@
         </p:nvSpPr>
         <p:spPr>
           <a:xfrm>
-            <a:off x="4251960" y="4023360"/>
-            <a:ext cx="1600200" cy="502920"/>
+            <a:off x="1554480" y="5093208"/>
+            <a:ext cx="4206240" cy="365760"/>
           </a:xfrm>
           <a:prstGeom prst="rect">
             <a:avLst/>
@@ -7375,14 +8242,14 @@
           <a:ln/>
         </p:spPr>
         <p:txBody>
-          <a:bodyPr wrap="square" lIns="0" tIns="0" rIns="0" bIns="0" rtlCol="0" anchor="ctr"/>
+          <a:bodyPr wrap="square" lIns="0" tIns="0" rIns="0" bIns="0" rtlCol="0" anchor="t"/>
           <a:lstStyle/>
           <a:p>
             <a:pPr indent="0" marL="0">
               <a:buNone/>
             </a:pPr>
             <a:r>
-              <a:rPr lang="en-US" sz="1700" b="1" dirty="0">
+              <a:rPr lang="en-US" sz="1800" b="1" dirty="0">
                 <a:solidFill>
                   <a:schemeClr val="tx2"/>
                 </a:solidFill>
@@ -7392,7 +8259,7 @@
               </a:rPr>
               <a:t>Outcome</a:t>
             </a:r>
-            <a:endParaRPr lang="en-US" sz="1700" dirty="0"/>
+            <a:endParaRPr lang="en-US" sz="1800" dirty="0"/>
           </a:p>
         </p:txBody>
       </p:sp>
@@ -7404,8 +8271,8 @@
         </p:nvSpPr>
         <p:spPr>
           <a:xfrm>
-            <a:off x="3566160" y="4709160"/>
-            <a:ext cx="2240280" cy="1143000"/>
+            <a:off x="1554480" y="5468112"/>
+            <a:ext cx="4206240" cy="365760"/>
           </a:xfrm>
           <a:prstGeom prst="rect">
             <a:avLst/>
@@ -7426,7 +8293,7 @@
                   <a:schemeClr val="tx1"/>
                 </a:solidFill>
               </a:rPr>
-              <a:t>From the twin: course reached, time to diagnosis and treatment, resources used.</a:t>
+              <a:t>How the simulated patient did.</a:t>
             </a:r>
             <a:endParaRPr lang="en-US" sz="1500" dirty="0"/>
           </a:p>
@@ -7440,7 +8307,7 @@
         </p:nvGraphicFramePr>
         <p:xfrm>
           <a:off x="6309360" y="1325880"/>
-          <a:ext cx="5303520" cy="3931920"/>
+          <a:ext cx="5303520" cy="4206240"/>
         </p:xfrm>
         <a:graphic xmlns:a="http://schemas.openxmlformats.org/drawingml/2006/main">
           <a:graphicData uri="http://schemas.openxmlformats.org/drawingml/2006/chart">
@@ -7456,8 +8323,8 @@
         </p:nvSpPr>
         <p:spPr>
           <a:xfrm>
-            <a:off x="6309360" y="5394960"/>
-            <a:ext cx="5303520" cy="685800"/>
+            <a:off x="6309360" y="5623560"/>
+            <a:ext cx="5303520" cy="411480"/>
           </a:xfrm>
           <a:prstGeom prst="rect">
             <a:avLst/>
@@ -7478,7 +8345,7 @@
                   <a:schemeClr val="tx1"/>
                 </a:solidFill>
               </a:rPr>
-              <a:t>A scorer checks one item at a time and cites the transcript turn. A judge reads all 8 runs and flags outliers instead of averaging them away.</a:t>
+              <a:t>Scored item by item, with evidence. Outlier runs are flagged, not averaged away.</a:t>
             </a:r>
             <a:endParaRPr lang="en-US" sz="1400" dirty="0"/>
           </a:p>
@@ -7594,7 +8461,7 @@
       </p:sp>
       <p:sp>
         <p:nvSpPr>
-          <p:cNvPr id="3" name="Case card"/>
+          <p:cNvPr id="3" name="Scenario card"/>
           <p:cNvSpPr/>
           <p:nvPr/>
         </p:nvSpPr>
@@ -7660,7 +8527,7 @@
       </p:pic>
       <p:sp>
         <p:nvSpPr>
-          <p:cNvPr id="6" name="Case summary"/>
+          <p:cNvPr id="6" name="Scenario summary"/>
           <p:cNvSpPr txBox="1"/>
           <p:nvPr/>
         </p:nvSpPr>
@@ -7873,7 +8740,7 @@
                   <a:schemeClr val="tx2"/>
                 </a:solidFill>
               </a:rPr>
-              <a:t>T+4h</a:t>
+              <a:t>T+6h</a:t>
             </a:r>
             <a:endParaRPr lang="en-US" sz="1400" dirty="0"/>
           </a:p>
@@ -7909,7 +8776,7 @@
                   <a:schemeClr val="tx1"/>
                 </a:solidFill>
               </a:rPr>
-              <a:t>Solar particle event: storm shelter, text-only link to ground</a:t>
+              <a:t>Pain migrates to the right lower quadrant</a:t>
             </a:r>
             <a:endParaRPr lang="en-US" sz="1400" dirty="0"/>
           </a:p>
@@ -7924,6 +8791,190 @@
         <p:spPr>
           <a:xfrm>
             <a:off x="1307592" y="4334256"/>
+            <a:ext cx="219456" cy="219456"/>
+          </a:xfrm>
+          <a:prstGeom prst="ellipse">
+            <a:avLst/>
+          </a:prstGeom>
+          <a:solidFill>
+            <a:schemeClr val="accent1"/>
+          </a:solidFill>
+          <a:ln/>
+        </p:spPr>
+      </p:sp>
+      <p:sp>
+        <p:nvSpPr>
+          <p:cNvPr id="15" name="Event 3 time"/>
+          <p:cNvSpPr txBox="1"/>
+          <p:nvPr/>
+        </p:nvSpPr>
+        <p:spPr>
+          <a:xfrm>
+            <a:off x="548640" y="4215384"/>
+            <a:ext cx="685800" cy="457200"/>
+          </a:xfrm>
+          <a:prstGeom prst="rect">
+            <a:avLst/>
+          </a:prstGeom>
+          <a:noFill/>
+          <a:ln/>
+        </p:spPr>
+        <p:txBody>
+          <a:bodyPr wrap="square" lIns="0" tIns="0" rIns="0" bIns="0" rtlCol="0" anchor="ctr"/>
+          <a:lstStyle/>
+          <a:p>
+            <a:pPr algn="r" indent="0" marL="0">
+              <a:buNone/>
+            </a:pPr>
+            <a:r>
+              <a:rPr lang="en-US" sz="1400" b="1" dirty="0">
+                <a:solidFill>
+                  <a:schemeClr val="accent5"/>
+                </a:solidFill>
+              </a:rPr>
+              <a:t>T+8h</a:t>
+            </a:r>
+            <a:endParaRPr lang="en-US" sz="1400" dirty="0"/>
+          </a:p>
+        </p:txBody>
+      </p:sp>
+      <p:sp>
+        <p:nvSpPr>
+          <p:cNvPr id="16" name="Event 3 text"/>
+          <p:cNvSpPr txBox="1"/>
+          <p:nvPr/>
+        </p:nvSpPr>
+        <p:spPr>
+          <a:xfrm>
+            <a:off x="1737360" y="4215384"/>
+            <a:ext cx="4206240" cy="457200"/>
+          </a:xfrm>
+          <a:prstGeom prst="rect">
+            <a:avLst/>
+          </a:prstGeom>
+          <a:noFill/>
+          <a:ln/>
+        </p:spPr>
+        <p:txBody>
+          <a:bodyPr wrap="square" lIns="0" tIns="0" rIns="0" bIns="0" rtlCol="0" anchor="ctr"/>
+          <a:lstStyle/>
+          <a:p>
+            <a:pPr indent="0" marL="0">
+              <a:buNone/>
+            </a:pPr>
+            <a:r>
+              <a:rPr lang="en-US" sz="1400" b="1" dirty="0">
+                <a:solidFill>
+                  <a:schemeClr val="tx1"/>
+                </a:solidFill>
+              </a:rPr>
+              <a:t>Deadline: antibiotics with enteric coverage</a:t>
+            </a:r>
+            <a:endParaRPr lang="en-US" sz="1400" dirty="0"/>
+          </a:p>
+        </p:txBody>
+      </p:sp>
+      <p:sp>
+        <p:nvSpPr>
+          <p:cNvPr id="17" name="Event 4 dot"/>
+          <p:cNvSpPr/>
+          <p:nvPr/>
+        </p:nvSpPr>
+        <p:spPr>
+          <a:xfrm>
+            <a:off x="1307592" y="5001768"/>
+            <a:ext cx="219456" cy="219456"/>
+          </a:xfrm>
+          <a:prstGeom prst="ellipse">
+            <a:avLst/>
+          </a:prstGeom>
+          <a:solidFill>
+            <a:schemeClr val="accent5"/>
+          </a:solidFill>
+          <a:ln/>
+        </p:spPr>
+      </p:sp>
+      <p:sp>
+        <p:nvSpPr>
+          <p:cNvPr id="18" name="Event 4 time"/>
+          <p:cNvSpPr txBox="1"/>
+          <p:nvPr/>
+        </p:nvSpPr>
+        <p:spPr>
+          <a:xfrm>
+            <a:off x="548640" y="4882896"/>
+            <a:ext cx="685800" cy="457200"/>
+          </a:xfrm>
+          <a:prstGeom prst="rect">
+            <a:avLst/>
+          </a:prstGeom>
+          <a:noFill/>
+          <a:ln/>
+        </p:spPr>
+        <p:txBody>
+          <a:bodyPr wrap="square" lIns="0" tIns="0" rIns="0" bIns="0" rtlCol="0" anchor="ctr"/>
+          <a:lstStyle/>
+          <a:p>
+            <a:pPr algn="r" indent="0" marL="0">
+              <a:buNone/>
+            </a:pPr>
+            <a:r>
+              <a:rPr lang="en-US" sz="1400" b="1" dirty="0">
+                <a:solidFill>
+                  <a:schemeClr val="accent5"/>
+                </a:solidFill>
+              </a:rPr>
+              <a:t>T+36h</a:t>
+            </a:r>
+            <a:endParaRPr lang="en-US" sz="1400" dirty="0"/>
+          </a:p>
+        </p:txBody>
+      </p:sp>
+      <p:sp>
+        <p:nvSpPr>
+          <p:cNvPr id="19" name="Event 4 text"/>
+          <p:cNvSpPr txBox="1"/>
+          <p:nvPr/>
+        </p:nvSpPr>
+        <p:spPr>
+          <a:xfrm>
+            <a:off x="1737360" y="4882896"/>
+            <a:ext cx="4206240" cy="457200"/>
+          </a:xfrm>
+          <a:prstGeom prst="rect">
+            <a:avLst/>
+          </a:prstGeom>
+          <a:noFill/>
+          <a:ln/>
+        </p:spPr>
+        <p:txBody>
+          <a:bodyPr wrap="square" lIns="0" tIns="0" rIns="0" bIns="0" rtlCol="0" anchor="ctr"/>
+          <a:lstStyle/>
+          <a:p>
+            <a:pPr indent="0" marL="0">
+              <a:buNone/>
+            </a:pPr>
+            <a:r>
+              <a:rPr lang="en-US" sz="1400" b="1" dirty="0">
+                <a:solidFill>
+                  <a:schemeClr val="tx1"/>
+                </a:solidFill>
+              </a:rPr>
+              <a:t>Complication event if untreated: perforation and peritonitis</a:t>
+            </a:r>
+            <a:endParaRPr lang="en-US" sz="1400" dirty="0"/>
+          </a:p>
+        </p:txBody>
+      </p:sp>
+      <p:sp>
+        <p:nvSpPr>
+          <p:cNvPr id="20" name="Event 5 dot"/>
+          <p:cNvSpPr/>
+          <p:nvPr/>
+        </p:nvSpPr>
+        <p:spPr>
+          <a:xfrm>
+            <a:off x="1307592" y="5669280"/>
             <a:ext cx="219456" cy="219456"/>
           </a:xfrm>
           <a:prstGeom prst="ellipse">
@@ -7937,190 +8988,6 @@
       </p:sp>
       <p:sp>
         <p:nvSpPr>
-          <p:cNvPr id="15" name="Event 3 time"/>
-          <p:cNvSpPr txBox="1"/>
-          <p:nvPr/>
-        </p:nvSpPr>
-        <p:spPr>
-          <a:xfrm>
-            <a:off x="548640" y="4215384"/>
-            <a:ext cx="685800" cy="457200"/>
-          </a:xfrm>
-          <a:prstGeom prst="rect">
-            <a:avLst/>
-          </a:prstGeom>
-          <a:noFill/>
-          <a:ln/>
-        </p:spPr>
-        <p:txBody>
-          <a:bodyPr wrap="square" lIns="0" tIns="0" rIns="0" bIns="0" rtlCol="0" anchor="ctr"/>
-          <a:lstStyle/>
-          <a:p>
-            <a:pPr algn="r" indent="0" marL="0">
-              <a:buNone/>
-            </a:pPr>
-            <a:r>
-              <a:rPr lang="en-US" sz="1400" b="1" dirty="0">
-                <a:solidFill>
-                  <a:schemeClr val="tx2"/>
-                </a:solidFill>
-              </a:rPr>
-              <a:t>T+6h</a:t>
-            </a:r>
-            <a:endParaRPr lang="en-US" sz="1400" dirty="0"/>
-          </a:p>
-        </p:txBody>
-      </p:sp>
-      <p:sp>
-        <p:nvSpPr>
-          <p:cNvPr id="16" name="Event 3 text"/>
-          <p:cNvSpPr txBox="1"/>
-          <p:nvPr/>
-        </p:nvSpPr>
-        <p:spPr>
-          <a:xfrm>
-            <a:off x="1737360" y="4215384"/>
-            <a:ext cx="4206240" cy="457200"/>
-          </a:xfrm>
-          <a:prstGeom prst="rect">
-            <a:avLst/>
-          </a:prstGeom>
-          <a:noFill/>
-          <a:ln/>
-        </p:spPr>
-        <p:txBody>
-          <a:bodyPr wrap="square" lIns="0" tIns="0" rIns="0" bIns="0" rtlCol="0" anchor="ctr"/>
-          <a:lstStyle/>
-          <a:p>
-            <a:pPr indent="0" marL="0">
-              <a:buNone/>
-            </a:pPr>
-            <a:r>
-              <a:rPr lang="en-US" sz="1400" dirty="0">
-                <a:solidFill>
-                  <a:schemeClr val="tx1"/>
-                </a:solidFill>
-              </a:rPr>
-              <a:t>Pain migrates to the right lower quadrant</a:t>
-            </a:r>
-            <a:endParaRPr lang="en-US" sz="1400" dirty="0"/>
-          </a:p>
-        </p:txBody>
-      </p:sp>
-      <p:sp>
-        <p:nvSpPr>
-          <p:cNvPr id="17" name="Event 4 dot"/>
-          <p:cNvSpPr/>
-          <p:nvPr/>
-        </p:nvSpPr>
-        <p:spPr>
-          <a:xfrm>
-            <a:off x="1307592" y="5001768"/>
-            <a:ext cx="219456" cy="219456"/>
-          </a:xfrm>
-          <a:prstGeom prst="ellipse">
-            <a:avLst/>
-          </a:prstGeom>
-          <a:solidFill>
-            <a:schemeClr val="accent1"/>
-          </a:solidFill>
-          <a:ln/>
-        </p:spPr>
-      </p:sp>
-      <p:sp>
-        <p:nvSpPr>
-          <p:cNvPr id="18" name="Event 4 time"/>
-          <p:cNvSpPr txBox="1"/>
-          <p:nvPr/>
-        </p:nvSpPr>
-        <p:spPr>
-          <a:xfrm>
-            <a:off x="548640" y="4882896"/>
-            <a:ext cx="685800" cy="457200"/>
-          </a:xfrm>
-          <a:prstGeom prst="rect">
-            <a:avLst/>
-          </a:prstGeom>
-          <a:noFill/>
-          <a:ln/>
-        </p:spPr>
-        <p:txBody>
-          <a:bodyPr wrap="square" lIns="0" tIns="0" rIns="0" bIns="0" rtlCol="0" anchor="ctr"/>
-          <a:lstStyle/>
-          <a:p>
-            <a:pPr algn="r" indent="0" marL="0">
-              <a:buNone/>
-            </a:pPr>
-            <a:r>
-              <a:rPr lang="en-US" sz="1400" b="1" dirty="0">
-                <a:solidFill>
-                  <a:schemeClr val="accent5"/>
-                </a:solidFill>
-              </a:rPr>
-              <a:t>T+8h</a:t>
-            </a:r>
-            <a:endParaRPr lang="en-US" sz="1400" dirty="0"/>
-          </a:p>
-        </p:txBody>
-      </p:sp>
-      <p:sp>
-        <p:nvSpPr>
-          <p:cNvPr id="19" name="Event 4 text"/>
-          <p:cNvSpPr txBox="1"/>
-          <p:nvPr/>
-        </p:nvSpPr>
-        <p:spPr>
-          <a:xfrm>
-            <a:off x="1737360" y="4882896"/>
-            <a:ext cx="4206240" cy="457200"/>
-          </a:xfrm>
-          <a:prstGeom prst="rect">
-            <a:avLst/>
-          </a:prstGeom>
-          <a:noFill/>
-          <a:ln/>
-        </p:spPr>
-        <p:txBody>
-          <a:bodyPr wrap="square" lIns="0" tIns="0" rIns="0" bIns="0" rtlCol="0" anchor="ctr"/>
-          <a:lstStyle/>
-          <a:p>
-            <a:pPr indent="0" marL="0">
-              <a:buNone/>
-            </a:pPr>
-            <a:r>
-              <a:rPr lang="en-US" sz="1400" b="1" dirty="0">
-                <a:solidFill>
-                  <a:schemeClr val="tx1"/>
-                </a:solidFill>
-              </a:rPr>
-              <a:t>Deadline: antibiotics with enteric coverage</a:t>
-            </a:r>
-            <a:endParaRPr lang="en-US" sz="1400" dirty="0"/>
-          </a:p>
-        </p:txBody>
-      </p:sp>
-      <p:sp>
-        <p:nvSpPr>
-          <p:cNvPr id="20" name="Event 5 dot"/>
-          <p:cNvSpPr/>
-          <p:nvPr/>
-        </p:nvSpPr>
-        <p:spPr>
-          <a:xfrm>
-            <a:off x="1307592" y="5669280"/>
-            <a:ext cx="219456" cy="219456"/>
-          </a:xfrm>
-          <a:prstGeom prst="ellipse">
-            <a:avLst/>
-          </a:prstGeom>
-          <a:solidFill>
-            <a:schemeClr val="tx2"/>
-          </a:solidFill>
-          <a:ln/>
-        </p:spPr>
-      </p:sp>
-      <p:sp>
-        <p:nvSpPr>
           <p:cNvPr id="21" name="Event 5 time"/>
           <p:cNvSpPr txBox="1"/>
           <p:nvPr/>
@@ -8149,7 +9016,7 @@
                   <a:schemeClr val="tx2"/>
                 </a:solidFill>
               </a:rPr>
-              <a:t>T+36h</a:t>
+              <a:t>T+4d</a:t>
             </a:r>
             <a:endParaRPr lang="en-US" sz="1400" dirty="0"/>
           </a:p>
@@ -8185,7 +9052,7 @@
                   <a:schemeClr val="tx1"/>
                 </a:solidFill>
               </a:rPr>
-              <a:t>If untreated: fever, tachycardia, peritonitis</a:t>
+              <a:t>Scenario ends; outcome recorded from the twin</a:t>
             </a:r>
             <a:endParaRPr lang="en-US" sz="1400" dirty="0"/>
           </a:p>
@@ -8237,7 +9104,7 @@
                   <a:schemeClr val="tx1"/>
                 </a:solidFill>
               </a:rPr>
-              <a:t>The case is scored on 17 checklist items plus diagnosis and etiology, in all 8 runs. Values from the appendicitis CLiFF; pending physiologist review.</a:t>
+              <a:t>Scored on 17 checklist items plus diagnosis and etiology, in all 8 runs. Values from the appendicitis CLiFF; pending physiologist review.</a:t>
             </a:r>
             <a:endParaRPr lang="en-US" sz="1400" dirty="0"/>
           </a:p>
@@ -8342,10 +9209,1516 @@
             <a:r>
               <a:rPr lang="en-US" sz="3400" b="1" dirty="0">
                 <a:solidFill>
+                  <a:schemeClr val="tx2"/>
+                </a:solidFill>
+              </a:rPr>
+              <a:t>Plan of work: six phases, authoring to reports</a:t>
+            </a:r>
+            <a:endParaRPr lang="en-US" sz="3400" dirty="0"/>
+          </a:p>
+        </p:txBody>
+      </p:sp>
+      <p:graphicFrame>
+        <p:nvGraphicFramePr>
+          <p:cNvPr id="9" name="Plan of work table"/>
+          <p:cNvGraphicFramePr>
+            <a:graphicFrameLocks noGrp="1"/>
+          </p:cNvGraphicFramePr>
+          <p:nvPr>
+            <p:extLst>
+              <p:ext uri="{D42A27DB-BD31-4B8C-83A1-F6EECF244321}">
+                <p14:modId xmlns:p14="http://schemas.microsoft.com/office/powerpoint/2010/main" val="1579011935"/>
+              </p:ext>
+            </p:extLst>
+          </p:nvPr>
+        </p:nvGraphicFramePr>
+        <p:xfrm>
+          <a:off x="548640" y="1325880"/>
+          <a:ext cx="11064240" cy="914400"/>
+        </p:xfrm>
+        <a:graphic>
+          <a:graphicData uri="http://schemas.openxmlformats.org/drawingml/2006/table">
+            <a:tbl>
+              <a:tblPr/>
+              <a:tblGrid>
+                <a:gridCol w="2514600"/>
+                <a:gridCol w="4251960"/>
+                <a:gridCol w="3291840"/>
+                <a:gridCol w="1005840"/>
+              </a:tblGrid>
+              <a:tr h="384048">
+                <a:tc>
+                  <a:txBody>
+                    <a:bodyPr/>
+                    <a:lstStyle/>
+                    <a:p>
+                      <a:pPr indent="0" marL="0">
+                        <a:buNone/>
+                      </a:pPr>
+                      <a:r>
+                        <a:rPr lang="en-US" sz="1400" b="1" dirty="0">
+                          <a:solidFill>
+                            <a:schemeClr val="bg1"/>
+                          </a:solidFill>
+                          <a:latin typeface="+mn-lt" pitchFamily="34" charset="0"/>
+                          <a:ea typeface="+mn-lt" pitchFamily="34" charset="-122"/>
+                          <a:cs typeface="+mn-lt" pitchFamily="34" charset="-120"/>
+                        </a:rPr>
+                        <a:t>Phase</a:t>
+                      </a:r>
+                      <a:endParaRPr lang="en-US" sz="1400" dirty="0">
+                        <a:latin typeface="+mn-lt" charset="0"/>
+                        <a:ea typeface="+mn-lt" charset="0"/>
+                        <a:cs typeface="+mn-lt" charset="0"/>
+                      </a:endParaRPr>
+                    </a:p>
+                  </a:txBody>
+                  <a:tcPr marL="91440" marR="91440" marT="54864" marB="54864" anchor="ctr">
+                    <a:lnL w="0" cap="flat" cmpd="sng" algn="ctr">
+                      <a:noFill/>
+                    </a:lnL>
+                    <a:lnR w="0" cap="flat" cmpd="sng" algn="ctr">
+                      <a:noFill/>
+                    </a:lnR>
+                    <a:lnT w="0" cap="flat" cmpd="sng" algn="ctr">
+                      <a:noFill/>
+                    </a:lnT>
+                    <a:lnB w="0" cap="flat" cmpd="sng" algn="ctr">
+                      <a:noFill/>
+                    </a:lnB>
+                    <a:solidFill>
+                      <a:schemeClr val="tx2"/>
+                    </a:solidFill>
+                  </a:tcPr>
+                </a:tc>
+                <a:tc>
+                  <a:txBody>
+                    <a:bodyPr/>
+                    <a:lstStyle/>
+                    <a:p>
+                      <a:pPr indent="0" marL="0">
+                        <a:buNone/>
+                      </a:pPr>
+                      <a:r>
+                        <a:rPr lang="en-US" sz="1400" b="1" dirty="0">
+                          <a:solidFill>
+                            <a:schemeClr val="bg1"/>
+                          </a:solidFill>
+                          <a:latin typeface="+mn-lt" pitchFamily="34" charset="0"/>
+                          <a:ea typeface="+mn-lt" pitchFamily="34" charset="-122"/>
+                          <a:cs typeface="+mn-lt" pitchFamily="34" charset="-120"/>
+                        </a:rPr>
+                        <a:t>What it builds</a:t>
+                      </a:r>
+                      <a:endParaRPr lang="en-US" sz="1400" dirty="0">
+                        <a:latin typeface="+mn-lt" charset="0"/>
+                        <a:ea typeface="+mn-lt" charset="0"/>
+                        <a:cs typeface="+mn-lt" charset="0"/>
+                      </a:endParaRPr>
+                    </a:p>
+                  </a:txBody>
+                  <a:tcPr marL="91440" marR="91440" marT="54864" marB="54864" anchor="ctr">
+                    <a:lnL w="0" cap="flat" cmpd="sng" algn="ctr">
+                      <a:noFill/>
+                    </a:lnL>
+                    <a:lnR w="0" cap="flat" cmpd="sng" algn="ctr">
+                      <a:noFill/>
+                    </a:lnR>
+                    <a:lnT w="0" cap="flat" cmpd="sng" algn="ctr">
+                      <a:noFill/>
+                    </a:lnT>
+                    <a:lnB w="0" cap="flat" cmpd="sng" algn="ctr">
+                      <a:noFill/>
+                    </a:lnB>
+                    <a:solidFill>
+                      <a:schemeClr val="tx2"/>
+                    </a:solidFill>
+                  </a:tcPr>
+                </a:tc>
+                <a:tc>
+                  <a:txBody>
+                    <a:bodyPr/>
+                    <a:lstStyle/>
+                    <a:p>
+                      <a:pPr indent="0" marL="0">
+                        <a:buNone/>
+                      </a:pPr>
+                      <a:r>
+                        <a:rPr lang="en-US" sz="1400" b="1" dirty="0">
+                          <a:solidFill>
+                            <a:schemeClr val="bg1"/>
+                          </a:solidFill>
+                          <a:latin typeface="+mn-lt" pitchFamily="34" charset="0"/>
+                          <a:ea typeface="+mn-lt" pitchFamily="34" charset="-122"/>
+                          <a:cs typeface="+mn-lt" pitchFamily="34" charset="-120"/>
+                        </a:rPr>
+                        <a:t>Done when</a:t>
+                      </a:r>
+                      <a:endParaRPr lang="en-US" sz="1400" dirty="0">
+                        <a:latin typeface="+mn-lt" charset="0"/>
+                        <a:ea typeface="+mn-lt" charset="0"/>
+                        <a:cs typeface="+mn-lt" charset="0"/>
+                      </a:endParaRPr>
+                    </a:p>
+                  </a:txBody>
+                  <a:tcPr marL="91440" marR="91440" marT="54864" marB="54864" anchor="ctr">
+                    <a:lnL w="0" cap="flat" cmpd="sng" algn="ctr">
+                      <a:noFill/>
+                    </a:lnL>
+                    <a:lnR w="0" cap="flat" cmpd="sng" algn="ctr">
+                      <a:noFill/>
+                    </a:lnR>
+                    <a:lnT w="0" cap="flat" cmpd="sng" algn="ctr">
+                      <a:noFill/>
+                    </a:lnT>
+                    <a:lnB w="0" cap="flat" cmpd="sng" algn="ctr">
+                      <a:noFill/>
+                    </a:lnB>
+                    <a:solidFill>
+                      <a:schemeClr val="tx2"/>
+                    </a:solidFill>
+                  </a:tcPr>
+                </a:tc>
+                <a:tc>
+                  <a:txBody>
+                    <a:bodyPr/>
+                    <a:lstStyle/>
+                    <a:p>
+                      <a:pPr indent="0" marL="0">
+                        <a:buNone/>
+                      </a:pPr>
+                      <a:r>
+                        <a:rPr lang="en-US" sz="1400" b="1" dirty="0">
+                          <a:solidFill>
+                            <a:schemeClr val="bg1"/>
+                          </a:solidFill>
+                          <a:latin typeface="+mn-lt" pitchFamily="34" charset="0"/>
+                          <a:ea typeface="+mn-lt" pitchFamily="34" charset="-122"/>
+                          <a:cs typeface="+mn-lt" pitchFamily="34" charset="-120"/>
+                        </a:rPr>
+                        <a:t>Status</a:t>
+                      </a:r>
+                      <a:endParaRPr lang="en-US" sz="1400" dirty="0">
+                        <a:latin typeface="+mn-lt" charset="0"/>
+                        <a:ea typeface="+mn-lt" charset="0"/>
+                        <a:cs typeface="+mn-lt" charset="0"/>
+                      </a:endParaRPr>
+                    </a:p>
+                  </a:txBody>
+                  <a:tcPr marL="91440" marR="91440" marT="54864" marB="54864" anchor="ctr">
+                    <a:lnL w="0" cap="flat" cmpd="sng" algn="ctr">
+                      <a:noFill/>
+                    </a:lnL>
+                    <a:lnR w="0" cap="flat" cmpd="sng" algn="ctr">
+                      <a:noFill/>
+                    </a:lnR>
+                    <a:lnT w="0" cap="flat" cmpd="sng" algn="ctr">
+                      <a:noFill/>
+                    </a:lnT>
+                    <a:lnB w="0" cap="flat" cmpd="sng" algn="ctr">
+                      <a:noFill/>
+                    </a:lnB>
+                    <a:solidFill>
+                      <a:schemeClr val="tx2"/>
+                    </a:solidFill>
+                  </a:tcPr>
+                </a:tc>
+              </a:tr>
+              <a:tr h="658368">
+                <a:tc>
+                  <a:txBody>
+                    <a:bodyPr/>
+                    <a:lstStyle/>
+                    <a:p>
+                      <a:pPr indent="0" marL="0">
+                        <a:buNone/>
+                      </a:pPr>
+                      <a:r>
+                        <a:rPr lang="en-US" sz="1300" b="1" dirty="0">
+                          <a:solidFill>
+                            <a:schemeClr val="accent1"/>
+                          </a:solidFill>
+                          <a:latin typeface="+mn-lt" pitchFamily="34" charset="0"/>
+                          <a:ea typeface="+mn-lt" pitchFamily="34" charset="-122"/>
+                          <a:cs typeface="+mn-lt" pitchFamily="34" charset="-120"/>
+                        </a:rPr>
+                        <a:t>A  </a:t>
+                      </a:r>
+                      <a:pPr indent="0" marL="0">
+                        <a:buNone/>
+                      </a:pPr>
+                      <a:r>
+                        <a:rPr lang="en-US" sz="1300" b="1" dirty="0">
+                          <a:solidFill>
+                            <a:schemeClr val="tx2"/>
+                          </a:solidFill>
+                          <a:latin typeface="+mn-lt" pitchFamily="34" charset="0"/>
+                          <a:ea typeface="+mn-lt" pitchFamily="34" charset="-122"/>
+                          <a:cs typeface="+mn-lt" pitchFamily="34" charset="-120"/>
+                        </a:rPr>
+                        <a:t>Scenario authoring</a:t>
+                      </a:r>
+                      <a:endParaRPr lang="en-US" sz="1300" dirty="0">
+                        <a:latin typeface="+mn-lt" charset="0"/>
+                        <a:ea typeface="+mn-lt" charset="0"/>
+                        <a:cs typeface="+mn-lt" charset="0"/>
+                      </a:endParaRPr>
+                    </a:p>
+                  </a:txBody>
+                  <a:tcPr marL="91440" marR="91440" marT="54864" marB="54864" anchor="ctr">
+                    <a:lnL w="0" cap="flat" cmpd="sng" algn="ctr">
+                      <a:noFill/>
+                    </a:lnL>
+                    <a:lnR w="0" cap="flat" cmpd="sng" algn="ctr">
+                      <a:noFill/>
+                    </a:lnR>
+                    <a:lnT w="0" cap="flat" cmpd="sng" algn="ctr">
+                      <a:noFill/>
+                    </a:lnT>
+                    <a:lnB w="0" cap="flat" cmpd="sng" algn="ctr">
+                      <a:noFill/>
+                    </a:lnB>
+                    <a:solidFill>
+                      <a:schemeClr val="bg2"/>
+                    </a:solidFill>
+                  </a:tcPr>
+                </a:tc>
+                <a:tc>
+                  <a:txBody>
+                    <a:bodyPr/>
+                    <a:lstStyle/>
+                    <a:p>
+                      <a:pPr indent="0" marL="0">
+                        <a:buNone/>
+                      </a:pPr>
+                      <a:r>
+                        <a:rPr lang="en-US" sz="1300" dirty="0">
+                          <a:solidFill>
+                            <a:schemeClr val="tx1"/>
+                          </a:solidFill>
+                          <a:latin typeface="+mn-lt" pitchFamily="34" charset="0"/>
+                          <a:ea typeface="+mn-lt" pitchFamily="34" charset="-122"/>
+                          <a:cs typeface="+mn-lt" pitchFamily="34" charset="-120"/>
+                        </a:rPr>
+                        <a:t>File formats and validator; NASA library; Scenario Builder; clerk guide</a:t>
+                      </a:r>
+                      <a:endParaRPr lang="en-US" sz="1300" dirty="0">
+                        <a:latin typeface="+mn-lt" charset="0"/>
+                        <a:ea typeface="+mn-lt" charset="0"/>
+                        <a:cs typeface="+mn-lt" charset="0"/>
+                      </a:endParaRPr>
+                    </a:p>
+                  </a:txBody>
+                  <a:tcPr marL="91440" marR="91440" marT="54864" marB="54864" anchor="ctr">
+                    <a:lnL w="0" cap="flat" cmpd="sng" algn="ctr">
+                      <a:noFill/>
+                    </a:lnL>
+                    <a:lnR w="0" cap="flat" cmpd="sng" algn="ctr">
+                      <a:noFill/>
+                    </a:lnR>
+                    <a:lnT w="0" cap="flat" cmpd="sng" algn="ctr">
+                      <a:noFill/>
+                    </a:lnT>
+                    <a:lnB w="0" cap="flat" cmpd="sng" algn="ctr">
+                      <a:noFill/>
+                    </a:lnB>
+                    <a:solidFill>
+                      <a:schemeClr val="bg2"/>
+                    </a:solidFill>
+                  </a:tcPr>
+                </a:tc>
+                <a:tc>
+                  <a:txBody>
+                    <a:bodyPr/>
+                    <a:lstStyle/>
+                    <a:p>
+                      <a:pPr indent="0" marL="0">
+                        <a:buNone/>
+                      </a:pPr>
+                      <a:r>
+                        <a:rPr lang="en-US" sz="1300" dirty="0">
+                          <a:solidFill>
+                            <a:schemeClr val="tx1"/>
+                          </a:solidFill>
+                          <a:latin typeface="+mn-lt" pitchFamily="34" charset="0"/>
+                          <a:ea typeface="+mn-lt" pitchFamily="34" charset="-122"/>
+                          <a:cs typeface="+mn-lt" pitchFamily="34" charset="-120"/>
+                        </a:rPr>
+                        <a:t>A clerk with no briefing builds a valid scenario</a:t>
+                      </a:r>
+                      <a:endParaRPr lang="en-US" sz="1300" dirty="0">
+                        <a:latin typeface="+mn-lt" charset="0"/>
+                        <a:ea typeface="+mn-lt" charset="0"/>
+                        <a:cs typeface="+mn-lt" charset="0"/>
+                      </a:endParaRPr>
+                    </a:p>
+                  </a:txBody>
+                  <a:tcPr marL="91440" marR="91440" marT="54864" marB="54864" anchor="ctr">
+                    <a:lnL w="0" cap="flat" cmpd="sng" algn="ctr">
+                      <a:noFill/>
+                    </a:lnL>
+                    <a:lnR w="0" cap="flat" cmpd="sng" algn="ctr">
+                      <a:noFill/>
+                    </a:lnR>
+                    <a:lnT w="0" cap="flat" cmpd="sng" algn="ctr">
+                      <a:noFill/>
+                    </a:lnT>
+                    <a:lnB w="0" cap="flat" cmpd="sng" algn="ctr">
+                      <a:noFill/>
+                    </a:lnB>
+                    <a:solidFill>
+                      <a:schemeClr val="bg2"/>
+                    </a:solidFill>
+                  </a:tcPr>
+                </a:tc>
+                <a:tc>
+                  <a:txBody>
+                    <a:bodyPr/>
+                    <a:lstStyle/>
+                    <a:p>
+                      <a:pPr indent="0" marL="0">
+                        <a:buNone/>
+                      </a:pPr>
+                      <a:r>
+                        <a:rPr lang="en-US" sz="1300" b="1" dirty="0">
+                          <a:solidFill>
+                            <a:schemeClr val="accent5"/>
+                          </a:solidFill>
+                          <a:latin typeface="+mn-lt" pitchFamily="34" charset="0"/>
+                          <a:ea typeface="+mn-lt" pitchFamily="34" charset="-122"/>
+                          <a:cs typeface="+mn-lt" pitchFamily="34" charset="-120"/>
+                        </a:rPr>
+                        <a:t>Built</a:t>
+                      </a:r>
+                      <a:endParaRPr lang="en-US" sz="1300" dirty="0">
+                        <a:latin typeface="+mn-lt" charset="0"/>
+                        <a:ea typeface="+mn-lt" charset="0"/>
+                        <a:cs typeface="+mn-lt" charset="0"/>
+                      </a:endParaRPr>
+                    </a:p>
+                  </a:txBody>
+                  <a:tcPr marL="91440" marR="91440" marT="54864" marB="54864" anchor="ctr">
+                    <a:lnL w="0" cap="flat" cmpd="sng" algn="ctr">
+                      <a:noFill/>
+                    </a:lnL>
+                    <a:lnR w="0" cap="flat" cmpd="sng" algn="ctr">
+                      <a:noFill/>
+                    </a:lnR>
+                    <a:lnT w="0" cap="flat" cmpd="sng" algn="ctr">
+                      <a:noFill/>
+                    </a:lnT>
+                    <a:lnB w="0" cap="flat" cmpd="sng" algn="ctr">
+                      <a:noFill/>
+                    </a:lnB>
+                    <a:solidFill>
+                      <a:schemeClr val="bg2"/>
+                    </a:solidFill>
+                  </a:tcPr>
+                </a:tc>
+              </a:tr>
+              <a:tr h="658368">
+                <a:tc>
+                  <a:txBody>
+                    <a:bodyPr/>
+                    <a:lstStyle/>
+                    <a:p>
+                      <a:pPr indent="0" marL="0">
+                        <a:buNone/>
+                      </a:pPr>
+                      <a:r>
+                        <a:rPr lang="en-US" sz="1300" b="1" dirty="0">
+                          <a:solidFill>
+                            <a:schemeClr val="accent1"/>
+                          </a:solidFill>
+                          <a:latin typeface="+mn-lt" pitchFamily="34" charset="0"/>
+                          <a:ea typeface="+mn-lt" pitchFamily="34" charset="-122"/>
+                          <a:cs typeface="+mn-lt" pitchFamily="34" charset="-120"/>
+                        </a:rPr>
+                        <a:t>A5–A7  </a:t>
+                      </a:r>
+                      <a:pPr indent="0" marL="0">
+                        <a:buNone/>
+                      </a:pPr>
+                      <a:r>
+                        <a:rPr lang="en-US" sz="1300" b="1" dirty="0">
+                          <a:solidFill>
+                            <a:schemeClr val="tx2"/>
+                          </a:solidFill>
+                          <a:latin typeface="+mn-lt" pitchFamily="34" charset="0"/>
+                          <a:ea typeface="+mn-lt" pitchFamily="34" charset="-122"/>
+                          <a:cs typeface="+mn-lt" pitchFamily="34" charset="-120"/>
+                        </a:rPr>
+                        <a:t>Authoring, round 2</a:t>
+                      </a:r>
+                      <a:endParaRPr lang="en-US" sz="1300" dirty="0">
+                        <a:latin typeface="+mn-lt" charset="0"/>
+                        <a:ea typeface="+mn-lt" charset="0"/>
+                        <a:cs typeface="+mn-lt" charset="0"/>
+                      </a:endParaRPr>
+                    </a:p>
+                  </a:txBody>
+                  <a:tcPr marL="91440" marR="91440" marT="54864" marB="54864" anchor="ctr">
+                    <a:lnL w="0" cap="flat" cmpd="sng" algn="ctr">
+                      <a:noFill/>
+                    </a:lnL>
+                    <a:lnR w="0" cap="flat" cmpd="sng" algn="ctr">
+                      <a:noFill/>
+                    </a:lnR>
+                    <a:lnT w="0" cap="flat" cmpd="sng" algn="ctr">
+                      <a:noFill/>
+                    </a:lnT>
+                    <a:lnB w="0" cap="flat" cmpd="sng" algn="ctr">
+                      <a:noFill/>
+                    </a:lnB>
+                    <a:solidFill>
+                      <a:schemeClr val="bg1"/>
+                    </a:solidFill>
+                  </a:tcPr>
+                </a:tc>
+                <a:tc>
+                  <a:txBody>
+                    <a:bodyPr/>
+                    <a:lstStyle/>
+                    <a:p>
+                      <a:pPr indent="0" marL="0">
+                        <a:buNone/>
+                      </a:pPr>
+                      <a:r>
+                        <a:rPr lang="en-US" sz="1300" dirty="0">
+                          <a:solidFill>
+                            <a:schemeClr val="tx1"/>
+                          </a:solidFill>
+                          <a:latin typeface="+mn-lt" pitchFamily="34" charset="0"/>
+                          <a:ea typeface="+mn-lt" pitchFamily="34" charset="-122"/>
+                          <a:cs typeface="+mn-lt" pitchFamily="34" charset="-120"/>
+                        </a:rPr>
+                        <a:t>Second clerk round; multi-patient and triage scenarios; manual scoring sheet</a:t>
+                      </a:r>
+                      <a:endParaRPr lang="en-US" sz="1300" dirty="0">
+                        <a:latin typeface="+mn-lt" charset="0"/>
+                        <a:ea typeface="+mn-lt" charset="0"/>
+                        <a:cs typeface="+mn-lt" charset="0"/>
+                      </a:endParaRPr>
+                    </a:p>
+                  </a:txBody>
+                  <a:tcPr marL="91440" marR="91440" marT="54864" marB="54864" anchor="ctr">
+                    <a:lnL w="0" cap="flat" cmpd="sng" algn="ctr">
+                      <a:noFill/>
+                    </a:lnL>
+                    <a:lnR w="0" cap="flat" cmpd="sng" algn="ctr">
+                      <a:noFill/>
+                    </a:lnR>
+                    <a:lnT w="0" cap="flat" cmpd="sng" algn="ctr">
+                      <a:noFill/>
+                    </a:lnT>
+                    <a:lnB w="0" cap="flat" cmpd="sng" algn="ctr">
+                      <a:noFill/>
+                    </a:lnB>
+                    <a:solidFill>
+                      <a:schemeClr val="bg1"/>
+                    </a:solidFill>
+                  </a:tcPr>
+                </a:tc>
+                <a:tc>
+                  <a:txBody>
+                    <a:bodyPr/>
+                    <a:lstStyle/>
+                    <a:p>
+                      <a:pPr indent="0" marL="0">
+                        <a:buNone/>
+                      </a:pPr>
+                      <a:r>
+                        <a:rPr lang="en-US" sz="1300" dirty="0">
+                          <a:solidFill>
+                            <a:schemeClr val="tx1"/>
+                          </a:solidFill>
+                          <a:latin typeface="+mn-lt" pitchFamily="34" charset="0"/>
+                          <a:ea typeface="+mn-lt" pitchFamily="34" charset="-122"/>
+                          <a:cs typeface="+mn-lt" pitchFamily="34" charset="-120"/>
+                        </a:rPr>
+                        <a:t>Form revised from round 2; clinical lead agrees triage rules</a:t>
+                      </a:r>
+                      <a:endParaRPr lang="en-US" sz="1300" dirty="0">
+                        <a:latin typeface="+mn-lt" charset="0"/>
+                        <a:ea typeface="+mn-lt" charset="0"/>
+                        <a:cs typeface="+mn-lt" charset="0"/>
+                      </a:endParaRPr>
+                    </a:p>
+                  </a:txBody>
+                  <a:tcPr marL="91440" marR="91440" marT="54864" marB="54864" anchor="ctr">
+                    <a:lnL w="0" cap="flat" cmpd="sng" algn="ctr">
+                      <a:noFill/>
+                    </a:lnL>
+                    <a:lnR w="0" cap="flat" cmpd="sng" algn="ctr">
+                      <a:noFill/>
+                    </a:lnR>
+                    <a:lnT w="0" cap="flat" cmpd="sng" algn="ctr">
+                      <a:noFill/>
+                    </a:lnT>
+                    <a:lnB w="0" cap="flat" cmpd="sng" algn="ctr">
+                      <a:noFill/>
+                    </a:lnB>
+                    <a:solidFill>
+                      <a:schemeClr val="bg1"/>
+                    </a:solidFill>
+                  </a:tcPr>
+                </a:tc>
+                <a:tc>
+                  <a:txBody>
+                    <a:bodyPr/>
+                    <a:lstStyle/>
+                    <a:p>
+                      <a:pPr indent="0" marL="0">
+                        <a:buNone/>
+                      </a:pPr>
+                      <a:r>
+                        <a:rPr lang="en-US" sz="1300" dirty="0">
+                          <a:solidFill>
+                            <a:schemeClr val="accent3"/>
+                          </a:solidFill>
+                          <a:latin typeface="+mn-lt" pitchFamily="34" charset="0"/>
+                          <a:ea typeface="+mn-lt" pitchFamily="34" charset="-122"/>
+                          <a:cs typeface="+mn-lt" pitchFamily="34" charset="-120"/>
+                        </a:rPr>
+                        <a:t>Next</a:t>
+                      </a:r>
+                      <a:endParaRPr lang="en-US" sz="1300" dirty="0">
+                        <a:latin typeface="+mn-lt" charset="0"/>
+                        <a:ea typeface="+mn-lt" charset="0"/>
+                        <a:cs typeface="+mn-lt" charset="0"/>
+                      </a:endParaRPr>
+                    </a:p>
+                  </a:txBody>
+                  <a:tcPr marL="91440" marR="91440" marT="54864" marB="54864" anchor="ctr">
+                    <a:lnL w="0" cap="flat" cmpd="sng" algn="ctr">
+                      <a:noFill/>
+                    </a:lnL>
+                    <a:lnR w="0" cap="flat" cmpd="sng" algn="ctr">
+                      <a:noFill/>
+                    </a:lnR>
+                    <a:lnT w="0" cap="flat" cmpd="sng" algn="ctr">
+                      <a:noFill/>
+                    </a:lnT>
+                    <a:lnB w="0" cap="flat" cmpd="sng" algn="ctr">
+                      <a:noFill/>
+                    </a:lnB>
+                    <a:solidFill>
+                      <a:schemeClr val="bg1"/>
+                    </a:solidFill>
+                  </a:tcPr>
+                </a:tc>
+              </a:tr>
+              <a:tr h="658368">
+                <a:tc>
+                  <a:txBody>
+                    <a:bodyPr/>
+                    <a:lstStyle/>
+                    <a:p>
+                      <a:pPr indent="0" marL="0">
+                        <a:buNone/>
+                      </a:pPr>
+                      <a:r>
+                        <a:rPr lang="en-US" sz="1300" b="1" dirty="0">
+                          <a:solidFill>
+                            <a:schemeClr val="accent1"/>
+                          </a:solidFill>
+                          <a:latin typeface="+mn-lt" pitchFamily="34" charset="0"/>
+                          <a:ea typeface="+mn-lt" pitchFamily="34" charset="-122"/>
+                          <a:cs typeface="+mn-lt" pitchFamily="34" charset="-120"/>
+                        </a:rPr>
+                        <a:t>B  </a:t>
+                      </a:r>
+                      <a:pPr indent="0" marL="0">
+                        <a:buNone/>
+                      </a:pPr>
+                      <a:r>
+                        <a:rPr lang="en-US" sz="1300" b="1" dirty="0">
+                          <a:solidFill>
+                            <a:schemeClr val="tx2"/>
+                          </a:solidFill>
+                          <a:latin typeface="+mn-lt" pitchFamily="34" charset="0"/>
+                          <a:ea typeface="+mn-lt" pitchFamily="34" charset="-122"/>
+                          <a:cs typeface="+mn-lt" pitchFamily="34" charset="-120"/>
+                        </a:rPr>
+                        <a:t>Runner</a:t>
+                      </a:r>
+                      <a:endParaRPr lang="en-US" sz="1300" dirty="0">
+                        <a:latin typeface="+mn-lt" charset="0"/>
+                        <a:ea typeface="+mn-lt" charset="0"/>
+                        <a:cs typeface="+mn-lt" charset="0"/>
+                      </a:endParaRPr>
+                    </a:p>
+                  </a:txBody>
+                  <a:tcPr marL="91440" marR="91440" marT="54864" marB="54864" anchor="ctr">
+                    <a:lnL w="0" cap="flat" cmpd="sng" algn="ctr">
+                      <a:noFill/>
+                    </a:lnL>
+                    <a:lnR w="0" cap="flat" cmpd="sng" algn="ctr">
+                      <a:noFill/>
+                    </a:lnR>
+                    <a:lnT w="0" cap="flat" cmpd="sng" algn="ctr">
+                      <a:noFill/>
+                    </a:lnT>
+                    <a:lnB w="0" cap="flat" cmpd="sng" algn="ctr">
+                      <a:noFill/>
+                    </a:lnB>
+                    <a:solidFill>
+                      <a:schemeClr val="bg2"/>
+                    </a:solidFill>
+                  </a:tcPr>
+                </a:tc>
+                <a:tc>
+                  <a:txBody>
+                    <a:bodyPr/>
+                    <a:lstStyle/>
+                    <a:p>
+                      <a:pPr indent="0" marL="0">
+                        <a:buNone/>
+                      </a:pPr>
+                      <a:r>
+                        <a:rPr lang="en-US" sz="1300" dirty="0">
+                          <a:solidFill>
+                            <a:schemeClr val="tx1"/>
+                          </a:solidFill>
+                          <a:latin typeface="+mn-lt" pitchFamily="34" charset="0"/>
+                          <a:ea typeface="+mn-lt" pitchFamily="34" charset="-122"/>
+                          <a:cs typeface="+mn-lt" pitchFamily="34" charset="-120"/>
+                        </a:rPr>
+                        <a:t>Adapter for any assistant; MCP tools; AI crewmember; 8-run batches on a simple twin</a:t>
+                      </a:r>
+                      <a:endParaRPr lang="en-US" sz="1300" dirty="0">
+                        <a:latin typeface="+mn-lt" charset="0"/>
+                        <a:ea typeface="+mn-lt" charset="0"/>
+                        <a:cs typeface="+mn-lt" charset="0"/>
+                      </a:endParaRPr>
+                    </a:p>
+                  </a:txBody>
+                  <a:tcPr marL="91440" marR="91440" marT="54864" marB="54864" anchor="ctr">
+                    <a:lnL w="0" cap="flat" cmpd="sng" algn="ctr">
+                      <a:noFill/>
+                    </a:lnL>
+                    <a:lnR w="0" cap="flat" cmpd="sng" algn="ctr">
+                      <a:noFill/>
+                    </a:lnR>
+                    <a:lnT w="0" cap="flat" cmpd="sng" algn="ctr">
+                      <a:noFill/>
+                    </a:lnT>
+                    <a:lnB w="0" cap="flat" cmpd="sng" algn="ctr">
+                      <a:noFill/>
+                    </a:lnB>
+                    <a:solidFill>
+                      <a:schemeClr val="bg2"/>
+                    </a:solidFill>
+                  </a:tcPr>
+                </a:tc>
+                <a:tc>
+                  <a:txBody>
+                    <a:bodyPr/>
+                    <a:lstStyle/>
+                    <a:p>
+                      <a:pPr indent="0" marL="0">
+                        <a:buNone/>
+                      </a:pPr>
+                      <a:r>
+                        <a:rPr lang="en-US" sz="1300" dirty="0">
+                          <a:solidFill>
+                            <a:schemeClr val="tx1"/>
+                          </a:solidFill>
+                          <a:latin typeface="+mn-lt" pitchFamily="34" charset="0"/>
+                          <a:ea typeface="+mn-lt" pitchFamily="34" charset="-122"/>
+                          <a:cs typeface="+mn-lt" pitchFamily="34" charset="-120"/>
+                        </a:rPr>
+                        <a:t>One scenario runs end to end on the laptop overnight</a:t>
+                      </a:r>
+                      <a:endParaRPr lang="en-US" sz="1300" dirty="0">
+                        <a:latin typeface="+mn-lt" charset="0"/>
+                        <a:ea typeface="+mn-lt" charset="0"/>
+                        <a:cs typeface="+mn-lt" charset="0"/>
+                      </a:endParaRPr>
+                    </a:p>
+                  </a:txBody>
+                  <a:tcPr marL="91440" marR="91440" marT="54864" marB="54864" anchor="ctr">
+                    <a:lnL w="0" cap="flat" cmpd="sng" algn="ctr">
+                      <a:noFill/>
+                    </a:lnL>
+                    <a:lnR w="0" cap="flat" cmpd="sng" algn="ctr">
+                      <a:noFill/>
+                    </a:lnR>
+                    <a:lnT w="0" cap="flat" cmpd="sng" algn="ctr">
+                      <a:noFill/>
+                    </a:lnT>
+                    <a:lnB w="0" cap="flat" cmpd="sng" algn="ctr">
+                      <a:noFill/>
+                    </a:lnB>
+                    <a:solidFill>
+                      <a:schemeClr val="bg2"/>
+                    </a:solidFill>
+                  </a:tcPr>
+                </a:tc>
+                <a:tc>
+                  <a:txBody>
+                    <a:bodyPr/>
+                    <a:lstStyle/>
+                    <a:p>
+                      <a:pPr indent="0" marL="0">
+                        <a:buNone/>
+                      </a:pPr>
+                      <a:r>
+                        <a:rPr lang="en-US" sz="1300" dirty="0">
+                          <a:solidFill>
+                            <a:schemeClr val="accent3"/>
+                          </a:solidFill>
+                          <a:latin typeface="+mn-lt" pitchFamily="34" charset="0"/>
+                          <a:ea typeface="+mn-lt" pitchFamily="34" charset="-122"/>
+                          <a:cs typeface="+mn-lt" pitchFamily="34" charset="-120"/>
+                        </a:rPr>
+                        <a:t>Planned</a:t>
+                      </a:r>
+                      <a:endParaRPr lang="en-US" sz="1300" dirty="0">
+                        <a:latin typeface="+mn-lt" charset="0"/>
+                        <a:ea typeface="+mn-lt" charset="0"/>
+                        <a:cs typeface="+mn-lt" charset="0"/>
+                      </a:endParaRPr>
+                    </a:p>
+                  </a:txBody>
+                  <a:tcPr marL="91440" marR="91440" marT="54864" marB="54864" anchor="ctr">
+                    <a:lnL w="0" cap="flat" cmpd="sng" algn="ctr">
+                      <a:noFill/>
+                    </a:lnL>
+                    <a:lnR w="0" cap="flat" cmpd="sng" algn="ctr">
+                      <a:noFill/>
+                    </a:lnR>
+                    <a:lnT w="0" cap="flat" cmpd="sng" algn="ctr">
+                      <a:noFill/>
+                    </a:lnT>
+                    <a:lnB w="0" cap="flat" cmpd="sng" algn="ctr">
+                      <a:noFill/>
+                    </a:lnB>
+                    <a:solidFill>
+                      <a:schemeClr val="bg2"/>
+                    </a:solidFill>
+                  </a:tcPr>
+                </a:tc>
+              </a:tr>
+              <a:tr h="658368">
+                <a:tc>
+                  <a:txBody>
+                    <a:bodyPr/>
+                    <a:lstStyle/>
+                    <a:p>
+                      <a:pPr indent="0" marL="0">
+                        <a:buNone/>
+                      </a:pPr>
+                      <a:r>
+                        <a:rPr lang="en-US" sz="1300" b="1" dirty="0">
+                          <a:solidFill>
+                            <a:schemeClr val="accent1"/>
+                          </a:solidFill>
+                          <a:latin typeface="+mn-lt" pitchFamily="34" charset="0"/>
+                          <a:ea typeface="+mn-lt" pitchFamily="34" charset="-122"/>
+                          <a:cs typeface="+mn-lt" pitchFamily="34" charset="-120"/>
+                        </a:rPr>
+                        <a:t>C  </a:t>
+                      </a:r>
+                      <a:pPr indent="0" marL="0">
+                        <a:buNone/>
+                      </a:pPr>
+                      <a:r>
+                        <a:rPr lang="en-US" sz="1300" b="1" dirty="0">
+                          <a:solidFill>
+                            <a:schemeClr val="tx2"/>
+                          </a:solidFill>
+                          <a:latin typeface="+mn-lt" pitchFamily="34" charset="0"/>
+                          <a:ea typeface="+mn-lt" pitchFamily="34" charset="-122"/>
+                          <a:cs typeface="+mn-lt" pitchFamily="34" charset="-120"/>
+                        </a:rPr>
+                        <a:t>Scoring</a:t>
+                      </a:r>
+                      <a:endParaRPr lang="en-US" sz="1300" dirty="0">
+                        <a:latin typeface="+mn-lt" charset="0"/>
+                        <a:ea typeface="+mn-lt" charset="0"/>
+                        <a:cs typeface="+mn-lt" charset="0"/>
+                      </a:endParaRPr>
+                    </a:p>
+                  </a:txBody>
+                  <a:tcPr marL="91440" marR="91440" marT="54864" marB="54864" anchor="ctr">
+                    <a:lnL w="0" cap="flat" cmpd="sng" algn="ctr">
+                      <a:noFill/>
+                    </a:lnL>
+                    <a:lnR w="0" cap="flat" cmpd="sng" algn="ctr">
+                      <a:noFill/>
+                    </a:lnR>
+                    <a:lnT w="0" cap="flat" cmpd="sng" algn="ctr">
+                      <a:noFill/>
+                    </a:lnT>
+                    <a:lnB w="0" cap="flat" cmpd="sng" algn="ctr">
+                      <a:noFill/>
+                    </a:lnB>
+                    <a:solidFill>
+                      <a:schemeClr val="bg1"/>
+                    </a:solidFill>
+                  </a:tcPr>
+                </a:tc>
+                <a:tc>
+                  <a:txBody>
+                    <a:bodyPr/>
+                    <a:lstStyle/>
+                    <a:p>
+                      <a:pPr indent="0" marL="0">
+                        <a:buNone/>
+                      </a:pPr>
+                      <a:r>
+                        <a:rPr lang="en-US" sz="1300" dirty="0">
+                          <a:solidFill>
+                            <a:schemeClr val="tx1"/>
+                          </a:solidFill>
+                          <a:latin typeface="+mn-lt" pitchFamily="34" charset="0"/>
+                          <a:ea typeface="+mn-lt" pitchFamily="34" charset="-122"/>
+                          <a:cs typeface="+mn-lt" pitchFamily="34" charset="-120"/>
+                        </a:rPr>
+                        <a:t>Per-run scorer; judge across runs; viewer that opens each anomaly</a:t>
+                      </a:r>
+                      <a:endParaRPr lang="en-US" sz="1300" dirty="0">
+                        <a:latin typeface="+mn-lt" charset="0"/>
+                        <a:ea typeface="+mn-lt" charset="0"/>
+                        <a:cs typeface="+mn-lt" charset="0"/>
+                      </a:endParaRPr>
+                    </a:p>
+                  </a:txBody>
+                  <a:tcPr marL="91440" marR="91440" marT="54864" marB="54864" anchor="ctr">
+                    <a:lnL w="0" cap="flat" cmpd="sng" algn="ctr">
+                      <a:noFill/>
+                    </a:lnL>
+                    <a:lnR w="0" cap="flat" cmpd="sng" algn="ctr">
+                      <a:noFill/>
+                    </a:lnR>
+                    <a:lnT w="0" cap="flat" cmpd="sng" algn="ctr">
+                      <a:noFill/>
+                    </a:lnT>
+                    <a:lnB w="0" cap="flat" cmpd="sng" algn="ctr">
+                      <a:noFill/>
+                    </a:lnB>
+                    <a:solidFill>
+                      <a:schemeClr val="bg1"/>
+                    </a:solidFill>
+                  </a:tcPr>
+                </a:tc>
+                <a:tc>
+                  <a:txBody>
+                    <a:bodyPr/>
+                    <a:lstStyle/>
+                    <a:p>
+                      <a:pPr indent="0" marL="0">
+                        <a:buNone/>
+                      </a:pPr>
+                      <a:r>
+                        <a:rPr lang="en-US" sz="1300" dirty="0">
+                          <a:solidFill>
+                            <a:schemeClr val="tx1"/>
+                          </a:solidFill>
+                          <a:latin typeface="+mn-lt" pitchFamily="34" charset="0"/>
+                          <a:ea typeface="+mn-lt" pitchFamily="34" charset="-122"/>
+                          <a:cs typeface="+mn-lt" pitchFamily="34" charset="-120"/>
+                        </a:rPr>
+                        <a:t>Judge report with working links to the evidence</a:t>
+                      </a:r>
+                      <a:endParaRPr lang="en-US" sz="1300" dirty="0">
+                        <a:latin typeface="+mn-lt" charset="0"/>
+                        <a:ea typeface="+mn-lt" charset="0"/>
+                        <a:cs typeface="+mn-lt" charset="0"/>
+                      </a:endParaRPr>
+                    </a:p>
+                  </a:txBody>
+                  <a:tcPr marL="91440" marR="91440" marT="54864" marB="54864" anchor="ctr">
+                    <a:lnL w="0" cap="flat" cmpd="sng" algn="ctr">
+                      <a:noFill/>
+                    </a:lnL>
+                    <a:lnR w="0" cap="flat" cmpd="sng" algn="ctr">
+                      <a:noFill/>
+                    </a:lnR>
+                    <a:lnT w="0" cap="flat" cmpd="sng" algn="ctr">
+                      <a:noFill/>
+                    </a:lnT>
+                    <a:lnB w="0" cap="flat" cmpd="sng" algn="ctr">
+                      <a:noFill/>
+                    </a:lnB>
+                    <a:solidFill>
+                      <a:schemeClr val="bg1"/>
+                    </a:solidFill>
+                  </a:tcPr>
+                </a:tc>
+                <a:tc>
+                  <a:txBody>
+                    <a:bodyPr/>
+                    <a:lstStyle/>
+                    <a:p>
+                      <a:pPr indent="0" marL="0">
+                        <a:buNone/>
+                      </a:pPr>
+                      <a:r>
+                        <a:rPr lang="en-US" sz="1300" dirty="0">
+                          <a:solidFill>
+                            <a:schemeClr val="accent3"/>
+                          </a:solidFill>
+                          <a:latin typeface="+mn-lt" pitchFamily="34" charset="0"/>
+                          <a:ea typeface="+mn-lt" pitchFamily="34" charset="-122"/>
+                          <a:cs typeface="+mn-lt" pitchFamily="34" charset="-120"/>
+                        </a:rPr>
+                        <a:t>Planned</a:t>
+                      </a:r>
+                      <a:endParaRPr lang="en-US" sz="1300" dirty="0">
+                        <a:latin typeface="+mn-lt" charset="0"/>
+                        <a:ea typeface="+mn-lt" charset="0"/>
+                        <a:cs typeface="+mn-lt" charset="0"/>
+                      </a:endParaRPr>
+                    </a:p>
+                  </a:txBody>
+                  <a:tcPr marL="91440" marR="91440" marT="54864" marB="54864" anchor="ctr">
+                    <a:lnL w="0" cap="flat" cmpd="sng" algn="ctr">
+                      <a:noFill/>
+                    </a:lnL>
+                    <a:lnR w="0" cap="flat" cmpd="sng" algn="ctr">
+                      <a:noFill/>
+                    </a:lnR>
+                    <a:lnT w="0" cap="flat" cmpd="sng" algn="ctr">
+                      <a:noFill/>
+                    </a:lnT>
+                    <a:lnB w="0" cap="flat" cmpd="sng" algn="ctr">
+                      <a:noFill/>
+                    </a:lnB>
+                    <a:solidFill>
+                      <a:schemeClr val="bg1"/>
+                    </a:solidFill>
+                  </a:tcPr>
+                </a:tc>
+              </a:tr>
+              <a:tr h="658368">
+                <a:tc>
+                  <a:txBody>
+                    <a:bodyPr/>
+                    <a:lstStyle/>
+                    <a:p>
+                      <a:pPr indent="0" marL="0">
+                        <a:buNone/>
+                      </a:pPr>
+                      <a:r>
+                        <a:rPr lang="en-US" sz="1300" b="1" dirty="0">
+                          <a:solidFill>
+                            <a:schemeClr val="accent1"/>
+                          </a:solidFill>
+                          <a:latin typeface="+mn-lt" pitchFamily="34" charset="0"/>
+                          <a:ea typeface="+mn-lt" pitchFamily="34" charset="-122"/>
+                          <a:cs typeface="+mn-lt" pitchFamily="34" charset="-120"/>
+                        </a:rPr>
+                        <a:t>D  </a:t>
+                      </a:r>
+                      <a:pPr indent="0" marL="0">
+                        <a:buNone/>
+                      </a:pPr>
+                      <a:r>
+                        <a:rPr lang="en-US" sz="1300" b="1" dirty="0">
+                          <a:solidFill>
+                            <a:schemeClr val="tx2"/>
+                          </a:solidFill>
+                          <a:latin typeface="+mn-lt" pitchFamily="34" charset="0"/>
+                          <a:ea typeface="+mn-lt" pitchFamily="34" charset="-122"/>
+                          <a:cs typeface="+mn-lt" pitchFamily="34" charset="-120"/>
+                        </a:rPr>
+                        <a:t>Digital twin</a:t>
+                      </a:r>
+                      <a:endParaRPr lang="en-US" sz="1300" dirty="0">
+                        <a:latin typeface="+mn-lt" charset="0"/>
+                        <a:ea typeface="+mn-lt" charset="0"/>
+                        <a:cs typeface="+mn-lt" charset="0"/>
+                      </a:endParaRPr>
+                    </a:p>
+                  </a:txBody>
+                  <a:tcPr marL="91440" marR="91440" marT="54864" marB="54864" anchor="ctr">
+                    <a:lnL w="0" cap="flat" cmpd="sng" algn="ctr">
+                      <a:noFill/>
+                    </a:lnL>
+                    <a:lnR w="0" cap="flat" cmpd="sng" algn="ctr">
+                      <a:noFill/>
+                    </a:lnR>
+                    <a:lnT w="0" cap="flat" cmpd="sng" algn="ctr">
+                      <a:noFill/>
+                    </a:lnT>
+                    <a:lnB w="0" cap="flat" cmpd="sng" algn="ctr">
+                      <a:noFill/>
+                    </a:lnB>
+                    <a:solidFill>
+                      <a:schemeClr val="bg2"/>
+                    </a:solidFill>
+                  </a:tcPr>
+                </a:tc>
+                <a:tc>
+                  <a:txBody>
+                    <a:bodyPr/>
+                    <a:lstStyle/>
+                    <a:p>
+                      <a:pPr indent="0" marL="0">
+                        <a:buNone/>
+                      </a:pPr>
+                      <a:r>
+                        <a:rPr lang="en-US" sz="1300" dirty="0">
+                          <a:solidFill>
+                            <a:schemeClr val="tx1"/>
+                          </a:solidFill>
+                          <a:latin typeface="+mn-lt" pitchFamily="34" charset="0"/>
+                          <a:ea typeface="+mn-lt" pitchFamily="34" charset="-122"/>
+                          <a:cs typeface="+mn-lt" pitchFamily="34" charset="-120"/>
+                        </a:rPr>
+                        <a:t>CLiFF course model; drug effects; complication events; simulated clock</a:t>
+                      </a:r>
+                      <a:endParaRPr lang="en-US" sz="1300" dirty="0">
+                        <a:latin typeface="+mn-lt" charset="0"/>
+                        <a:ea typeface="+mn-lt" charset="0"/>
+                        <a:cs typeface="+mn-lt" charset="0"/>
+                      </a:endParaRPr>
+                    </a:p>
+                  </a:txBody>
+                  <a:tcPr marL="91440" marR="91440" marT="54864" marB="54864" anchor="ctr">
+                    <a:lnL w="0" cap="flat" cmpd="sng" algn="ctr">
+                      <a:noFill/>
+                    </a:lnL>
+                    <a:lnR w="0" cap="flat" cmpd="sng" algn="ctr">
+                      <a:noFill/>
+                    </a:lnR>
+                    <a:lnT w="0" cap="flat" cmpd="sng" algn="ctr">
+                      <a:noFill/>
+                    </a:lnT>
+                    <a:lnB w="0" cap="flat" cmpd="sng" algn="ctr">
+                      <a:noFill/>
+                    </a:lnB>
+                    <a:solidFill>
+                      <a:schemeClr val="bg2"/>
+                    </a:solidFill>
+                  </a:tcPr>
+                </a:tc>
+                <a:tc>
+                  <a:txBody>
+                    <a:bodyPr/>
+                    <a:lstStyle/>
+                    <a:p>
+                      <a:pPr indent="0" marL="0">
+                        <a:buNone/>
+                      </a:pPr>
+                      <a:r>
+                        <a:rPr lang="en-US" sz="1300" dirty="0">
+                          <a:solidFill>
+                            <a:schemeClr val="tx1"/>
+                          </a:solidFill>
+                          <a:latin typeface="+mn-lt" pitchFamily="34" charset="0"/>
+                          <a:ea typeface="+mn-lt" pitchFamily="34" charset="-122"/>
+                          <a:cs typeface="+mn-lt" pitchFamily="34" charset="-120"/>
+                        </a:rPr>
+                        <a:t>Outcomes over many runs match the CLiFF</a:t>
+                      </a:r>
+                      <a:endParaRPr lang="en-US" sz="1300" dirty="0">
+                        <a:latin typeface="+mn-lt" charset="0"/>
+                        <a:ea typeface="+mn-lt" charset="0"/>
+                        <a:cs typeface="+mn-lt" charset="0"/>
+                      </a:endParaRPr>
+                    </a:p>
+                  </a:txBody>
+                  <a:tcPr marL="91440" marR="91440" marT="54864" marB="54864" anchor="ctr">
+                    <a:lnL w="0" cap="flat" cmpd="sng" algn="ctr">
+                      <a:noFill/>
+                    </a:lnL>
+                    <a:lnR w="0" cap="flat" cmpd="sng" algn="ctr">
+                      <a:noFill/>
+                    </a:lnR>
+                    <a:lnT w="0" cap="flat" cmpd="sng" algn="ctr">
+                      <a:noFill/>
+                    </a:lnT>
+                    <a:lnB w="0" cap="flat" cmpd="sng" algn="ctr">
+                      <a:noFill/>
+                    </a:lnB>
+                    <a:solidFill>
+                      <a:schemeClr val="bg2"/>
+                    </a:solidFill>
+                  </a:tcPr>
+                </a:tc>
+                <a:tc>
+                  <a:txBody>
+                    <a:bodyPr/>
+                    <a:lstStyle/>
+                    <a:p>
+                      <a:pPr indent="0" marL="0">
+                        <a:buNone/>
+                      </a:pPr>
+                      <a:r>
+                        <a:rPr lang="en-US" sz="1300" dirty="0">
+                          <a:solidFill>
+                            <a:schemeClr val="accent3"/>
+                          </a:solidFill>
+                          <a:latin typeface="+mn-lt" pitchFamily="34" charset="0"/>
+                          <a:ea typeface="+mn-lt" pitchFamily="34" charset="-122"/>
+                          <a:cs typeface="+mn-lt" pitchFamily="34" charset="-120"/>
+                        </a:rPr>
+                        <a:t>Planned</a:t>
+                      </a:r>
+                      <a:endParaRPr lang="en-US" sz="1300" dirty="0">
+                        <a:latin typeface="+mn-lt" charset="0"/>
+                        <a:ea typeface="+mn-lt" charset="0"/>
+                        <a:cs typeface="+mn-lt" charset="0"/>
+                      </a:endParaRPr>
+                    </a:p>
+                  </a:txBody>
+                  <a:tcPr marL="91440" marR="91440" marT="54864" marB="54864" anchor="ctr">
+                    <a:lnL w="0" cap="flat" cmpd="sng" algn="ctr">
+                      <a:noFill/>
+                    </a:lnL>
+                    <a:lnR w="0" cap="flat" cmpd="sng" algn="ctr">
+                      <a:noFill/>
+                    </a:lnR>
+                    <a:lnT w="0" cap="flat" cmpd="sng" algn="ctr">
+                      <a:noFill/>
+                    </a:lnT>
+                    <a:lnB w="0" cap="flat" cmpd="sng" algn="ctr">
+                      <a:noFill/>
+                    </a:lnB>
+                    <a:solidFill>
+                      <a:schemeClr val="bg2"/>
+                    </a:solidFill>
+                  </a:tcPr>
+                </a:tc>
+              </a:tr>
+              <a:tr h="658368">
+                <a:tc>
+                  <a:txBody>
+                    <a:bodyPr/>
+                    <a:lstStyle/>
+                    <a:p>
+                      <a:pPr indent="0" marL="0">
+                        <a:buNone/>
+                      </a:pPr>
+                      <a:r>
+                        <a:rPr lang="en-US" sz="1300" b="1" dirty="0">
+                          <a:solidFill>
+                            <a:schemeClr val="accent1"/>
+                          </a:solidFill>
+                          <a:latin typeface="+mn-lt" pitchFamily="34" charset="0"/>
+                          <a:ea typeface="+mn-lt" pitchFamily="34" charset="-122"/>
+                          <a:cs typeface="+mn-lt" pitchFamily="34" charset="-120"/>
+                        </a:rPr>
+                        <a:t>E  </a:t>
+                      </a:r>
+                      <a:pPr indent="0" marL="0">
+                        <a:buNone/>
+                      </a:pPr>
+                      <a:r>
+                        <a:rPr lang="en-US" sz="1300" b="1" dirty="0">
+                          <a:solidFill>
+                            <a:schemeClr val="tx2"/>
+                          </a:solidFill>
+                          <a:latin typeface="+mn-lt" pitchFamily="34" charset="0"/>
+                          <a:ea typeface="+mn-lt" pitchFamily="34" charset="-122"/>
+                          <a:cs typeface="+mn-lt" pitchFamily="34" charset="-120"/>
+                        </a:rPr>
+                        <a:t>Reports</a:t>
+                      </a:r>
+                      <a:endParaRPr lang="en-US" sz="1300" dirty="0">
+                        <a:latin typeface="+mn-lt" charset="0"/>
+                        <a:ea typeface="+mn-lt" charset="0"/>
+                        <a:cs typeface="+mn-lt" charset="0"/>
+                      </a:endParaRPr>
+                    </a:p>
+                  </a:txBody>
+                  <a:tcPr marL="91440" marR="91440" marT="54864" marB="54864" anchor="ctr">
+                    <a:lnL w="0" cap="flat" cmpd="sng" algn="ctr">
+                      <a:noFill/>
+                    </a:lnL>
+                    <a:lnR w="0" cap="flat" cmpd="sng" algn="ctr">
+                      <a:noFill/>
+                    </a:lnR>
+                    <a:lnT w="0" cap="flat" cmpd="sng" algn="ctr">
+                      <a:noFill/>
+                    </a:lnT>
+                    <a:lnB w="0" cap="flat" cmpd="sng" algn="ctr">
+                      <a:noFill/>
+                    </a:lnB>
+                    <a:solidFill>
+                      <a:schemeClr val="bg1"/>
+                    </a:solidFill>
+                  </a:tcPr>
+                </a:tc>
+                <a:tc>
+                  <a:txBody>
+                    <a:bodyPr/>
+                    <a:lstStyle/>
+                    <a:p>
+                      <a:pPr indent="0" marL="0">
+                        <a:buNone/>
+                      </a:pPr>
+                      <a:r>
+                        <a:rPr lang="en-US" sz="1300" dirty="0">
+                          <a:solidFill>
+                            <a:schemeClr val="tx1"/>
+                          </a:solidFill>
+                          <a:latin typeface="+mn-lt" pitchFamily="34" charset="0"/>
+                          <a:ea typeface="+mn-lt" pitchFamily="34" charset="-122"/>
+                          <a:cs typeface="+mn-lt" pitchFamily="34" charset="-120"/>
+                        </a:rPr>
+                        <a:t>Medical and technical reports; scorer checked against clerk scoring</a:t>
+                      </a:r>
+                      <a:endParaRPr lang="en-US" sz="1300" dirty="0">
+                        <a:latin typeface="+mn-lt" charset="0"/>
+                        <a:ea typeface="+mn-lt" charset="0"/>
+                        <a:cs typeface="+mn-lt" charset="0"/>
+                      </a:endParaRPr>
+                    </a:p>
+                  </a:txBody>
+                  <a:tcPr marL="91440" marR="91440" marT="54864" marB="54864" anchor="ctr">
+                    <a:lnL w="0" cap="flat" cmpd="sng" algn="ctr">
+                      <a:noFill/>
+                    </a:lnL>
+                    <a:lnR w="0" cap="flat" cmpd="sng" algn="ctr">
+                      <a:noFill/>
+                    </a:lnR>
+                    <a:lnT w="0" cap="flat" cmpd="sng" algn="ctr">
+                      <a:noFill/>
+                    </a:lnT>
+                    <a:lnB w="0" cap="flat" cmpd="sng" algn="ctr">
+                      <a:noFill/>
+                    </a:lnB>
+                    <a:solidFill>
+                      <a:schemeClr val="bg1"/>
+                    </a:solidFill>
+                  </a:tcPr>
+                </a:tc>
+                <a:tc>
+                  <a:txBody>
+                    <a:bodyPr/>
+                    <a:lstStyle/>
+                    <a:p>
+                      <a:pPr indent="0" marL="0">
+                        <a:buNone/>
+                      </a:pPr>
+                      <a:r>
+                        <a:rPr lang="en-US" sz="1300" dirty="0">
+                          <a:solidFill>
+                            <a:schemeClr val="tx1"/>
+                          </a:solidFill>
+                          <a:latin typeface="+mn-lt" pitchFamily="34" charset="0"/>
+                          <a:ea typeface="+mn-lt" pitchFamily="34" charset="-122"/>
+                          <a:cs typeface="+mn-lt" pitchFamily="34" charset="-120"/>
+                        </a:rPr>
+                        <a:t>Scorer–clerk agreement reported per item</a:t>
+                      </a:r>
+                      <a:endParaRPr lang="en-US" sz="1300" dirty="0">
+                        <a:latin typeface="+mn-lt" charset="0"/>
+                        <a:ea typeface="+mn-lt" charset="0"/>
+                        <a:cs typeface="+mn-lt" charset="0"/>
+                      </a:endParaRPr>
+                    </a:p>
+                  </a:txBody>
+                  <a:tcPr marL="91440" marR="91440" marT="54864" marB="54864" anchor="ctr">
+                    <a:lnL w="0" cap="flat" cmpd="sng" algn="ctr">
+                      <a:noFill/>
+                    </a:lnL>
+                    <a:lnR w="0" cap="flat" cmpd="sng" algn="ctr">
+                      <a:noFill/>
+                    </a:lnR>
+                    <a:lnT w="0" cap="flat" cmpd="sng" algn="ctr">
+                      <a:noFill/>
+                    </a:lnT>
+                    <a:lnB w="0" cap="flat" cmpd="sng" algn="ctr">
+                      <a:noFill/>
+                    </a:lnB>
+                    <a:solidFill>
+                      <a:schemeClr val="bg1"/>
+                    </a:solidFill>
+                  </a:tcPr>
+                </a:tc>
+                <a:tc>
+                  <a:txBody>
+                    <a:bodyPr/>
+                    <a:lstStyle/>
+                    <a:p>
+                      <a:pPr indent="0" marL="0">
+                        <a:buNone/>
+                      </a:pPr>
+                      <a:r>
+                        <a:rPr lang="en-US" sz="1300" dirty="0">
+                          <a:solidFill>
+                            <a:schemeClr val="accent3"/>
+                          </a:solidFill>
+                          <a:latin typeface="+mn-lt" pitchFamily="34" charset="0"/>
+                          <a:ea typeface="+mn-lt" pitchFamily="34" charset="-122"/>
+                          <a:cs typeface="+mn-lt" pitchFamily="34" charset="-120"/>
+                        </a:rPr>
+                        <a:t>Planned</a:t>
+                      </a:r>
+                      <a:endParaRPr lang="en-US" sz="1300" dirty="0">
+                        <a:latin typeface="+mn-lt" charset="0"/>
+                        <a:ea typeface="+mn-lt" charset="0"/>
+                        <a:cs typeface="+mn-lt" charset="0"/>
+                      </a:endParaRPr>
+                    </a:p>
+                  </a:txBody>
+                  <a:tcPr marL="91440" marR="91440" marT="54864" marB="54864" anchor="ctr">
+                    <a:lnL w="0" cap="flat" cmpd="sng" algn="ctr">
+                      <a:noFill/>
+                    </a:lnL>
+                    <a:lnR w="0" cap="flat" cmpd="sng" algn="ctr">
+                      <a:noFill/>
+                    </a:lnR>
+                    <a:lnT w="0" cap="flat" cmpd="sng" algn="ctr">
+                      <a:noFill/>
+                    </a:lnT>
+                    <a:lnB w="0" cap="flat" cmpd="sng" algn="ctr">
+                      <a:noFill/>
+                    </a:lnB>
+                    <a:solidFill>
+                      <a:schemeClr val="bg1"/>
+                    </a:solidFill>
+                  </a:tcPr>
+                </a:tc>
+              </a:tr>
+            </a:tbl>
+          </a:graphicData>
+        </a:graphic>
+      </p:graphicFrame>
+      <p:sp>
+        <p:nvSpPr>
+          <p:cNvPr id="4" name="Plan note"/>
+          <p:cNvSpPr txBox="1"/>
+          <p:nvPr/>
+        </p:nvSpPr>
+        <p:spPr>
+          <a:xfrm>
+            <a:off x="548640" y="5760720"/>
+            <a:ext cx="11064240" cy="365760"/>
+          </a:xfrm>
+          <a:prstGeom prst="rect">
+            <a:avLst/>
+          </a:prstGeom>
+          <a:noFill/>
+          <a:ln/>
+        </p:spPr>
+        <p:txBody>
+          <a:bodyPr wrap="square" lIns="0" tIns="0" rIns="0" bIns="0" rtlCol="0" anchor="t"/>
+          <a:lstStyle/>
+          <a:p>
+            <a:pPr indent="0" marL="0">
+              <a:buNone/>
+            </a:pPr>
+            <a:r>
+              <a:rPr lang="en-US" sz="1400" dirty="0">
+                <a:solidFill>
+                  <a:schemeClr val="accent3"/>
+                </a:solidFill>
+              </a:rPr>
+              <a:t>B and C run on a simple, static twin first, so scoring can be tested early; D then swaps in the full physiology model.</a:t>
+            </a:r>
+            <a:endParaRPr lang="en-US" sz="1400" dirty="0"/>
+          </a:p>
+        </p:txBody>
+      </p:sp>
+      <p:sp>
+        <p:nvSpPr>
+          <p:cNvPr id="25" name="Slide Number Placeholder 0"/>
+          <p:cNvSpPr>
+            <a:spLocks noGrp="1"/>
+          </p:cNvSpPr>
+          <p:nvPr>
+            <p:ph type="sldNum" sz="quarter" idx="4294967295"/>
+          </p:nvPr>
+        </p:nvSpPr>
+        <p:spPr>
+          <a:xfrm>
+            <a:off x="11155680" y="6400800"/>
+            <a:ext cx="457200" cy="274320"/>
+          </a:xfrm>
+          <a:prstGeom prst="rect">
+            <a:avLst/>
+          </a:prstGeom>
+          <a:extLst>
+            <a:ext uri="{C572A759-6A51-4108-AA02-DFA0A04FC94B}">
+              <ma14:wrappingTextBoxFlag xmlns:ma14="http://schemas.microsoft.com/office/mac/drawingml/2011/main" val="0"/>
+            </a:ext>
+          </a:extLst>
+        </p:spPr>
+        <p:txBody>
+          <a:bodyPr/>
+          <a:lstStyle>
+            <a:lvl1pPr>
+              <a:defRPr sz="1000">
+                <a:solidFill>
+                  <a:schemeClr val="accent2"/>
+                </a:solidFill>
+              </a:defRPr>
+            </a:lvl1pPr>
+          </a:lstStyle>
+          <a:p>
+            <a:pPr algn="r"/>
+            <a:fld id="{F7021451-1387-4CA6-816F-3879F97B5CBC}" type="slidenum">
+              <a:rPr b="0" lang="en-US"/>
+              <a:t>8</a:t>
+            </a:fld>
+            <a:endParaRPr lang="en-US"/>
+          </a:p>
+        </p:txBody>
+      </p:sp>
+    </p:spTree>
+  </p:cSld>
+  <p:clrMapOvr>
+    <a:masterClrMapping/>
+  </p:clrMapOvr>
+</p:sld>
+</file>
+
+<file path=ppt/slides/slide9.xml><?xml version="1.0" encoding="utf-8"?>
+<p:sld xmlns:a="http://schemas.openxmlformats.org/drawingml/2006/main" xmlns:r="http://schemas.openxmlformats.org/officeDocument/2006/relationships" xmlns:p="http://schemas.openxmlformats.org/presentationml/2006/main">
+  <p:cSld name="Slide 9">
+    <p:spTree>
+      <p:nvGrpSpPr>
+        <p:cNvPr id="1" name=""/>
+        <p:cNvGrpSpPr/>
+        <p:nvPr/>
+      </p:nvGrpSpPr>
+      <p:grpSpPr>
+        <a:xfrm>
+          <a:off x="0" y="0"/>
+          <a:ext cx="0" cy="0"/>
+          <a:chOff x="0" y="0"/>
+          <a:chExt cx="0" cy="0"/>
+        </a:xfrm>
+      </p:grpSpPr>
+      <p:sp>
+        <p:nvSpPr>
+          <p:cNvPr id="2" name="Text 0"/>
+          <p:cNvSpPr/>
+          <p:nvPr>
+            <p:ph idx="100" type="title" hasCustomPrompt="1"/>
+          </p:nvPr>
+        </p:nvSpPr>
+        <p:spPr>
+          <a:xfrm>
+            <a:off x="548640" y="320040"/>
+            <a:ext cx="11064240" cy="822960"/>
+          </a:xfrm>
+          <a:prstGeom prst="rect">
+            <a:avLst/>
+          </a:prstGeom>
+          <a:noFill/>
+          <a:ln/>
+        </p:spPr>
+        <p:txBody>
+          <a:bodyPr wrap="square" lIns="0" tIns="0" rIns="0" bIns="0" rtlCol="0" anchor="ctr"/>
+          <a:lstStyle/>
+          <a:p>
+            <a:pPr algn="l" indent="0" marL="0">
+              <a:buNone/>
+            </a:pPr>
+            <a:r>
+              <a:rPr lang="en-US" sz="3400" b="1" dirty="0">
+                <a:solidFill>
                   <a:schemeClr val="bg1"/>
                 </a:solidFill>
               </a:rPr>
-              <a:t>Phase A is built; the simulator is next</a:t>
+              <a:t>What we need to keep moving</a:t>
             </a:r>
             <a:endParaRPr lang="en-US" sz="3400" dirty="0"/>
           </a:p>
@@ -8353,16 +10726,38 @@
       </p:sp>
       <p:sp>
         <p:nvSpPr>
-          <p:cNvPr id="3" name="Phase A"/>
+          <p:cNvPr id="3" name="Ask 1 card"/>
           <p:cNvSpPr/>
           <p:nvPr/>
         </p:nvSpPr>
         <p:spPr>
           <a:xfrm>
             <a:off x="548640" y="1463040"/>
-            <a:ext cx="1938528" cy="777240"/>
-          </a:xfrm>
-          <a:prstGeom prst="homePlate">
+            <a:ext cx="2651760" cy="3154680"/>
+          </a:xfrm>
+          <a:prstGeom prst="roundRect">
+            <a:avLst>
+              <a:gd name="adj" fmla="val 2759"/>
+            </a:avLst>
+          </a:prstGeom>
+          <a:solidFill>
+            <a:schemeClr val="accent6"/>
+          </a:solidFill>
+          <a:ln/>
+        </p:spPr>
+      </p:sp>
+      <p:sp>
+        <p:nvSpPr>
+          <p:cNvPr id="4" name="Ask 1 circle"/>
+          <p:cNvSpPr/>
+          <p:nvPr/>
+        </p:nvSpPr>
+        <p:spPr>
+          <a:xfrm>
+            <a:off x="822960" y="1783080"/>
+            <a:ext cx="868680" cy="868680"/>
+          </a:xfrm>
+          <a:prstGeom prst="ellipse">
             <a:avLst/>
           </a:prstGeom>
           <a:solidFill>
@@ -8370,706 +10765,10 @@
           </a:solidFill>
           <a:ln/>
         </p:spPr>
-        <p:txBody>
-          <a:bodyPr wrap="square" lIns="0" tIns="0" rIns="0" bIns="0" rtlCol="0" anchor="ctr"/>
-          <a:lstStyle/>
-          <a:p>
-            <a:pPr algn="ctr" indent="0" marL="0">
-              <a:buNone/>
-            </a:pPr>
-            <a:r>
-              <a:rPr lang="en-US" sz="1800" b="1" dirty="0">
-                <a:solidFill>
-                  <a:schemeClr val="bg1"/>
-                </a:solidFill>
-                <a:latin typeface="+mj-lt" pitchFamily="34" charset="0"/>
-                <a:ea typeface="+mj-lt" pitchFamily="34" charset="-122"/>
-                <a:cs typeface="+mj-lt" pitchFamily="34" charset="-120"/>
-              </a:rPr>
-              <a:t>A</a:t>
-            </a:r>
-            <a:endParaRPr lang="en-US" sz="1800" dirty="0"/>
-          </a:p>
-        </p:txBody>
-      </p:sp>
-      <p:sp>
-        <p:nvSpPr>
-          <p:cNvPr id="4" name="Phase A title"/>
-          <p:cNvSpPr txBox="1"/>
-          <p:nvPr/>
-        </p:nvSpPr>
-        <p:spPr>
-          <a:xfrm>
-            <a:off x="685800" y="2423160"/>
-            <a:ext cx="1645920" cy="365760"/>
-          </a:xfrm>
-          <a:prstGeom prst="rect">
-            <a:avLst/>
-          </a:prstGeom>
-          <a:noFill/>
-          <a:ln/>
-        </p:spPr>
-        <p:txBody>
-          <a:bodyPr wrap="square" lIns="0" tIns="0" rIns="0" bIns="0" rtlCol="0" anchor="t"/>
-          <a:lstStyle/>
-          <a:p>
-            <a:pPr indent="0" marL="0">
-              <a:buNone/>
-            </a:pPr>
-            <a:r>
-              <a:rPr lang="en-US" sz="1600" b="1" dirty="0">
-                <a:solidFill>
-                  <a:schemeClr val="accent1"/>
-                </a:solidFill>
-                <a:latin typeface="+mj-lt" pitchFamily="34" charset="0"/>
-                <a:ea typeface="+mj-lt" pitchFamily="34" charset="-122"/>
-                <a:cs typeface="+mj-lt" pitchFamily="34" charset="-120"/>
-              </a:rPr>
-              <a:t>Authoring</a:t>
-            </a:r>
-            <a:endParaRPr lang="en-US" sz="1600" dirty="0"/>
-          </a:p>
-        </p:txBody>
-      </p:sp>
-      <p:sp>
-        <p:nvSpPr>
-          <p:cNvPr id="5" name="Phase A text"/>
-          <p:cNvSpPr txBox="1"/>
-          <p:nvPr/>
-        </p:nvSpPr>
-        <p:spPr>
-          <a:xfrm>
-            <a:off x="685800" y="2834640"/>
-            <a:ext cx="1645920" cy="1005840"/>
-          </a:xfrm>
-          <a:prstGeom prst="rect">
-            <a:avLst/>
-          </a:prstGeom>
-          <a:noFill/>
-          <a:ln/>
-        </p:spPr>
-        <p:txBody>
-          <a:bodyPr wrap="square" lIns="0" tIns="0" rIns="0" bIns="0" rtlCol="0" anchor="t"/>
-          <a:lstStyle/>
-          <a:p>
-            <a:pPr indent="0" marL="0">
-              <a:buNone/>
-            </a:pPr>
-            <a:r>
-              <a:rPr lang="en-US" sz="1400" dirty="0">
-                <a:solidFill>
-                  <a:schemeClr val="accent4"/>
-                </a:solidFill>
-              </a:rPr>
-              <a:t>Formats, NASA library, Scenario Builder, clerk guide</a:t>
-            </a:r>
-            <a:endParaRPr lang="en-US" sz="1400" dirty="0"/>
-          </a:p>
-        </p:txBody>
-      </p:sp>
-      <p:sp>
-        <p:nvSpPr>
-          <p:cNvPr id="6" name="Phase A5–7"/>
-          <p:cNvSpPr/>
-          <p:nvPr/>
-        </p:nvSpPr>
-        <p:spPr>
-          <a:xfrm>
-            <a:off x="2395728" y="1463040"/>
-            <a:ext cx="1938528" cy="777240"/>
-          </a:xfrm>
-          <a:prstGeom prst="chevron">
-            <a:avLst/>
-          </a:prstGeom>
-          <a:solidFill>
-            <a:schemeClr val="accent6"/>
-          </a:solidFill>
-          <a:ln/>
-        </p:spPr>
-        <p:txBody>
-          <a:bodyPr wrap="square" lIns="0" tIns="0" rIns="0" bIns="0" rtlCol="0" anchor="ctr"/>
-          <a:lstStyle/>
-          <a:p>
-            <a:pPr algn="ctr" indent="0" marL="0">
-              <a:buNone/>
-            </a:pPr>
-            <a:r>
-              <a:rPr lang="en-US" sz="1800" b="1" dirty="0">
-                <a:solidFill>
-                  <a:schemeClr val="bg1"/>
-                </a:solidFill>
-                <a:latin typeface="+mj-lt" pitchFamily="34" charset="0"/>
-                <a:ea typeface="+mj-lt" pitchFamily="34" charset="-122"/>
-                <a:cs typeface="+mj-lt" pitchFamily="34" charset="-120"/>
-              </a:rPr>
-              <a:t>A5–7</a:t>
-            </a:r>
-            <a:endParaRPr lang="en-US" sz="1800" dirty="0"/>
-          </a:p>
-        </p:txBody>
-      </p:sp>
-      <p:sp>
-        <p:nvSpPr>
-          <p:cNvPr id="7" name="Phase A5–7 title"/>
-          <p:cNvSpPr txBox="1"/>
-          <p:nvPr/>
-        </p:nvSpPr>
-        <p:spPr>
-          <a:xfrm>
-            <a:off x="2532888" y="2423160"/>
-            <a:ext cx="1645920" cy="365760"/>
-          </a:xfrm>
-          <a:prstGeom prst="rect">
-            <a:avLst/>
-          </a:prstGeom>
-          <a:noFill/>
-          <a:ln/>
-        </p:spPr>
-        <p:txBody>
-          <a:bodyPr wrap="square" lIns="0" tIns="0" rIns="0" bIns="0" rtlCol="0" anchor="t"/>
-          <a:lstStyle/>
-          <a:p>
-            <a:pPr indent="0" marL="0">
-              <a:buNone/>
-            </a:pPr>
-            <a:r>
-              <a:rPr lang="en-US" sz="1600" b="1" dirty="0">
-                <a:solidFill>
-                  <a:schemeClr val="bg1"/>
-                </a:solidFill>
-                <a:latin typeface="+mj-lt" pitchFamily="34" charset="0"/>
-                <a:ea typeface="+mj-lt" pitchFamily="34" charset="-122"/>
-                <a:cs typeface="+mj-lt" pitchFamily="34" charset="-120"/>
-              </a:rPr>
-              <a:t>Clerk round 2</a:t>
-            </a:r>
-            <a:endParaRPr lang="en-US" sz="1600" dirty="0"/>
-          </a:p>
-        </p:txBody>
-      </p:sp>
-      <p:sp>
-        <p:nvSpPr>
-          <p:cNvPr id="8" name="Phase A5–7 text"/>
-          <p:cNvSpPr txBox="1"/>
-          <p:nvPr/>
-        </p:nvSpPr>
-        <p:spPr>
-          <a:xfrm>
-            <a:off x="2532888" y="2834640"/>
-            <a:ext cx="1645920" cy="1005840"/>
-          </a:xfrm>
-          <a:prstGeom prst="rect">
-            <a:avLst/>
-          </a:prstGeom>
-          <a:noFill/>
-          <a:ln/>
-        </p:spPr>
-        <p:txBody>
-          <a:bodyPr wrap="square" lIns="0" tIns="0" rIns="0" bIns="0" rtlCol="0" anchor="t"/>
-          <a:lstStyle/>
-          <a:p>
-            <a:pPr indent="0" marL="0">
-              <a:buNone/>
-            </a:pPr>
-            <a:r>
-              <a:rPr lang="en-US" sz="1400" dirty="0">
-                <a:solidFill>
-                  <a:schemeClr val="accent4"/>
-                </a:solidFill>
-              </a:rPr>
-              <a:t>Triage cases, manual scoring sheet</a:t>
-            </a:r>
-            <a:endParaRPr lang="en-US" sz="1400" dirty="0"/>
-          </a:p>
-        </p:txBody>
-      </p:sp>
-      <p:sp>
-        <p:nvSpPr>
-          <p:cNvPr id="9" name="Phase B"/>
-          <p:cNvSpPr/>
-          <p:nvPr/>
-        </p:nvSpPr>
-        <p:spPr>
-          <a:xfrm>
-            <a:off x="4242816" y="1463040"/>
-            <a:ext cx="1938528" cy="777240"/>
-          </a:xfrm>
-          <a:prstGeom prst="chevron">
-            <a:avLst/>
-          </a:prstGeom>
-          <a:solidFill>
-            <a:schemeClr val="accent6"/>
-          </a:solidFill>
-          <a:ln/>
-        </p:spPr>
-        <p:txBody>
-          <a:bodyPr wrap="square" lIns="0" tIns="0" rIns="0" bIns="0" rtlCol="0" anchor="ctr"/>
-          <a:lstStyle/>
-          <a:p>
-            <a:pPr algn="ctr" indent="0" marL="0">
-              <a:buNone/>
-            </a:pPr>
-            <a:r>
-              <a:rPr lang="en-US" sz="1800" b="1" dirty="0">
-                <a:solidFill>
-                  <a:schemeClr val="bg1"/>
-                </a:solidFill>
-                <a:latin typeface="+mj-lt" pitchFamily="34" charset="0"/>
-                <a:ea typeface="+mj-lt" pitchFamily="34" charset="-122"/>
-                <a:cs typeface="+mj-lt" pitchFamily="34" charset="-120"/>
-              </a:rPr>
-              <a:t>B</a:t>
-            </a:r>
-            <a:endParaRPr lang="en-US" sz="1800" dirty="0"/>
-          </a:p>
-        </p:txBody>
-      </p:sp>
-      <p:sp>
-        <p:nvSpPr>
-          <p:cNvPr id="10" name="Phase B title"/>
-          <p:cNvSpPr txBox="1"/>
-          <p:nvPr/>
-        </p:nvSpPr>
-        <p:spPr>
-          <a:xfrm>
-            <a:off x="4379976" y="2423160"/>
-            <a:ext cx="1645920" cy="365760"/>
-          </a:xfrm>
-          <a:prstGeom prst="rect">
-            <a:avLst/>
-          </a:prstGeom>
-          <a:noFill/>
-          <a:ln/>
-        </p:spPr>
-        <p:txBody>
-          <a:bodyPr wrap="square" lIns="0" tIns="0" rIns="0" bIns="0" rtlCol="0" anchor="t"/>
-          <a:lstStyle/>
-          <a:p>
-            <a:pPr indent="0" marL="0">
-              <a:buNone/>
-            </a:pPr>
-            <a:r>
-              <a:rPr lang="en-US" sz="1600" b="1" dirty="0">
-                <a:solidFill>
-                  <a:schemeClr val="bg1"/>
-                </a:solidFill>
-                <a:latin typeface="+mj-lt" pitchFamily="34" charset="0"/>
-                <a:ea typeface="+mj-lt" pitchFamily="34" charset="-122"/>
-                <a:cs typeface="+mj-lt" pitchFamily="34" charset="-120"/>
-              </a:rPr>
-              <a:t>Runner</a:t>
-            </a:r>
-            <a:endParaRPr lang="en-US" sz="1600" dirty="0"/>
-          </a:p>
-        </p:txBody>
-      </p:sp>
-      <p:sp>
-        <p:nvSpPr>
-          <p:cNvPr id="11" name="Phase B text"/>
-          <p:cNvSpPr txBox="1"/>
-          <p:nvPr/>
-        </p:nvSpPr>
-        <p:spPr>
-          <a:xfrm>
-            <a:off x="4379976" y="2834640"/>
-            <a:ext cx="1645920" cy="1005840"/>
-          </a:xfrm>
-          <a:prstGeom prst="rect">
-            <a:avLst/>
-          </a:prstGeom>
-          <a:noFill/>
-          <a:ln/>
-        </p:spPr>
-        <p:txBody>
-          <a:bodyPr wrap="square" lIns="0" tIns="0" rIns="0" bIns="0" rtlCol="0" anchor="t"/>
-          <a:lstStyle/>
-          <a:p>
-            <a:pPr indent="0" marL="0">
-              <a:buNone/>
-            </a:pPr>
-            <a:r>
-              <a:rPr lang="en-US" sz="1400" dirty="0">
-                <a:solidFill>
-                  <a:schemeClr val="accent4"/>
-                </a:solidFill>
-              </a:rPr>
-              <a:t>Any assistant, end to end, on the laptop</a:t>
-            </a:r>
-            <a:endParaRPr lang="en-US" sz="1400" dirty="0"/>
-          </a:p>
-        </p:txBody>
-      </p:sp>
-      <p:sp>
-        <p:nvSpPr>
-          <p:cNvPr id="12" name="Phase C"/>
-          <p:cNvSpPr/>
-          <p:nvPr/>
-        </p:nvSpPr>
-        <p:spPr>
-          <a:xfrm>
-            <a:off x="6089904" y="1463040"/>
-            <a:ext cx="1938528" cy="777240"/>
-          </a:xfrm>
-          <a:prstGeom prst="chevron">
-            <a:avLst/>
-          </a:prstGeom>
-          <a:solidFill>
-            <a:schemeClr val="accent6"/>
-          </a:solidFill>
-          <a:ln/>
-        </p:spPr>
-        <p:txBody>
-          <a:bodyPr wrap="square" lIns="0" tIns="0" rIns="0" bIns="0" rtlCol="0" anchor="ctr"/>
-          <a:lstStyle/>
-          <a:p>
-            <a:pPr algn="ctr" indent="0" marL="0">
-              <a:buNone/>
-            </a:pPr>
-            <a:r>
-              <a:rPr lang="en-US" sz="1800" b="1" dirty="0">
-                <a:solidFill>
-                  <a:schemeClr val="bg1"/>
-                </a:solidFill>
-                <a:latin typeface="+mj-lt" pitchFamily="34" charset="0"/>
-                <a:ea typeface="+mj-lt" pitchFamily="34" charset="-122"/>
-                <a:cs typeface="+mj-lt" pitchFamily="34" charset="-120"/>
-              </a:rPr>
-              <a:t>C</a:t>
-            </a:r>
-            <a:endParaRPr lang="en-US" sz="1800" dirty="0"/>
-          </a:p>
-        </p:txBody>
-      </p:sp>
-      <p:sp>
-        <p:nvSpPr>
-          <p:cNvPr id="13" name="Phase C title"/>
-          <p:cNvSpPr txBox="1"/>
-          <p:nvPr/>
-        </p:nvSpPr>
-        <p:spPr>
-          <a:xfrm>
-            <a:off x="6227064" y="2423160"/>
-            <a:ext cx="1645920" cy="365760"/>
-          </a:xfrm>
-          <a:prstGeom prst="rect">
-            <a:avLst/>
-          </a:prstGeom>
-          <a:noFill/>
-          <a:ln/>
-        </p:spPr>
-        <p:txBody>
-          <a:bodyPr wrap="square" lIns="0" tIns="0" rIns="0" bIns="0" rtlCol="0" anchor="t"/>
-          <a:lstStyle/>
-          <a:p>
-            <a:pPr indent="0" marL="0">
-              <a:buNone/>
-            </a:pPr>
-            <a:r>
-              <a:rPr lang="en-US" sz="1600" b="1" dirty="0">
-                <a:solidFill>
-                  <a:schemeClr val="bg1"/>
-                </a:solidFill>
-                <a:latin typeface="+mj-lt" pitchFamily="34" charset="0"/>
-                <a:ea typeface="+mj-lt" pitchFamily="34" charset="-122"/>
-                <a:cs typeface="+mj-lt" pitchFamily="34" charset="-120"/>
-              </a:rPr>
-              <a:t>Scoring</a:t>
-            </a:r>
-            <a:endParaRPr lang="en-US" sz="1600" dirty="0"/>
-          </a:p>
-        </p:txBody>
-      </p:sp>
-      <p:sp>
-        <p:nvSpPr>
-          <p:cNvPr id="14" name="Phase C text"/>
-          <p:cNvSpPr txBox="1"/>
-          <p:nvPr/>
-        </p:nvSpPr>
-        <p:spPr>
-          <a:xfrm>
-            <a:off x="6227064" y="2834640"/>
-            <a:ext cx="1645920" cy="1005840"/>
-          </a:xfrm>
-          <a:prstGeom prst="rect">
-            <a:avLst/>
-          </a:prstGeom>
-          <a:noFill/>
-          <a:ln/>
-        </p:spPr>
-        <p:txBody>
-          <a:bodyPr wrap="square" lIns="0" tIns="0" rIns="0" bIns="0" rtlCol="0" anchor="t"/>
-          <a:lstStyle/>
-          <a:p>
-            <a:pPr indent="0" marL="0">
-              <a:buNone/>
-            </a:pPr>
-            <a:r>
-              <a:rPr lang="en-US" sz="1400" dirty="0">
-                <a:solidFill>
-                  <a:schemeClr val="accent4"/>
-                </a:solidFill>
-              </a:rPr>
-              <a:t>Scorer, judge and a viewer for each anomaly</a:t>
-            </a:r>
-            <a:endParaRPr lang="en-US" sz="1400" dirty="0"/>
-          </a:p>
-        </p:txBody>
-      </p:sp>
-      <p:sp>
-        <p:nvSpPr>
-          <p:cNvPr id="15" name="Phase D"/>
-          <p:cNvSpPr/>
-          <p:nvPr/>
-        </p:nvSpPr>
-        <p:spPr>
-          <a:xfrm>
-            <a:off x="7936992" y="1463040"/>
-            <a:ext cx="1938528" cy="777240"/>
-          </a:xfrm>
-          <a:prstGeom prst="chevron">
-            <a:avLst/>
-          </a:prstGeom>
-          <a:solidFill>
-            <a:schemeClr val="accent6"/>
-          </a:solidFill>
-          <a:ln/>
-        </p:spPr>
-        <p:txBody>
-          <a:bodyPr wrap="square" lIns="0" tIns="0" rIns="0" bIns="0" rtlCol="0" anchor="ctr"/>
-          <a:lstStyle/>
-          <a:p>
-            <a:pPr algn="ctr" indent="0" marL="0">
-              <a:buNone/>
-            </a:pPr>
-            <a:r>
-              <a:rPr lang="en-US" sz="1800" b="1" dirty="0">
-                <a:solidFill>
-                  <a:schemeClr val="bg1"/>
-                </a:solidFill>
-                <a:latin typeface="+mj-lt" pitchFamily="34" charset="0"/>
-                <a:ea typeface="+mj-lt" pitchFamily="34" charset="-122"/>
-                <a:cs typeface="+mj-lt" pitchFamily="34" charset="-120"/>
-              </a:rPr>
-              <a:t>D</a:t>
-            </a:r>
-            <a:endParaRPr lang="en-US" sz="1800" dirty="0"/>
-          </a:p>
-        </p:txBody>
-      </p:sp>
-      <p:sp>
-        <p:nvSpPr>
-          <p:cNvPr id="16" name="Phase D title"/>
-          <p:cNvSpPr txBox="1"/>
-          <p:nvPr/>
-        </p:nvSpPr>
-        <p:spPr>
-          <a:xfrm>
-            <a:off x="8074152" y="2423160"/>
-            <a:ext cx="1645920" cy="365760"/>
-          </a:xfrm>
-          <a:prstGeom prst="rect">
-            <a:avLst/>
-          </a:prstGeom>
-          <a:noFill/>
-          <a:ln/>
-        </p:spPr>
-        <p:txBody>
-          <a:bodyPr wrap="square" lIns="0" tIns="0" rIns="0" bIns="0" rtlCol="0" anchor="t"/>
-          <a:lstStyle/>
-          <a:p>
-            <a:pPr indent="0" marL="0">
-              <a:buNone/>
-            </a:pPr>
-            <a:r>
-              <a:rPr lang="en-US" sz="1600" b="1" dirty="0">
-                <a:solidFill>
-                  <a:schemeClr val="bg1"/>
-                </a:solidFill>
-                <a:latin typeface="+mj-lt" pitchFamily="34" charset="0"/>
-                <a:ea typeface="+mj-lt" pitchFamily="34" charset="-122"/>
-                <a:cs typeface="+mj-lt" pitchFamily="34" charset="-120"/>
-              </a:rPr>
-              <a:t>Digital twin</a:t>
-            </a:r>
-            <a:endParaRPr lang="en-US" sz="1600" dirty="0"/>
-          </a:p>
-        </p:txBody>
-      </p:sp>
-      <p:sp>
-        <p:nvSpPr>
-          <p:cNvPr id="17" name="Phase D text"/>
-          <p:cNvSpPr txBox="1"/>
-          <p:nvPr/>
-        </p:nvSpPr>
-        <p:spPr>
-          <a:xfrm>
-            <a:off x="8074152" y="2834640"/>
-            <a:ext cx="1645920" cy="1005840"/>
-          </a:xfrm>
-          <a:prstGeom prst="rect">
-            <a:avLst/>
-          </a:prstGeom>
-          <a:noFill/>
-          <a:ln/>
-        </p:spPr>
-        <p:txBody>
-          <a:bodyPr wrap="square" lIns="0" tIns="0" rIns="0" bIns="0" rtlCol="0" anchor="t"/>
-          <a:lstStyle/>
-          <a:p>
-            <a:pPr indent="0" marL="0">
-              <a:buNone/>
-            </a:pPr>
-            <a:r>
-              <a:rPr lang="en-US" sz="1400" dirty="0">
-                <a:solidFill>
-                  <a:schemeClr val="accent4"/>
-                </a:solidFill>
-              </a:rPr>
-              <a:t>CLiFF courses, drug effects, mission events</a:t>
-            </a:r>
-            <a:endParaRPr lang="en-US" sz="1400" dirty="0"/>
-          </a:p>
-        </p:txBody>
-      </p:sp>
-      <p:sp>
-        <p:nvSpPr>
-          <p:cNvPr id="18" name="Phase E"/>
-          <p:cNvSpPr/>
-          <p:nvPr/>
-        </p:nvSpPr>
-        <p:spPr>
-          <a:xfrm>
-            <a:off x="9784080" y="1463040"/>
-            <a:ext cx="1938528" cy="777240"/>
-          </a:xfrm>
-          <a:prstGeom prst="chevron">
-            <a:avLst/>
-          </a:prstGeom>
-          <a:solidFill>
-            <a:schemeClr val="accent6"/>
-          </a:solidFill>
-          <a:ln/>
-        </p:spPr>
-        <p:txBody>
-          <a:bodyPr wrap="square" lIns="0" tIns="0" rIns="0" bIns="0" rtlCol="0" anchor="ctr"/>
-          <a:lstStyle/>
-          <a:p>
-            <a:pPr algn="ctr" indent="0" marL="0">
-              <a:buNone/>
-            </a:pPr>
-            <a:r>
-              <a:rPr lang="en-US" sz="1800" b="1" dirty="0">
-                <a:solidFill>
-                  <a:schemeClr val="bg1"/>
-                </a:solidFill>
-                <a:latin typeface="+mj-lt" pitchFamily="34" charset="0"/>
-                <a:ea typeface="+mj-lt" pitchFamily="34" charset="-122"/>
-                <a:cs typeface="+mj-lt" pitchFamily="34" charset="-120"/>
-              </a:rPr>
-              <a:t>E</a:t>
-            </a:r>
-            <a:endParaRPr lang="en-US" sz="1800" dirty="0"/>
-          </a:p>
-        </p:txBody>
-      </p:sp>
-      <p:sp>
-        <p:nvSpPr>
-          <p:cNvPr id="19" name="Phase E title"/>
-          <p:cNvSpPr txBox="1"/>
-          <p:nvPr/>
-        </p:nvSpPr>
-        <p:spPr>
-          <a:xfrm>
-            <a:off x="9921240" y="2423160"/>
-            <a:ext cx="1645920" cy="365760"/>
-          </a:xfrm>
-          <a:prstGeom prst="rect">
-            <a:avLst/>
-          </a:prstGeom>
-          <a:noFill/>
-          <a:ln/>
-        </p:spPr>
-        <p:txBody>
-          <a:bodyPr wrap="square" lIns="0" tIns="0" rIns="0" bIns="0" rtlCol="0" anchor="t"/>
-          <a:lstStyle/>
-          <a:p>
-            <a:pPr indent="0" marL="0">
-              <a:buNone/>
-            </a:pPr>
-            <a:r>
-              <a:rPr lang="en-US" sz="1600" b="1" dirty="0">
-                <a:solidFill>
-                  <a:schemeClr val="bg1"/>
-                </a:solidFill>
-                <a:latin typeface="+mj-lt" pitchFamily="34" charset="0"/>
-                <a:ea typeface="+mj-lt" pitchFamily="34" charset="-122"/>
-                <a:cs typeface="+mj-lt" pitchFamily="34" charset="-120"/>
-              </a:rPr>
-              <a:t>Reports</a:t>
-            </a:r>
-            <a:endParaRPr lang="en-US" sz="1600" dirty="0"/>
-          </a:p>
-        </p:txBody>
-      </p:sp>
-      <p:sp>
-        <p:nvSpPr>
-          <p:cNvPr id="20" name="Phase E text"/>
-          <p:cNvSpPr txBox="1"/>
-          <p:nvPr/>
-        </p:nvSpPr>
-        <p:spPr>
-          <a:xfrm>
-            <a:off x="9921240" y="2834640"/>
-            <a:ext cx="1645920" cy="1005840"/>
-          </a:xfrm>
-          <a:prstGeom prst="rect">
-            <a:avLst/>
-          </a:prstGeom>
-          <a:noFill/>
-          <a:ln/>
-        </p:spPr>
-        <p:txBody>
-          <a:bodyPr wrap="square" lIns="0" tIns="0" rIns="0" bIns="0" rtlCol="0" anchor="t"/>
-          <a:lstStyle/>
-          <a:p>
-            <a:pPr indent="0" marL="0">
-              <a:buNone/>
-            </a:pPr>
-            <a:r>
-              <a:rPr lang="en-US" sz="1400" dirty="0">
-                <a:solidFill>
-                  <a:schemeClr val="accent4"/>
-                </a:solidFill>
-              </a:rPr>
-              <a:t>Medical and technical; scorer checked against clerks</a:t>
-            </a:r>
-            <a:endParaRPr lang="en-US" sz="1400" dirty="0"/>
-          </a:p>
-        </p:txBody>
-      </p:sp>
-      <p:sp>
-        <p:nvSpPr>
-          <p:cNvPr id="21" name="Done marker circle"/>
-          <p:cNvSpPr/>
-          <p:nvPr/>
-        </p:nvSpPr>
-        <p:spPr>
-          <a:xfrm>
-            <a:off x="685800" y="3931920"/>
-            <a:ext cx="384048" cy="384048"/>
-          </a:xfrm>
-          <a:prstGeom prst="ellipse">
-            <a:avLst/>
-          </a:prstGeom>
-          <a:solidFill>
-            <a:schemeClr val="accent1"/>
-          </a:solidFill>
-          <a:ln/>
-        </p:spPr>
       </p:sp>
       <p:pic>
         <p:nvPicPr>
-          <p:cNvPr id="22" name="Done marker icon" descr="preencoded.png">    </p:cNvPr>
+          <p:cNvPr id="5" name="Ask 1 icon" descr="preencoded.png">    </p:cNvPr>
           <p:cNvPicPr>
             <a:picLocks noChangeAspect="1"/>
           </p:cNvPicPr>
@@ -9083,8 +10782,8 @@
         </p:blipFill>
         <p:spPr>
           <a:xfrm>
-            <a:off x="789493" y="4035613"/>
-            <a:ext cx="176662" cy="176662"/>
+            <a:off x="1057504" y="2017624"/>
+            <a:ext cx="399593" cy="399593"/>
           </a:xfrm>
           <a:prstGeom prst="rect">
             <a:avLst/>
@@ -9093,14 +10792,14 @@
       </p:pic>
       <p:sp>
         <p:nvSpPr>
-          <p:cNvPr id="23" name="Done label"/>
+          <p:cNvPr id="6" name="Ask 1 title"/>
           <p:cNvSpPr txBox="1"/>
           <p:nvPr/>
         </p:nvSpPr>
         <p:spPr>
           <a:xfrm>
-            <a:off x="1188720" y="3931920"/>
-            <a:ext cx="2743200" cy="384048"/>
+            <a:off x="822960" y="2880360"/>
+            <a:ext cx="2148840" cy="411480"/>
           </a:xfrm>
           <a:prstGeom prst="rect">
             <a:avLst/>
@@ -9109,50 +10808,14 @@
           <a:ln/>
         </p:spPr>
         <p:txBody>
-          <a:bodyPr wrap="square" lIns="0" tIns="0" rIns="0" bIns="0" rtlCol="0" anchor="ctr"/>
+          <a:bodyPr wrap="square" lIns="0" tIns="0" rIns="0" bIns="0" rtlCol="0" anchor="t"/>
           <a:lstStyle/>
           <a:p>
             <a:pPr indent="0" marL="0">
               <a:buNone/>
             </a:pPr>
             <a:r>
-              <a:rPr lang="en-US" sz="1400" dirty="0">
-                <a:solidFill>
-                  <a:schemeClr val="bg1"/>
-                </a:solidFill>
-              </a:rPr>
-              <a:t>Built and tested</a:t>
-            </a:r>
-            <a:endParaRPr lang="en-US" sz="1400" dirty="0"/>
-          </a:p>
-        </p:txBody>
-      </p:sp>
-      <p:sp>
-        <p:nvSpPr>
-          <p:cNvPr id="24" name="Asks heading"/>
-          <p:cNvSpPr txBox="1"/>
-          <p:nvPr/>
-        </p:nvSpPr>
-        <p:spPr>
-          <a:xfrm>
-            <a:off x="548640" y="4572000"/>
-            <a:ext cx="5486400" cy="411480"/>
-          </a:xfrm>
-          <a:prstGeom prst="rect">
-            <a:avLst/>
-          </a:prstGeom>
-          <a:noFill/>
-          <a:ln/>
-        </p:spPr>
-        <p:txBody>
-          <a:bodyPr wrap="square" lIns="0" tIns="0" rIns="0" bIns="0" rtlCol="0" anchor="t"/>
-          <a:lstStyle/>
-          <a:p>
-            <a:pPr indent="0" marL="0">
-              <a:buNone/>
-            </a:pPr>
-            <a:r>
-              <a:rPr lang="en-US" sz="1800" b="1" dirty="0">
+              <a:rPr lang="en-US" sz="1900" b="1" dirty="0">
                 <a:solidFill>
                   <a:schemeClr val="bg1"/>
                 </a:solidFill>
@@ -9160,22 +10823,80 @@
                 <a:ea typeface="+mj-lt" pitchFamily="34" charset="-122"/>
                 <a:cs typeface="+mj-lt" pitchFamily="34" charset="-120"/>
               </a:rPr>
-              <a:t>Needed to move forward</a:t>
-            </a:r>
-            <a:endParaRPr lang="en-US" sz="1800" dirty="0"/>
-          </a:p>
-        </p:txBody>
-      </p:sp>
-      <p:sp>
-        <p:nvSpPr>
-          <p:cNvPr id="25" name="Ask 1 circle"/>
+              <a:t>Clerks</a:t>
+            </a:r>
+            <a:endParaRPr lang="en-US" sz="1900" dirty="0"/>
+          </a:p>
+        </p:txBody>
+      </p:sp>
+      <p:sp>
+        <p:nvSpPr>
+          <p:cNvPr id="7" name="Ask 1 text"/>
+          <p:cNvSpPr txBox="1"/>
+          <p:nvPr/>
+        </p:nvSpPr>
+        <p:spPr>
+          <a:xfrm>
+            <a:off x="822960" y="3383280"/>
+            <a:ext cx="2148840" cy="1097280"/>
+          </a:xfrm>
+          <a:prstGeom prst="rect">
+            <a:avLst/>
+          </a:prstGeom>
+          <a:noFill/>
+          <a:ln/>
+        </p:spPr>
+        <p:txBody>
+          <a:bodyPr wrap="square" lIns="0" tIns="0" rIns="0" bIns="0" rtlCol="0" anchor="t"/>
+          <a:lstStyle/>
+          <a:p>
+            <a:pPr indent="0" marL="0">
+              <a:buNone/>
+            </a:pPr>
+            <a:r>
+              <a:rPr lang="en-US" sz="1500" dirty="0">
+                <a:solidFill>
+                  <a:schemeClr val="accent4"/>
+                </a:solidFill>
+              </a:rPr>
+              <a:t>A second round of scenarios on the Scenario Builder, with time per scenario recorded</a:t>
+            </a:r>
+            <a:endParaRPr lang="en-US" sz="1500" dirty="0"/>
+          </a:p>
+        </p:txBody>
+      </p:sp>
+      <p:sp>
+        <p:nvSpPr>
+          <p:cNvPr id="8" name="Ask 2 card"/>
           <p:cNvSpPr/>
           <p:nvPr/>
         </p:nvSpPr>
         <p:spPr>
           <a:xfrm>
-            <a:off x="548640" y="5120640"/>
-            <a:ext cx="685800" cy="685800"/>
+            <a:off x="3383280" y="1463040"/>
+            <a:ext cx="2651760" cy="3154680"/>
+          </a:xfrm>
+          <a:prstGeom prst="roundRect">
+            <a:avLst>
+              <a:gd name="adj" fmla="val 2759"/>
+            </a:avLst>
+          </a:prstGeom>
+          <a:solidFill>
+            <a:schemeClr val="accent6"/>
+          </a:solidFill>
+          <a:ln/>
+        </p:spPr>
+      </p:sp>
+      <p:sp>
+        <p:nvSpPr>
+          <p:cNvPr id="9" name="Ask 2 circle"/>
+          <p:cNvSpPr/>
+          <p:nvPr/>
+        </p:nvSpPr>
+        <p:spPr>
+          <a:xfrm>
+            <a:off x="3657600" y="1783080"/>
+            <a:ext cx="868680" cy="868680"/>
           </a:xfrm>
           <a:prstGeom prst="ellipse">
             <a:avLst/>
@@ -9188,7 +10909,7 @@
       </p:sp>
       <p:pic>
         <p:nvPicPr>
-          <p:cNvPr id="26" name="Ask 1 icon" descr="preencoded.png">    </p:cNvPr>
+          <p:cNvPr id="10" name="Ask 2 icon" descr="preencoded.png">    </p:cNvPr>
           <p:cNvPicPr>
             <a:picLocks noChangeAspect="1"/>
           </p:cNvPicPr>
@@ -9202,8 +10923,8 @@
         </p:blipFill>
         <p:spPr>
           <a:xfrm>
-            <a:off x="733806" y="5305806"/>
-            <a:ext cx="315468" cy="315468"/>
+            <a:off x="3892144" y="2017624"/>
+            <a:ext cx="399593" cy="399593"/>
           </a:xfrm>
           <a:prstGeom prst="rect">
             <a:avLst/>
@@ -9212,14 +10933,14 @@
       </p:pic>
       <p:sp>
         <p:nvSpPr>
-          <p:cNvPr id="27" name="Ask 1 title"/>
+          <p:cNvPr id="11" name="Ask 2 title"/>
           <p:cNvSpPr txBox="1"/>
           <p:nvPr/>
         </p:nvSpPr>
         <p:spPr>
           <a:xfrm>
-            <a:off x="1417320" y="5074920"/>
-            <a:ext cx="2743200" cy="365760"/>
+            <a:off x="3657600" y="2880360"/>
+            <a:ext cx="2148840" cy="411480"/>
           </a:xfrm>
           <a:prstGeom prst="rect">
             <a:avLst/>
@@ -9235,27 +10956,30 @@
               <a:buNone/>
             </a:pPr>
             <a:r>
-              <a:rPr lang="en-US" sz="1600" b="1" dirty="0">
+              <a:rPr lang="en-US" sz="1900" b="1" dirty="0">
                 <a:solidFill>
                   <a:schemeClr val="bg1"/>
                 </a:solidFill>
+                <a:latin typeface="+mj-lt" pitchFamily="34" charset="0"/>
+                <a:ea typeface="+mj-lt" pitchFamily="34" charset="-122"/>
+                <a:cs typeface="+mj-lt" pitchFamily="34" charset="-120"/>
               </a:rPr>
               <a:t>Clinical lead</a:t>
             </a:r>
-            <a:endParaRPr lang="en-US" sz="1600" dirty="0"/>
-          </a:p>
-        </p:txBody>
-      </p:sp>
-      <p:sp>
-        <p:nvSpPr>
-          <p:cNvPr id="28" name="Ask 1 text"/>
+            <a:endParaRPr lang="en-US" sz="1900" dirty="0"/>
+          </a:p>
+        </p:txBody>
+      </p:sp>
+      <p:sp>
+        <p:nvSpPr>
+          <p:cNvPr id="12" name="Ask 2 text"/>
           <p:cNvSpPr txBox="1"/>
           <p:nvPr/>
         </p:nvSpPr>
         <p:spPr>
           <a:xfrm>
-            <a:off x="1417320" y="5440680"/>
-            <a:ext cx="2743200" cy="640080"/>
+            <a:off x="3657600" y="3383280"/>
+            <a:ext cx="2148840" cy="1097280"/>
           </a:xfrm>
           <a:prstGeom prst="rect">
             <a:avLst/>
@@ -9271,27 +10995,49 @@
               <a:buNone/>
             </a:pPr>
             <a:r>
-              <a:rPr lang="en-US" sz="1400" dirty="0">
+              <a:rPr lang="en-US" sz="1500" dirty="0">
                 <a:solidFill>
                   <a:schemeClr val="accent4"/>
                 </a:solidFill>
               </a:rPr>
-              <a:t>Review rubric gates, anchors and dose tolerance</a:t>
-            </a:r>
-            <a:endParaRPr lang="en-US" sz="1400" dirty="0"/>
-          </a:p>
-        </p:txBody>
-      </p:sp>
-      <p:sp>
-        <p:nvSpPr>
-          <p:cNvPr id="29" name="Ask 2 circle"/>
+              <a:t>Review the rubric: critical errors, rating anchors and dose tolerance</a:t>
+            </a:r>
+            <a:endParaRPr lang="en-US" sz="1500" dirty="0"/>
+          </a:p>
+        </p:txBody>
+      </p:sp>
+      <p:sp>
+        <p:nvSpPr>
+          <p:cNvPr id="13" name="Ask 3 card"/>
           <p:cNvSpPr/>
           <p:nvPr/>
         </p:nvSpPr>
         <p:spPr>
           <a:xfrm>
-            <a:off x="4297680" y="5120640"/>
-            <a:ext cx="685800" cy="685800"/>
+            <a:off x="6217920" y="1463040"/>
+            <a:ext cx="2651760" cy="3154680"/>
+          </a:xfrm>
+          <a:prstGeom prst="roundRect">
+            <a:avLst>
+              <a:gd name="adj" fmla="val 2759"/>
+            </a:avLst>
+          </a:prstGeom>
+          <a:solidFill>
+            <a:schemeClr val="accent6"/>
+          </a:solidFill>
+          <a:ln/>
+        </p:spPr>
+      </p:sp>
+      <p:sp>
+        <p:nvSpPr>
+          <p:cNvPr id="14" name="Ask 3 circle"/>
+          <p:cNvSpPr/>
+          <p:nvPr/>
+        </p:nvSpPr>
+        <p:spPr>
+          <a:xfrm>
+            <a:off x="6492240" y="1783080"/>
+            <a:ext cx="868680" cy="868680"/>
           </a:xfrm>
           <a:prstGeom prst="ellipse">
             <a:avLst/>
@@ -9304,7 +11050,7 @@
       </p:sp>
       <p:pic>
         <p:nvPicPr>
-          <p:cNvPr id="30" name="Ask 2 icon" descr="preencoded.png">    </p:cNvPr>
+          <p:cNvPr id="15" name="Ask 3 icon" descr="preencoded.png">    </p:cNvPr>
           <p:cNvPicPr>
             <a:picLocks noChangeAspect="1"/>
           </p:cNvPicPr>
@@ -9318,8 +11064,8 @@
         </p:blipFill>
         <p:spPr>
           <a:xfrm>
-            <a:off x="4482846" y="5305806"/>
-            <a:ext cx="315468" cy="315468"/>
+            <a:off x="6726784" y="2017624"/>
+            <a:ext cx="399593" cy="399593"/>
           </a:xfrm>
           <a:prstGeom prst="rect">
             <a:avLst/>
@@ -9328,14 +11074,14 @@
       </p:pic>
       <p:sp>
         <p:nvSpPr>
-          <p:cNvPr id="31" name="Ask 2 title"/>
+          <p:cNvPr id="16" name="Ask 3 title"/>
           <p:cNvSpPr txBox="1"/>
           <p:nvPr/>
         </p:nvSpPr>
         <p:spPr>
           <a:xfrm>
-            <a:off x="5166360" y="5074920"/>
-            <a:ext cx="2743200" cy="365760"/>
+            <a:off x="6492240" y="2880360"/>
+            <a:ext cx="2148840" cy="411480"/>
           </a:xfrm>
           <a:prstGeom prst="rect">
             <a:avLst/>
@@ -9351,27 +11097,30 @@
               <a:buNone/>
             </a:pPr>
             <a:r>
-              <a:rPr lang="en-US" sz="1600" b="1" dirty="0">
+              <a:rPr lang="en-US" sz="1900" b="1" dirty="0">
                 <a:solidFill>
                   <a:schemeClr val="bg1"/>
                 </a:solidFill>
+                <a:latin typeface="+mj-lt" pitchFamily="34" charset="0"/>
+                <a:ea typeface="+mj-lt" pitchFamily="34" charset="-122"/>
+                <a:cs typeface="+mj-lt" pitchFamily="34" charset="-120"/>
               </a:rPr>
               <a:t>Physiologist</a:t>
             </a:r>
-            <a:endParaRPr lang="en-US" sz="1600" dirty="0"/>
-          </a:p>
-        </p:txBody>
-      </p:sp>
-      <p:sp>
-        <p:nvSpPr>
-          <p:cNvPr id="32" name="Ask 2 text"/>
+            <a:endParaRPr lang="en-US" sz="1900" dirty="0"/>
+          </a:p>
+        </p:txBody>
+      </p:sp>
+      <p:sp>
+        <p:nvSpPr>
+          <p:cNvPr id="17" name="Ask 3 text"/>
           <p:cNvSpPr txBox="1"/>
           <p:nvPr/>
         </p:nvSpPr>
         <p:spPr>
           <a:xfrm>
-            <a:off x="5166360" y="5440680"/>
-            <a:ext cx="2743200" cy="640080"/>
+            <a:off x="6492240" y="3383280"/>
+            <a:ext cx="2148840" cy="1097280"/>
           </a:xfrm>
           <a:prstGeom prst="rect">
             <a:avLst/>
@@ -9387,27 +11136,49 @@
               <a:buNone/>
             </a:pPr>
             <a:r>
-              <a:rPr lang="en-US" sz="1400" dirty="0">
+              <a:rPr lang="en-US" sz="1500" dirty="0">
                 <a:solidFill>
                   <a:schemeClr val="accent4"/>
                 </a:solidFill>
               </a:rPr>
-              <a:t>Check CLiFF course numbers and crew baselines</a:t>
-            </a:r>
-            <a:endParaRPr lang="en-US" sz="1400" dirty="0"/>
-          </a:p>
-        </p:txBody>
-      </p:sp>
-      <p:sp>
-        <p:nvSpPr>
-          <p:cNvPr id="33" name="Ask 3 circle"/>
+              <a:t>Check the CLiFF course numbers and the crew baselines</a:t>
+            </a:r>
+            <a:endParaRPr lang="en-US" sz="1500" dirty="0"/>
+          </a:p>
+        </p:txBody>
+      </p:sp>
+      <p:sp>
+        <p:nvSpPr>
+          <p:cNvPr id="18" name="Ask 4 card"/>
           <p:cNvSpPr/>
           <p:nvPr/>
         </p:nvSpPr>
         <p:spPr>
           <a:xfrm>
-            <a:off x="8046720" y="5120640"/>
-            <a:ext cx="685800" cy="685800"/>
+            <a:off x="9052560" y="1463040"/>
+            <a:ext cx="2651760" cy="3154680"/>
+          </a:xfrm>
+          <a:prstGeom prst="roundRect">
+            <a:avLst>
+              <a:gd name="adj" fmla="val 2759"/>
+            </a:avLst>
+          </a:prstGeom>
+          <a:solidFill>
+            <a:schemeClr val="accent6"/>
+          </a:solidFill>
+          <a:ln/>
+        </p:spPr>
+      </p:sp>
+      <p:sp>
+        <p:nvSpPr>
+          <p:cNvPr id="19" name="Ask 4 circle"/>
+          <p:cNvSpPr/>
+          <p:nvPr/>
+        </p:nvSpPr>
+        <p:spPr>
+          <a:xfrm>
+            <a:off x="9326880" y="1783080"/>
+            <a:ext cx="868680" cy="868680"/>
           </a:xfrm>
           <a:prstGeom prst="ellipse">
             <a:avLst/>
@@ -9420,7 +11191,7 @@
       </p:sp>
       <p:pic>
         <p:nvPicPr>
-          <p:cNvPr id="34" name="Ask 3 icon" descr="preencoded.png">    </p:cNvPr>
+          <p:cNvPr id="20" name="Ask 4 icon" descr="preencoded.png">    </p:cNvPr>
           <p:cNvPicPr>
             <a:picLocks noChangeAspect="1"/>
           </p:cNvPicPr>
@@ -9434,8 +11205,8 @@
         </p:blipFill>
         <p:spPr>
           <a:xfrm>
-            <a:off x="8231886" y="5305806"/>
-            <a:ext cx="315468" cy="315468"/>
+            <a:off x="9561424" y="2017624"/>
+            <a:ext cx="399593" cy="399593"/>
           </a:xfrm>
           <a:prstGeom prst="rect">
             <a:avLst/>
@@ -9444,14 +11215,14 @@
       </p:pic>
       <p:sp>
         <p:nvSpPr>
-          <p:cNvPr id="35" name="Ask 3 title"/>
+          <p:cNvPr id="21" name="Ask 4 title"/>
           <p:cNvSpPr txBox="1"/>
           <p:nvPr/>
         </p:nvSpPr>
         <p:spPr>
           <a:xfrm>
-            <a:off x="8915400" y="5074920"/>
-            <a:ext cx="2743200" cy="365760"/>
+            <a:off x="9326880" y="2880360"/>
+            <a:ext cx="2148840" cy="411480"/>
           </a:xfrm>
           <a:prstGeom prst="rect">
             <a:avLst/>
@@ -9467,27 +11238,30 @@
               <a:buNone/>
             </a:pPr>
             <a:r>
-              <a:rPr lang="en-US" sz="1600" b="1" dirty="0">
+              <a:rPr lang="en-US" sz="1900" b="1" dirty="0">
                 <a:solidFill>
                   <a:schemeClr val="bg1"/>
                 </a:solidFill>
+                <a:latin typeface="+mj-lt" pitchFamily="34" charset="0"/>
+                <a:ea typeface="+mj-lt" pitchFamily="34" charset="-122"/>
+                <a:cs typeface="+mj-lt" pitchFamily="34" charset="-120"/>
               </a:rPr>
               <a:t>CMO-DA team</a:t>
             </a:r>
-            <a:endParaRPr lang="en-US" sz="1600" dirty="0"/>
-          </a:p>
-        </p:txBody>
-      </p:sp>
-      <p:sp>
-        <p:nvSpPr>
-          <p:cNvPr id="36" name="Ask 3 text"/>
+            <a:endParaRPr lang="en-US" sz="1900" dirty="0"/>
+          </a:p>
+        </p:txBody>
+      </p:sp>
+      <p:sp>
+        <p:nvSpPr>
+          <p:cNvPr id="22" name="Ask 4 text"/>
           <p:cNvSpPr txBox="1"/>
           <p:nvPr/>
         </p:nvSpPr>
         <p:spPr>
           <a:xfrm>
-            <a:off x="8915400" y="5440680"/>
-            <a:ext cx="2743200" cy="640080"/>
+            <a:off x="9326880" y="3383280"/>
+            <a:ext cx="2148840" cy="1097280"/>
           </a:xfrm>
           <a:prstGeom prst="rect">
             <a:avLst/>
@@ -9503,14 +11277,50 @@
               <a:buNone/>
             </a:pPr>
             <a:r>
-              <a:rPr lang="en-US" sz="1400" dirty="0">
+              <a:rPr lang="en-US" sz="1500" dirty="0">
                 <a:solidFill>
                   <a:schemeClr val="accent4"/>
                 </a:solidFill>
               </a:rPr>
-              <a:t>Share the interface spec before the runner is built</a:t>
-            </a:r>
-            <a:endParaRPr lang="en-US" sz="1400" dirty="0"/>
+              <a:t>Share the interface spec before the runner (Phase B) is built</a:t>
+            </a:r>
+            <a:endParaRPr lang="en-US" sz="1500" dirty="0"/>
+          </a:p>
+        </p:txBody>
+      </p:sp>
+      <p:sp>
+        <p:nvSpPr>
+          <p:cNvPr id="23" name="Closing note"/>
+          <p:cNvSpPr txBox="1"/>
+          <p:nvPr/>
+        </p:nvSpPr>
+        <p:spPr>
+          <a:xfrm>
+            <a:off x="548640" y="5029200"/>
+            <a:ext cx="11064240" cy="457200"/>
+          </a:xfrm>
+          <a:prstGeom prst="rect">
+            <a:avLst/>
+          </a:prstGeom>
+          <a:noFill/>
+          <a:ln/>
+        </p:spPr>
+        <p:txBody>
+          <a:bodyPr wrap="square" lIns="0" tIns="0" rIns="0" bIns="0" rtlCol="0" anchor="t"/>
+          <a:lstStyle/>
+          <a:p>
+            <a:pPr indent="0" marL="0">
+              <a:buNone/>
+            </a:pPr>
+            <a:r>
+              <a:rPr lang="en-US" sz="1800" b="1" dirty="0">
+                <a:solidFill>
+                  <a:schemeClr val="bg1"/>
+                </a:solidFill>
+              </a:rPr>
+              <a:t>The Scenario Builder is ready for clerks now: one offline file, no install.</a:t>
+            </a:r>
+            <a:endParaRPr lang="en-US" sz="1800" dirty="0"/>
           </a:p>
         </p:txBody>
       </p:sp>
@@ -9553,7 +11363,7 @@
             <a:pPr algn="r"/>
             <a:fld id="{F7021451-1387-4CA6-816F-3879F97B5CBC}" type="slidenum">
               <a:rPr b="0" lang="en-US"/>
-              <a:t>8</a:t>
+              <a:t>9</a:t>
             </a:fld>
             <a:endParaRPr lang="en-US"/>
           </a:p>

--- a/docs/presentations/MedSim-Eval-overview.pptx
+++ b/docs/presentations/MedSim-Eval-overview.pptx
@@ -115,13 +115,13 @@
   <p:extLst>
     <p:ext uri="{521415D9-36F7-43E2-AB2F-B90AF26B5E84}">
       <p14:sectionLst xmlns:p14="http://schemas.microsoft.com/office/powerpoint/2010/main">
-        <p14:section name="Introduction" id="{cbbe6b38-71f3-8c57-11f5-8e1bba4db437}">
+        <p14:section name="Introduction" id="{ef173c93-9904-54d6-4610-87ffb05a151e}">
           <p14:sldIdLst>
             <p14:sldId id="256"/>
             <p14:sldId id="257"/>
           </p14:sldIdLst>
         </p14:section>
-        <p14:section name="How it works" id="{4c722572-8674-a30c-680c-6c6fb69a6f06}">
+        <p14:section name="How it works" id="{7825113a-c115-d665-a826-0fa2e0374d97}">
           <p14:sldIdLst>
             <p14:sldId id="258"/>
             <p14:sldId id="259"/>
@@ -129,12 +129,12 @@
             <p14:sldId id="261"/>
           </p14:sldIdLst>
         </p14:section>
-        <p14:section name="Example" id="{a0bc8f79-34db-4789-a398-b9ef6dec7af8}">
+        <p14:section name="Example" id="{ce7a2abb-ca29-f142-ab73-96e3c156b08c}">
           <p14:sldIdLst>
             <p14:sldId id="262"/>
           </p14:sldIdLst>
         </p14:section>
-        <p14:section name="Plan of work" id="{358863e9-d634-aebd-3335-6b3cd5d6a86d}">
+        <p14:section name="Plan of work" id="{55f81797-b65a-ceb4-d21b-371db57b4199}">
           <p14:sldIdLst>
             <p14:sldId id="263"/>
             <p14:sldId id="264"/>
@@ -903,10 +903,10 @@
                   <c:v>12</c:v>
                 </c:pt>
                 <c:pt idx="2">
-                  <c:v>16</c:v>
+                  <c:v>21</c:v>
                 </c:pt>
                 <c:pt idx="3">
-                  <c:v>10</c:v>
+                  <c:v>15</c:v>
                 </c:pt>
                 <c:pt idx="4">
                   <c:v>3</c:v>
@@ -1092,7 +1092,7 @@
         <c:axId val="2094734552"/>
         <c:scaling>
           <c:orientation val="minMax"/>
-          <c:max val="19"/>
+          <c:max val="25"/>
           <c:min val="0"/>
         </c:scaling>
         <c:delete val="1"/>
@@ -9104,7 +9104,7 @@
                   <a:schemeClr val="tx1"/>
                 </a:solidFill>
               </a:rPr>
-              <a:t>Scored on 17 checklist items plus diagnosis and etiology, in all 8 runs. Values from the appendicitis CLiFF; pending physiologist review.</a:t>
+              <a:t>Scored on 19 checklist items plus the standard items, in all 8 runs. Values from the appendicitis CLiFF; pending physiologist review.</a:t>
             </a:r>
             <a:endParaRPr lang="en-US" sz="1400" dirty="0"/>
           </a:p>

--- a/docs/presentations/MedSim-Eval-overview.pptx
+++ b/docs/presentations/MedSim-Eval-overview.pptx
@@ -115,13 +115,13 @@
   <p:extLst>
     <p:ext uri="{521415D9-36F7-43E2-AB2F-B90AF26B5E84}">
       <p14:sectionLst xmlns:p14="http://schemas.microsoft.com/office/powerpoint/2010/main">
-        <p14:section name="Introduction" id="{ef173c93-9904-54d6-4610-87ffb05a151e}">
+        <p14:section name="Introduction" id="{84972df3-f1a3-4a6e-1fb7-1cae7c540384}">
           <p14:sldIdLst>
             <p14:sldId id="256"/>
             <p14:sldId id="257"/>
           </p14:sldIdLst>
         </p14:section>
-        <p14:section name="How it works" id="{7825113a-c115-d665-a826-0fa2e0374d97}">
+        <p14:section name="How it works" id="{6b42c078-29d6-2fba-40ae-10c96331b2c2}">
           <p14:sldIdLst>
             <p14:sldId id="258"/>
             <p14:sldId id="259"/>
@@ -129,12 +129,12 @@
             <p14:sldId id="261"/>
           </p14:sldIdLst>
         </p14:section>
-        <p14:section name="Example" id="{ce7a2abb-ca29-f142-ab73-96e3c156b08c}">
+        <p14:section name="Example" id="{ad8bf46c-8b3d-433a-71e9-10eb4b42423d}">
           <p14:sldIdLst>
             <p14:sldId id="262"/>
           </p14:sldIdLst>
         </p14:section>
-        <p14:section name="Plan of work" id="{55f81797-b65a-ceb4-d21b-371db57b4199}">
+        <p14:section name="Plan of work" id="{cf838fb4-6335-f7a9-189d-70654b9d307c}">
           <p14:sldIdLst>
             <p14:sldId id="263"/>
             <p14:sldId id="264"/>
@@ -5725,7 +5725,7 @@
                   <a:schemeClr val="tx1"/>
                 </a:solidFill>
               </a:rPr>
-              <a:t>Reads all 8 runs, summarises and flags anomalies</a:t>
+              <a:t>Reads every run, summarises and flags anomalies</a:t>
             </a:r>
             <a:endParaRPr lang="en-US" sz="1400" dirty="0"/>
           </a:p>
@@ -6926,7 +6926,7 @@
                   <a:schemeClr val="tx2"/>
                 </a:solidFill>
               </a:rPr>
-              <a:t>Each scenario runs 8 times, in 3 mission settings</a:t>
+              <a:t>Each scenario runs up to 12 times, in 5 settings</a:t>
             </a:r>
             <a:endParaRPr lang="en-US" sz="3400" dirty="0"/>
           </a:p>
@@ -6940,8 +6940,8 @@
         </p:nvSpPr>
         <p:spPr>
           <a:xfrm>
-            <a:off x="548640" y="1371600"/>
-            <a:ext cx="5303520" cy="365760"/>
+            <a:off x="548640" y="1325880"/>
+            <a:ext cx="5852160" cy="365760"/>
           </a:xfrm>
           <a:prstGeom prst="rect">
             <a:avLst/>
@@ -6973,14 +6973,14 @@
       </p:sp>
       <p:sp>
         <p:nvSpPr>
-          <p:cNvPr id="4" name="Env 1"/>
+          <p:cNvPr id="4" name="Runs subheading"/>
           <p:cNvSpPr txBox="1"/>
           <p:nvPr/>
         </p:nvSpPr>
         <p:spPr>
           <a:xfrm>
-            <a:off x="1783080" y="1828800"/>
-            <a:ext cx="1280160" cy="457200"/>
+            <a:off x="548640" y="1709928"/>
+            <a:ext cx="5943600" cy="320040"/>
           </a:xfrm>
           <a:prstGeom prst="rect">
             <a:avLst/>
@@ -6989,6 +6989,42 @@
           <a:ln/>
         </p:spPr>
         <p:txBody>
+          <a:bodyPr wrap="square" lIns="0" tIns="0" rIns="0" bIns="0" rtlCol="0" anchor="t"/>
+          <a:lstStyle/>
+          <a:p>
+            <a:pPr indent="0" marL="0">
+              <a:buNone/>
+            </a:pPr>
+            <a:r>
+              <a:rPr lang="en-US" sz="1300" dirty="0">
+                <a:solidFill>
+                  <a:schemeClr val="accent3"/>
+                </a:solidFill>
+              </a:rPr>
+              <a:t>Environments where the condition can't occur are skipped.</a:t>
+            </a:r>
+            <a:endParaRPr lang="en-US" sz="1300" dirty="0"/>
+          </a:p>
+        </p:txBody>
+      </p:sp>
+      <p:sp>
+        <p:nvSpPr>
+          <p:cNvPr id="5" name="Env 1"/>
+          <p:cNvSpPr txBox="1"/>
+          <p:nvPr/>
+        </p:nvSpPr>
+        <p:spPr>
+          <a:xfrm>
+            <a:off x="1737360" y="2103120"/>
+            <a:ext cx="914400" cy="457200"/>
+          </a:xfrm>
+          <a:prstGeom prst="rect">
+            <a:avLst/>
+          </a:prstGeom>
+          <a:noFill/>
+          <a:ln/>
+        </p:spPr>
+        <p:txBody>
           <a:bodyPr wrap="square" lIns="0" tIns="0" rIns="0" bIns="0" rtlCol="0" anchor="b"/>
           <a:lstStyle/>
           <a:p>
@@ -6996,27 +7032,27 @@
               <a:buNone/>
             </a:pPr>
             <a:r>
-              <a:rPr lang="en-US" sz="1300" b="1" dirty="0">
+              <a:rPr lang="en-US" sz="1200" b="1" dirty="0">
                 <a:solidFill>
                   <a:schemeClr val="tx2"/>
                 </a:solidFill>
               </a:rPr>
               <a:t>Low Earth orbit</a:t>
             </a:r>
-            <a:endParaRPr lang="en-US" sz="1300" dirty="0"/>
-          </a:p>
-        </p:txBody>
-      </p:sp>
-      <p:sp>
-        <p:nvSpPr>
-          <p:cNvPr id="5" name="Env 2"/>
+            <a:endParaRPr lang="en-US" sz="1200" dirty="0"/>
+          </a:p>
+        </p:txBody>
+      </p:sp>
+      <p:sp>
+        <p:nvSpPr>
+          <p:cNvPr id="6" name="Env 2"/>
           <p:cNvSpPr txBox="1"/>
           <p:nvPr/>
         </p:nvSpPr>
         <p:spPr>
           <a:xfrm>
-            <a:off x="3154680" y="1828800"/>
-            <a:ext cx="1280160" cy="457200"/>
+            <a:off x="2724912" y="2103120"/>
+            <a:ext cx="914400" cy="457200"/>
           </a:xfrm>
           <a:prstGeom prst="rect">
             <a:avLst/>
@@ -7032,27 +7068,99 @@
               <a:buNone/>
             </a:pPr>
             <a:r>
-              <a:rPr lang="en-US" sz="1300" b="1" dirty="0">
+              <a:rPr lang="en-US" sz="1200" b="1" dirty="0">
                 <a:solidFill>
                   <a:schemeClr val="tx2"/>
                 </a:solidFill>
               </a:rPr>
+              <a:t>Cislunar space</a:t>
+            </a:r>
+            <a:endParaRPr lang="en-US" sz="1200" dirty="0"/>
+          </a:p>
+        </p:txBody>
+      </p:sp>
+      <p:sp>
+        <p:nvSpPr>
+          <p:cNvPr id="7" name="Env 3"/>
+          <p:cNvSpPr txBox="1"/>
+          <p:nvPr/>
+        </p:nvSpPr>
+        <p:spPr>
+          <a:xfrm>
+            <a:off x="3712464" y="2103120"/>
+            <a:ext cx="914400" cy="457200"/>
+          </a:xfrm>
+          <a:prstGeom prst="rect">
+            <a:avLst/>
+          </a:prstGeom>
+          <a:noFill/>
+          <a:ln/>
+        </p:spPr>
+        <p:txBody>
+          <a:bodyPr wrap="square" lIns="0" tIns="0" rIns="0" bIns="0" rtlCol="0" anchor="b"/>
+          <a:lstStyle/>
+          <a:p>
+            <a:pPr algn="ctr" indent="0" marL="0">
+              <a:buNone/>
+            </a:pPr>
+            <a:r>
+              <a:rPr lang="en-US" sz="1200" b="1" dirty="0">
+                <a:solidFill>
+                  <a:schemeClr val="tx2"/>
+                </a:solidFill>
+              </a:rPr>
+              <a:t>Lunar surface</a:t>
+            </a:r>
+            <a:endParaRPr lang="en-US" sz="1200" dirty="0"/>
+          </a:p>
+        </p:txBody>
+      </p:sp>
+      <p:sp>
+        <p:nvSpPr>
+          <p:cNvPr id="8" name="Env 4"/>
+          <p:cNvSpPr txBox="1"/>
+          <p:nvPr/>
+        </p:nvSpPr>
+        <p:spPr>
+          <a:xfrm>
+            <a:off x="4700016" y="2103120"/>
+            <a:ext cx="914400" cy="457200"/>
+          </a:xfrm>
+          <a:prstGeom prst="rect">
+            <a:avLst/>
+          </a:prstGeom>
+          <a:noFill/>
+          <a:ln/>
+        </p:spPr>
+        <p:txBody>
+          <a:bodyPr wrap="square" lIns="0" tIns="0" rIns="0" bIns="0" rtlCol="0" anchor="b"/>
+          <a:lstStyle/>
+          <a:p>
+            <a:pPr algn="ctr" indent="0" marL="0">
+              <a:buNone/>
+            </a:pPr>
+            <a:r>
+              <a:rPr lang="en-US" sz="1200" b="1" dirty="0">
+                <a:solidFill>
+                  <a:schemeClr val="tx2"/>
+                </a:solidFill>
+              </a:rPr>
               <a:t>Mars transit</a:t>
             </a:r>
-            <a:endParaRPr lang="en-US" sz="1300" dirty="0"/>
-          </a:p>
-        </p:txBody>
-      </p:sp>
-      <p:sp>
-        <p:nvSpPr>
-          <p:cNvPr id="6" name="Env 3"/>
+            <a:endParaRPr lang="en-US" sz="1200" dirty="0"/>
+          </a:p>
+        </p:txBody>
+      </p:sp>
+      <p:sp>
+        <p:nvSpPr>
+          <p:cNvPr id="9" name="Env 5"/>
           <p:cNvSpPr txBox="1"/>
           <p:nvPr/>
         </p:nvSpPr>
         <p:spPr>
           <a:xfrm>
-            <a:off x="4526280" y="1828800"/>
-            <a:ext cx="1280160" cy="457200"/>
+            <a:off x="5687568" y="2103120"/>
+            <a:ext cx="914400" cy="457200"/>
           </a:xfrm>
           <a:prstGeom prst="rect">
             <a:avLst/>
@@ -7068,27 +7176,27 @@
               <a:buNone/>
             </a:pPr>
             <a:r>
-              <a:rPr lang="en-US" sz="1300" b="1" dirty="0">
+              <a:rPr lang="en-US" sz="1200" b="1" dirty="0">
                 <a:solidFill>
                   <a:schemeClr val="tx2"/>
                 </a:solidFill>
               </a:rPr>
               <a:t>Mars surface</a:t>
             </a:r>
-            <a:endParaRPr lang="en-US" sz="1300" dirty="0"/>
-          </a:p>
-        </p:txBody>
-      </p:sp>
-      <p:sp>
-        <p:nvSpPr>
-          <p:cNvPr id="7" name="Course 1"/>
+            <a:endParaRPr lang="en-US" sz="1200" dirty="0"/>
+          </a:p>
+        </p:txBody>
+      </p:sp>
+      <p:sp>
+        <p:nvSpPr>
+          <p:cNvPr id="10" name="Course 1"/>
           <p:cNvSpPr txBox="1"/>
           <p:nvPr/>
         </p:nvSpPr>
         <p:spPr>
           <a:xfrm>
-            <a:off x="548640" y="2377440"/>
-            <a:ext cx="1188720" cy="777240"/>
+            <a:off x="548640" y="2651760"/>
+            <a:ext cx="1143000" cy="749808"/>
           </a:xfrm>
           <a:prstGeom prst="rect">
             <a:avLst/>
@@ -7117,18 +7225,18 @@
       </p:sp>
       <p:sp>
         <p:nvSpPr>
-          <p:cNvPr id="8" name="Run 1"/>
+          <p:cNvPr id="11" name="Run 1"/>
           <p:cNvSpPr/>
           <p:nvPr/>
         </p:nvSpPr>
         <p:spPr>
           <a:xfrm>
-            <a:off x="1783080" y="2377440"/>
-            <a:ext cx="1280160" cy="777240"/>
+            <a:off x="1737360" y="2651760"/>
+            <a:ext cx="914400" cy="749808"/>
           </a:xfrm>
           <a:prstGeom prst="roundRect">
             <a:avLst>
-              <a:gd name="adj" fmla="val 9412"/>
+              <a:gd name="adj" fmla="val 9756"/>
             </a:avLst>
           </a:prstGeom>
           <a:solidFill>
@@ -7144,31 +7252,31 @@
               <a:buNone/>
             </a:pPr>
             <a:r>
-              <a:rPr lang="en-US" sz="1500" b="1" dirty="0">
+              <a:rPr lang="en-US" sz="1400" b="1" dirty="0">
                 <a:solidFill>
                   <a:schemeClr val="bg1"/>
                 </a:solidFill>
               </a:rPr>
               <a:t>Run 1</a:t>
             </a:r>
-            <a:endParaRPr lang="en-US" sz="1500" dirty="0"/>
-          </a:p>
-        </p:txBody>
-      </p:sp>
-      <p:sp>
-        <p:nvSpPr>
-          <p:cNvPr id="9" name="Run 2"/>
+            <a:endParaRPr lang="en-US" sz="1400" dirty="0"/>
+          </a:p>
+        </p:txBody>
+      </p:sp>
+      <p:sp>
+        <p:nvSpPr>
+          <p:cNvPr id="12" name="Run 2"/>
           <p:cNvSpPr/>
           <p:nvPr/>
         </p:nvSpPr>
         <p:spPr>
           <a:xfrm>
-            <a:off x="3154680" y="2377440"/>
-            <a:ext cx="1280160" cy="777240"/>
+            <a:off x="2724912" y="2651760"/>
+            <a:ext cx="914400" cy="749808"/>
           </a:xfrm>
           <a:prstGeom prst="roundRect">
             <a:avLst>
-              <a:gd name="adj" fmla="val 9412"/>
+              <a:gd name="adj" fmla="val 9756"/>
             </a:avLst>
           </a:prstGeom>
           <a:solidFill>
@@ -7184,31 +7292,31 @@
               <a:buNone/>
             </a:pPr>
             <a:r>
-              <a:rPr lang="en-US" sz="1500" b="1" dirty="0">
+              <a:rPr lang="en-US" sz="1400" b="1" dirty="0">
                 <a:solidFill>
                   <a:schemeClr val="bg1"/>
                 </a:solidFill>
               </a:rPr>
               <a:t>Run 2</a:t>
             </a:r>
-            <a:endParaRPr lang="en-US" sz="1500" dirty="0"/>
-          </a:p>
-        </p:txBody>
-      </p:sp>
-      <p:sp>
-        <p:nvSpPr>
-          <p:cNvPr id="10" name="Run 3"/>
+            <a:endParaRPr lang="en-US" sz="1400" dirty="0"/>
+          </a:p>
+        </p:txBody>
+      </p:sp>
+      <p:sp>
+        <p:nvSpPr>
+          <p:cNvPr id="13" name="Run 3"/>
           <p:cNvSpPr/>
           <p:nvPr/>
         </p:nvSpPr>
         <p:spPr>
           <a:xfrm>
-            <a:off x="4526280" y="2377440"/>
-            <a:ext cx="1280160" cy="777240"/>
+            <a:off x="3712464" y="2651760"/>
+            <a:ext cx="914400" cy="749808"/>
           </a:xfrm>
           <a:prstGeom prst="roundRect">
             <a:avLst>
-              <a:gd name="adj" fmla="val 9412"/>
+              <a:gd name="adj" fmla="val 9756"/>
             </a:avLst>
           </a:prstGeom>
           <a:solidFill>
@@ -7224,67 +7332,147 @@
               <a:buNone/>
             </a:pPr>
             <a:r>
-              <a:rPr lang="en-US" sz="1500" b="1" dirty="0">
+              <a:rPr lang="en-US" sz="1400" b="1" dirty="0">
                 <a:solidFill>
                   <a:schemeClr val="bg1"/>
                 </a:solidFill>
               </a:rPr>
               <a:t>Run 3</a:t>
             </a:r>
-            <a:endParaRPr lang="en-US" sz="1500" dirty="0"/>
-          </a:p>
-        </p:txBody>
-      </p:sp>
-      <p:sp>
-        <p:nvSpPr>
-          <p:cNvPr id="11" name="Course 2"/>
-          <p:cNvSpPr txBox="1"/>
-          <p:nvPr/>
-        </p:nvSpPr>
-        <p:spPr>
-          <a:xfrm>
-            <a:off x="548640" y="3291840"/>
-            <a:ext cx="1188720" cy="777240"/>
-          </a:xfrm>
-          <a:prstGeom prst="rect">
-            <a:avLst/>
-          </a:prstGeom>
-          <a:noFill/>
-          <a:ln/>
-        </p:spPr>
-        <p:txBody>
-          <a:bodyPr wrap="square" lIns="0" tIns="0" rIns="0" bIns="0" rtlCol="0" anchor="ctr"/>
-          <a:lstStyle/>
-          <a:p>
-            <a:pPr indent="0" marL="0">
-              <a:buNone/>
-            </a:pPr>
-            <a:r>
-              <a:rPr lang="en-US" sz="1400" b="1" dirty="0">
-                <a:solidFill>
-                  <a:schemeClr val="tx2"/>
-                </a:solidFill>
-              </a:rPr>
-              <a:t>Worst course</a:t>
-            </a:r>
             <a:endParaRPr lang="en-US" sz="1400" dirty="0"/>
           </a:p>
         </p:txBody>
       </p:sp>
       <p:sp>
         <p:nvSpPr>
-          <p:cNvPr id="12" name="Run 4"/>
+          <p:cNvPr id="14" name="Run 4"/>
           <p:cNvSpPr/>
           <p:nvPr/>
         </p:nvSpPr>
         <p:spPr>
           <a:xfrm>
-            <a:off x="1783080" y="3291840"/>
-            <a:ext cx="1280160" cy="777240"/>
+            <a:off x="4700016" y="2651760"/>
+            <a:ext cx="914400" cy="749808"/>
           </a:xfrm>
           <a:prstGeom prst="roundRect">
             <a:avLst>
-              <a:gd name="adj" fmla="val 9412"/>
+              <a:gd name="adj" fmla="val 9756"/>
+            </a:avLst>
+          </a:prstGeom>
+          <a:solidFill>
+            <a:schemeClr val="tx2"/>
+          </a:solidFill>
+          <a:ln/>
+        </p:spPr>
+        <p:txBody>
+          <a:bodyPr wrap="square" lIns="0" tIns="0" rIns="0" bIns="0" rtlCol="0" anchor="ctr"/>
+          <a:lstStyle/>
+          <a:p>
+            <a:pPr algn="ctr" indent="0" marL="0">
+              <a:buNone/>
+            </a:pPr>
+            <a:r>
+              <a:rPr lang="en-US" sz="1400" b="1" dirty="0">
+                <a:solidFill>
+                  <a:schemeClr val="bg1"/>
+                </a:solidFill>
+              </a:rPr>
+              <a:t>Run 4</a:t>
+            </a:r>
+            <a:endParaRPr lang="en-US" sz="1400" dirty="0"/>
+          </a:p>
+        </p:txBody>
+      </p:sp>
+      <p:sp>
+        <p:nvSpPr>
+          <p:cNvPr id="15" name="Run 5"/>
+          <p:cNvSpPr/>
+          <p:nvPr/>
+        </p:nvSpPr>
+        <p:spPr>
+          <a:xfrm>
+            <a:off x="5687568" y="2651760"/>
+            <a:ext cx="914400" cy="749808"/>
+          </a:xfrm>
+          <a:prstGeom prst="roundRect">
+            <a:avLst>
+              <a:gd name="adj" fmla="val 9756"/>
+            </a:avLst>
+          </a:prstGeom>
+          <a:solidFill>
+            <a:schemeClr val="tx2"/>
+          </a:solidFill>
+          <a:ln/>
+        </p:spPr>
+        <p:txBody>
+          <a:bodyPr wrap="square" lIns="0" tIns="0" rIns="0" bIns="0" rtlCol="0" anchor="ctr"/>
+          <a:lstStyle/>
+          <a:p>
+            <a:pPr algn="ctr" indent="0" marL="0">
+              <a:buNone/>
+            </a:pPr>
+            <a:r>
+              <a:rPr lang="en-US" sz="1400" b="1" dirty="0">
+                <a:solidFill>
+                  <a:schemeClr val="bg1"/>
+                </a:solidFill>
+              </a:rPr>
+              <a:t>Run 5</a:t>
+            </a:r>
+            <a:endParaRPr lang="en-US" sz="1400" dirty="0"/>
+          </a:p>
+        </p:txBody>
+      </p:sp>
+      <p:sp>
+        <p:nvSpPr>
+          <p:cNvPr id="16" name="Course 2"/>
+          <p:cNvSpPr txBox="1"/>
+          <p:nvPr/>
+        </p:nvSpPr>
+        <p:spPr>
+          <a:xfrm>
+            <a:off x="548640" y="3520440"/>
+            <a:ext cx="1143000" cy="749808"/>
+          </a:xfrm>
+          <a:prstGeom prst="rect">
+            <a:avLst/>
+          </a:prstGeom>
+          <a:noFill/>
+          <a:ln/>
+        </p:spPr>
+        <p:txBody>
+          <a:bodyPr wrap="square" lIns="0" tIns="0" rIns="0" bIns="0" rtlCol="0" anchor="ctr"/>
+          <a:lstStyle/>
+          <a:p>
+            <a:pPr indent="0" marL="0">
+              <a:buNone/>
+            </a:pPr>
+            <a:r>
+              <a:rPr lang="en-US" sz="1400" b="1" dirty="0">
+                <a:solidFill>
+                  <a:schemeClr val="tx2"/>
+                </a:solidFill>
+              </a:rPr>
+              <a:t>Worst course</a:t>
+            </a:r>
+            <a:endParaRPr lang="en-US" sz="1400" dirty="0"/>
+          </a:p>
+        </p:txBody>
+      </p:sp>
+      <p:sp>
+        <p:nvSpPr>
+          <p:cNvPr id="17" name="Run 6"/>
+          <p:cNvSpPr/>
+          <p:nvPr/>
+        </p:nvSpPr>
+        <p:spPr>
+          <a:xfrm>
+            <a:off x="1737360" y="3520440"/>
+            <a:ext cx="914400" cy="749808"/>
+          </a:xfrm>
+          <a:prstGeom prst="roundRect">
+            <a:avLst>
+              <a:gd name="adj" fmla="val 9756"/>
             </a:avLst>
           </a:prstGeom>
           <a:solidFill>
@@ -7300,31 +7488,31 @@
               <a:buNone/>
             </a:pPr>
             <a:r>
-              <a:rPr lang="en-US" sz="1500" b="1" dirty="0">
+              <a:rPr lang="en-US" sz="1400" b="1" dirty="0">
                 <a:solidFill>
                   <a:schemeClr val="bg1"/>
                 </a:solidFill>
               </a:rPr>
-              <a:t>Run 4</a:t>
-            </a:r>
-            <a:endParaRPr lang="en-US" sz="1500" dirty="0"/>
-          </a:p>
-        </p:txBody>
-      </p:sp>
-      <p:sp>
-        <p:nvSpPr>
-          <p:cNvPr id="13" name="Run 5"/>
+              <a:t>Run 6</a:t>
+            </a:r>
+            <a:endParaRPr lang="en-US" sz="1400" dirty="0"/>
+          </a:p>
+        </p:txBody>
+      </p:sp>
+      <p:sp>
+        <p:nvSpPr>
+          <p:cNvPr id="18" name="Run 7"/>
           <p:cNvSpPr/>
           <p:nvPr/>
         </p:nvSpPr>
         <p:spPr>
           <a:xfrm>
-            <a:off x="3154680" y="3291840"/>
-            <a:ext cx="1280160" cy="777240"/>
+            <a:off x="2724912" y="3520440"/>
+            <a:ext cx="914400" cy="749808"/>
           </a:xfrm>
           <a:prstGeom prst="roundRect">
             <a:avLst>
-              <a:gd name="adj" fmla="val 9412"/>
+              <a:gd name="adj" fmla="val 9756"/>
             </a:avLst>
           </a:prstGeom>
           <a:solidFill>
@@ -7340,31 +7528,31 @@
               <a:buNone/>
             </a:pPr>
             <a:r>
-              <a:rPr lang="en-US" sz="1500" b="1" dirty="0">
+              <a:rPr lang="en-US" sz="1400" b="1" dirty="0">
                 <a:solidFill>
                   <a:schemeClr val="bg1"/>
                 </a:solidFill>
               </a:rPr>
-              <a:t>Run 5</a:t>
-            </a:r>
-            <a:endParaRPr lang="en-US" sz="1500" dirty="0"/>
-          </a:p>
-        </p:txBody>
-      </p:sp>
-      <p:sp>
-        <p:nvSpPr>
-          <p:cNvPr id="14" name="Run 6"/>
+              <a:t>Run 7</a:t>
+            </a:r>
+            <a:endParaRPr lang="en-US" sz="1400" dirty="0"/>
+          </a:p>
+        </p:txBody>
+      </p:sp>
+      <p:sp>
+        <p:nvSpPr>
+          <p:cNvPr id="19" name="Run 8"/>
           <p:cNvSpPr/>
           <p:nvPr/>
         </p:nvSpPr>
         <p:spPr>
           <a:xfrm>
-            <a:off x="4526280" y="3291840"/>
-            <a:ext cx="1280160" cy="777240"/>
+            <a:off x="3712464" y="3520440"/>
+            <a:ext cx="914400" cy="749808"/>
           </a:xfrm>
           <a:prstGeom prst="roundRect">
             <a:avLst>
-              <a:gd name="adj" fmla="val 9412"/>
+              <a:gd name="adj" fmla="val 9756"/>
             </a:avLst>
           </a:prstGeom>
           <a:solidFill>
@@ -7380,48 +7568,12 @@
               <a:buNone/>
             </a:pPr>
             <a:r>
-              <a:rPr lang="en-US" sz="1500" b="1" dirty="0">
+              <a:rPr lang="en-US" sz="1400" b="1" dirty="0">
                 <a:solidFill>
                   <a:schemeClr val="bg1"/>
                 </a:solidFill>
               </a:rPr>
-              <a:t>Run 6</a:t>
-            </a:r>
-            <a:endParaRPr lang="en-US" sz="1500" dirty="0"/>
-          </a:p>
-        </p:txBody>
-      </p:sp>
-      <p:sp>
-        <p:nvSpPr>
-          <p:cNvPr id="15" name="Course 3"/>
-          <p:cNvSpPr txBox="1"/>
-          <p:nvPr/>
-        </p:nvSpPr>
-        <p:spPr>
-          <a:xfrm>
-            <a:off x="548640" y="4206240"/>
-            <a:ext cx="1188720" cy="777240"/>
-          </a:xfrm>
-          <a:prstGeom prst="rect">
-            <a:avLst/>
-          </a:prstGeom>
-          <a:noFill/>
-          <a:ln/>
-        </p:spPr>
-        <p:txBody>
-          <a:bodyPr wrap="square" lIns="0" tIns="0" rIns="0" bIns="0" rtlCol="0" anchor="ctr"/>
-          <a:lstStyle/>
-          <a:p>
-            <a:pPr indent="0" marL="0">
-              <a:buNone/>
-            </a:pPr>
-            <a:r>
-              <a:rPr lang="en-US" sz="1400" b="1" dirty="0">
-                <a:solidFill>
-                  <a:schemeClr val="tx2"/>
-                </a:solidFill>
-              </a:rPr>
-              <a:t>CLiFF odds</a:t>
+              <a:t>Run 8</a:t>
             </a:r>
             <a:endParaRPr lang="en-US" sz="1400" dirty="0"/>
           </a:p>
@@ -7429,18 +7581,134 @@
       </p:sp>
       <p:sp>
         <p:nvSpPr>
-          <p:cNvPr id="16" name="Run 7"/>
+          <p:cNvPr id="20" name="Run 9"/>
           <p:cNvSpPr/>
           <p:nvPr/>
         </p:nvSpPr>
         <p:spPr>
           <a:xfrm>
-            <a:off x="1783080" y="4206240"/>
-            <a:ext cx="1965960" cy="777240"/>
+            <a:off x="4700016" y="3520440"/>
+            <a:ext cx="914400" cy="749808"/>
           </a:xfrm>
           <a:prstGeom prst="roundRect">
             <a:avLst>
-              <a:gd name="adj" fmla="val 9412"/>
+              <a:gd name="adj" fmla="val 9756"/>
+            </a:avLst>
+          </a:prstGeom>
+          <a:solidFill>
+            <a:schemeClr val="accent1"/>
+          </a:solidFill>
+          <a:ln/>
+        </p:spPr>
+        <p:txBody>
+          <a:bodyPr wrap="square" lIns="0" tIns="0" rIns="0" bIns="0" rtlCol="0" anchor="ctr"/>
+          <a:lstStyle/>
+          <a:p>
+            <a:pPr algn="ctr" indent="0" marL="0">
+              <a:buNone/>
+            </a:pPr>
+            <a:r>
+              <a:rPr lang="en-US" sz="1400" b="1" dirty="0">
+                <a:solidFill>
+                  <a:schemeClr val="bg1"/>
+                </a:solidFill>
+              </a:rPr>
+              <a:t>Run 9</a:t>
+            </a:r>
+            <a:endParaRPr lang="en-US" sz="1400" dirty="0"/>
+          </a:p>
+        </p:txBody>
+      </p:sp>
+      <p:sp>
+        <p:nvSpPr>
+          <p:cNvPr id="21" name="Run 10"/>
+          <p:cNvSpPr/>
+          <p:nvPr/>
+        </p:nvSpPr>
+        <p:spPr>
+          <a:xfrm>
+            <a:off x="5687568" y="3520440"/>
+            <a:ext cx="914400" cy="749808"/>
+          </a:xfrm>
+          <a:prstGeom prst="roundRect">
+            <a:avLst>
+              <a:gd name="adj" fmla="val 9756"/>
+            </a:avLst>
+          </a:prstGeom>
+          <a:solidFill>
+            <a:schemeClr val="accent1"/>
+          </a:solidFill>
+          <a:ln/>
+        </p:spPr>
+        <p:txBody>
+          <a:bodyPr wrap="square" lIns="0" tIns="0" rIns="0" bIns="0" rtlCol="0" anchor="ctr"/>
+          <a:lstStyle/>
+          <a:p>
+            <a:pPr algn="ctr" indent="0" marL="0">
+              <a:buNone/>
+            </a:pPr>
+            <a:r>
+              <a:rPr lang="en-US" sz="1400" b="1" dirty="0">
+                <a:solidFill>
+                  <a:schemeClr val="bg1"/>
+                </a:solidFill>
+              </a:rPr>
+              <a:t>Run 10</a:t>
+            </a:r>
+            <a:endParaRPr lang="en-US" sz="1400" dirty="0"/>
+          </a:p>
+        </p:txBody>
+      </p:sp>
+      <p:sp>
+        <p:nvSpPr>
+          <p:cNvPr id="22" name="Course 3"/>
+          <p:cNvSpPr txBox="1"/>
+          <p:nvPr/>
+        </p:nvSpPr>
+        <p:spPr>
+          <a:xfrm>
+            <a:off x="548640" y="4389120"/>
+            <a:ext cx="1143000" cy="749808"/>
+          </a:xfrm>
+          <a:prstGeom prst="rect">
+            <a:avLst/>
+          </a:prstGeom>
+          <a:noFill/>
+          <a:ln/>
+        </p:spPr>
+        <p:txBody>
+          <a:bodyPr wrap="square" lIns="0" tIns="0" rIns="0" bIns="0" rtlCol="0" anchor="ctr"/>
+          <a:lstStyle/>
+          <a:p>
+            <a:pPr indent="0" marL="0">
+              <a:buNone/>
+            </a:pPr>
+            <a:r>
+              <a:rPr lang="en-US" sz="1400" b="1" dirty="0">
+                <a:solidFill>
+                  <a:schemeClr val="tx2"/>
+                </a:solidFill>
+              </a:rPr>
+              <a:t>CLiFF odds</a:t>
+            </a:r>
+            <a:endParaRPr lang="en-US" sz="1400" dirty="0"/>
+          </a:p>
+        </p:txBody>
+      </p:sp>
+      <p:sp>
+        <p:nvSpPr>
+          <p:cNvPr id="23" name="Run 11"/>
+          <p:cNvSpPr/>
+          <p:nvPr/>
+        </p:nvSpPr>
+        <p:spPr>
+          <a:xfrm>
+            <a:off x="1737360" y="4389120"/>
+            <a:ext cx="2395728" cy="749808"/>
+          </a:xfrm>
+          <a:prstGeom prst="roundRect">
+            <a:avLst>
+              <a:gd name="adj" fmla="val 9756"/>
             </a:avLst>
           </a:prstGeom>
           <a:solidFill>
@@ -7456,31 +7724,31 @@
               <a:buNone/>
             </a:pPr>
             <a:r>
-              <a:rPr lang="en-US" sz="1500" b="1" dirty="0">
+              <a:rPr lang="en-US" sz="1400" b="1" dirty="0">
                 <a:solidFill>
                   <a:schemeClr val="tx2"/>
                 </a:solidFill>
               </a:rPr>
-              <a:t>Run 7</a:t>
-            </a:r>
-            <a:endParaRPr lang="en-US" sz="1500" dirty="0"/>
-          </a:p>
-        </p:txBody>
-      </p:sp>
-      <p:sp>
-        <p:nvSpPr>
-          <p:cNvPr id="17" name="Run 8"/>
+              <a:t>Run 11</a:t>
+            </a:r>
+            <a:endParaRPr lang="en-US" sz="1400" dirty="0"/>
+          </a:p>
+        </p:txBody>
+      </p:sp>
+      <p:sp>
+        <p:nvSpPr>
+          <p:cNvPr id="24" name="Run 12"/>
           <p:cNvSpPr/>
           <p:nvPr/>
         </p:nvSpPr>
         <p:spPr>
           <a:xfrm>
-            <a:off x="3840480" y="4206240"/>
-            <a:ext cx="1965960" cy="777240"/>
+            <a:off x="4206240" y="4389120"/>
+            <a:ext cx="2395728" cy="749808"/>
           </a:xfrm>
           <a:prstGeom prst="roundRect">
             <a:avLst>
-              <a:gd name="adj" fmla="val 9412"/>
+              <a:gd name="adj" fmla="val 9756"/>
             </a:avLst>
           </a:prstGeom>
           <a:solidFill>
@@ -7496,26 +7764,26 @@
               <a:buNone/>
             </a:pPr>
             <a:r>
-              <a:rPr lang="en-US" sz="1500" b="1" dirty="0">
+              <a:rPr lang="en-US" sz="1400" b="1" dirty="0">
                 <a:solidFill>
                   <a:schemeClr val="tx2"/>
                 </a:solidFill>
               </a:rPr>
-              <a:t>Run 8</a:t>
-            </a:r>
-            <a:endParaRPr lang="en-US" sz="1500" dirty="0"/>
-          </a:p>
-        </p:txBody>
-      </p:sp>
-      <p:sp>
-        <p:nvSpPr>
-          <p:cNvPr id="18" name="Clock circle"/>
+              <a:t>Run 12</a:t>
+            </a:r>
+            <a:endParaRPr lang="en-US" sz="1400" dirty="0"/>
+          </a:p>
+        </p:txBody>
+      </p:sp>
+      <p:sp>
+        <p:nvSpPr>
+          <p:cNvPr id="25" name="Clock circle"/>
           <p:cNvSpPr/>
           <p:nvPr/>
         </p:nvSpPr>
         <p:spPr>
           <a:xfrm>
-            <a:off x="548640" y="5349240"/>
+            <a:off x="548640" y="5440680"/>
             <a:ext cx="640080" cy="640080"/>
           </a:xfrm>
           <a:prstGeom prst="ellipse">
@@ -7529,7 +7797,7 @@
       </p:sp>
       <p:pic>
         <p:nvPicPr>
-          <p:cNvPr id="19" name="Clock icon" descr="preencoded.png">    </p:cNvPr>
+          <p:cNvPr id="26" name="Clock icon" descr="preencoded.png">    </p:cNvPr>
           <p:cNvPicPr>
             <a:picLocks noChangeAspect="1"/>
           </p:cNvPicPr>
@@ -7543,7 +7811,7 @@
         </p:blipFill>
         <p:spPr>
           <a:xfrm>
-            <a:off x="721462" y="5522062"/>
+            <a:off x="721462" y="5613502"/>
             <a:ext cx="294437" cy="294437"/>
           </a:xfrm>
           <a:prstGeom prst="rect">
@@ -7553,14 +7821,14 @@
       </p:pic>
       <p:sp>
         <p:nvSpPr>
-          <p:cNvPr id="20" name="Clock note"/>
+          <p:cNvPr id="27" name="Clock note"/>
           <p:cNvSpPr txBox="1"/>
           <p:nvPr/>
         </p:nvSpPr>
         <p:spPr>
           <a:xfrm>
-            <a:off x="1371600" y="5257800"/>
-            <a:ext cx="4480560" cy="868680"/>
+            <a:off x="1371600" y="5349240"/>
+            <a:ext cx="5120640" cy="822960"/>
           </a:xfrm>
           <a:prstGeom prst="rect">
             <a:avLst/>
@@ -7581,7 +7849,7 @@
                   <a:schemeClr val="tx1"/>
                 </a:solidFill>
               </a:rPr>
-              <a:t>The clock jumps ahead when nothing is happening, so a 10-day antibiotic course runs in seconds. Every run has a seed and can be replayed exactly.</a:t>
+              <a:t>The clock jumps ahead when nothing is happening, so a 10-day antibiotic course runs in seconds. Every run can be replayed exactly.</a:t>
             </a:r>
             <a:endParaRPr lang="en-US" sz="1400" dirty="0"/>
           </a:p>
@@ -7589,13 +7857,13 @@
       </p:sp>
       <p:graphicFrame>
         <p:nvGraphicFramePr>
-          <p:cNvPr id="21" name="Chart kit by vehicle" descr=""/>
+          <p:cNvPr id="28" name="Chart kit by vehicle" descr=""/>
           <p:cNvGraphicFramePr/>
           <p:nvPr/>
         </p:nvGraphicFramePr>
         <p:xfrm>
-          <a:off x="6309360" y="1325880"/>
-          <a:ext cx="5303520" cy="3931920"/>
+          <a:off x="6903720" y="1325880"/>
+          <a:ext cx="4709160" cy="3931920"/>
         </p:xfrm>
         <a:graphic xmlns:a="http://schemas.openxmlformats.org/drawingml/2006/main">
           <a:graphicData uri="http://schemas.openxmlformats.org/drawingml/2006/chart">
@@ -7605,14 +7873,14 @@
       </p:graphicFrame>
       <p:sp>
         <p:nvSpPr>
-          <p:cNvPr id="22" name="Kit note"/>
+          <p:cNvPr id="29" name="Kit note"/>
           <p:cNvSpPr txBox="1"/>
           <p:nvPr/>
         </p:nvSpPr>
         <p:spPr>
           <a:xfrm>
-            <a:off x="6309360" y="5394960"/>
-            <a:ext cx="5303520" cy="685800"/>
+            <a:off x="6903720" y="5394960"/>
+            <a:ext cx="4709160" cy="731520"/>
           </a:xfrm>
           <a:prstGeom prst="rect">
             <a:avLst/>
@@ -7633,7 +7901,7 @@
                   <a:schemeClr val="tx1"/>
                 </a:solidFill>
               </a:rPr>
-              <a:t>A checklist item that needs ultrasound is scored not applicable where none is aboard, rather than failed.</a:t>
+              <a:t>The lunar surface has the smallest kit. An item that needs equipment not aboard is scored not applicable, not failed.</a:t>
             </a:r>
             <a:endParaRPr lang="en-US" sz="1400" dirty="0"/>
           </a:p>
@@ -9104,7 +9372,7 @@
                   <a:schemeClr val="tx1"/>
                 </a:solidFill>
               </a:rPr>
-              <a:t>Scored on 19 checklist items plus the standard items, in all 8 runs. Values from the appendicitis CLiFF; pending physiologist review.</a:t>
+              <a:t>Scored on 19 checklist items plus the standard items, in every run. Values from the appendicitis CLiFF; pending physiologist review.</a:t>
             </a:r>
             <a:endParaRPr lang="en-US" sz="1400" dirty="0"/>
           </a:p>
@@ -9884,7 +10152,7 @@
                           <a:ea typeface="+mn-lt" pitchFamily="34" charset="-122"/>
                           <a:cs typeface="+mn-lt" pitchFamily="34" charset="-120"/>
                         </a:rPr>
-                        <a:t>Adapter for any assistant; MCP tools; AI crewmember; 8-run batches on a simple twin</a:t>
+                        <a:t>Adapter for any assistant; MCP tools; AI crewmember; up to 12 runs per scenario on a simple twin</a:t>
                       </a:r>
                       <a:endParaRPr lang="en-US" sz="1300" dirty="0">
                         <a:latin typeface="+mn-lt" charset="0"/>
